--- a/docs/Mercadinho-do-Lito-como-usar.pptx
+++ b/docs/Mercadinho-do-Lito-como-usar.pptx
@@ -510,7 +510,7 @@
           <a:p>
             <a:r>
               <a:rPr lang="en-US" dirty="0"/>
-              <a:t>Guia de uso do Mercadinho do Lito para os funcionários.</a:t>
+              <a:t>Guia de uso do Mercadinho do Lito para a equipe.</a:t>
             </a:r>
             <a:endParaRPr lang="en-US" dirty="0"/>
           </a:p>
@@ -1569,7 +1569,7 @@
     <p:bg>
       <p:bgPr>
         <a:solidFill>
-          <a:srgbClr val="0F462D"/>
+          <a:srgbClr val="002E53"/>
         </a:solidFill>
       </p:bgPr>
     </p:bg>
@@ -1595,44 +1595,68 @@
         </p:nvSpPr>
         <p:spPr>
           <a:xfrm>
-            <a:off x="8869680" y="-1645920"/>
-            <a:ext cx="4937760" cy="4937760"/>
+            <a:off x="9052560" y="-1828800"/>
+            <a:ext cx="5120640" cy="5120640"/>
           </a:xfrm>
           <a:prstGeom prst="ellipse">
             <a:avLst/>
           </a:prstGeom>
           <a:solidFill>
-            <a:srgbClr val="0A3421"/>
+            <a:srgbClr val="001D36"/>
           </a:solidFill>
           <a:ln/>
         </p:spPr>
       </p:sp>
-      <p:sp>
-        <p:nvSpPr>
-          <p:cNvPr id="3" name="Text 1"/>
-          <p:cNvSpPr/>
-          <p:nvPr/>
-        </p:nvSpPr>
-        <p:spPr>
-          <a:xfrm>
-            <a:off x="822960" y="2148840"/>
-            <a:ext cx="8686800" cy="822960"/>
-          </a:xfrm>
-          <a:prstGeom prst="rect">
-            <a:avLst/>
-          </a:prstGeom>
-          <a:noFill/>
-          <a:ln/>
-        </p:spPr>
-        <p:txBody>
-          <a:bodyPr wrap="square" lIns="0" tIns="0" rIns="0" bIns="0" rtlCol="0" anchor="ctr"/>
-          <a:lstStyle/>
-          <a:p>
-            <a:pPr indent="0" marL="0">
-              <a:buNone/>
-            </a:pPr>
-            <a:r>
-              <a:rPr lang="en-US" sz="4400" b="1" spc="200" kern="0" dirty="0">
+      <p:pic>
+        <p:nvPicPr>
+          <p:cNvPr id="3" name="Image 0" descr="preencoded.png">    </p:cNvPr>
+          <p:cNvPicPr>
+            <a:picLocks noChangeAspect="1"/>
+          </p:cNvPicPr>
+          <p:nvPr/>
+        </p:nvPicPr>
+        <p:blipFill>
+          <a:blip r:embed="rId1"/>
+          <a:stretch>
+            <a:fillRect/>
+          </a:stretch>
+        </p:blipFill>
+        <p:spPr>
+          <a:xfrm>
+            <a:off x="822960" y="1051560"/>
+            <a:ext cx="3108960" cy="1453896"/>
+          </a:xfrm>
+          <a:prstGeom prst="rect">
+            <a:avLst/>
+          </a:prstGeom>
+        </p:spPr>
+      </p:pic>
+      <p:sp>
+        <p:nvSpPr>
+          <p:cNvPr id="4" name="Text 1"/>
+          <p:cNvSpPr/>
+          <p:nvPr/>
+        </p:nvSpPr>
+        <p:spPr>
+          <a:xfrm>
+            <a:off x="822960" y="2880360"/>
+            <a:ext cx="8686800" cy="685800"/>
+          </a:xfrm>
+          <a:prstGeom prst="rect">
+            <a:avLst/>
+          </a:prstGeom>
+          <a:noFill/>
+          <a:ln/>
+        </p:spPr>
+        <p:txBody>
+          <a:bodyPr wrap="square" lIns="0" tIns="0" rIns="0" bIns="0" rtlCol="0" anchor="ctr"/>
+          <a:lstStyle/>
+          <a:p>
+            <a:pPr indent="0" marL="0">
+              <a:buNone/>
+            </a:pPr>
+            <a:r>
+              <a:rPr lang="en-US" sz="4000" b="1" spc="150" kern="0" dirty="0">
                 <a:solidFill>
                   <a:srgbClr val="FFFFFF"/>
                 </a:solidFill>
@@ -1640,97 +1664,119 @@
                 <a:ea typeface="Calibri" pitchFamily="34" charset="-122"/>
                 <a:cs typeface="Calibri" pitchFamily="34" charset="-120"/>
               </a:rPr>
-              <a:t>MERCADINHO </a:t>
-            </a:r>
-            <a:pPr indent="0" marL="0">
-              <a:buNone/>
-            </a:pPr>
-            <a:r>
-              <a:rPr lang="en-US" sz="4400" b="1" spc="200" kern="0" dirty="0">
-                <a:solidFill>
-                  <a:srgbClr val="29DF8C"/>
-                </a:solidFill>
-                <a:latin typeface="Calibri" pitchFamily="34" charset="0"/>
-                <a:ea typeface="Calibri" pitchFamily="34" charset="-122"/>
-                <a:cs typeface="Calibri" pitchFamily="34" charset="-120"/>
-              </a:rPr>
-              <a:t>DO LITO</a:t>
-            </a:r>
-            <a:endParaRPr lang="en-US" sz="4400" dirty="0"/>
-          </a:p>
-        </p:txBody>
-      </p:sp>
-      <p:sp>
-        <p:nvSpPr>
-          <p:cNvPr id="4" name="Text 2"/>
-          <p:cNvSpPr/>
-          <p:nvPr/>
-        </p:nvSpPr>
-        <p:spPr>
-          <a:xfrm>
-            <a:off x="822960" y="3063240"/>
-            <a:ext cx="7498080" cy="1005840"/>
-          </a:xfrm>
-          <a:prstGeom prst="rect">
-            <a:avLst/>
-          </a:prstGeom>
-          <a:noFill/>
-          <a:ln/>
-        </p:spPr>
-        <p:txBody>
-          <a:bodyPr wrap="square" lIns="0" tIns="0" rIns="0" bIns="0" rtlCol="0" anchor="ctr"/>
-          <a:lstStyle/>
-          <a:p>
-            <a:pPr indent="0" marL="0">
-              <a:lnSpc>
-                <a:spcPts val="2800"/>
-              </a:lnSpc>
-              <a:buNone/>
-            </a:pPr>
-            <a:r>
-              <a:rPr lang="en-US" sz="1900" dirty="0">
-                <a:solidFill>
-                  <a:srgbClr val="C9D9D1"/>
-                </a:solidFill>
-                <a:latin typeface="Calibri" pitchFamily="34" charset="0"/>
-                <a:ea typeface="Calibri" pitchFamily="34" charset="-122"/>
-                <a:cs typeface="Calibri" pitchFamily="34" charset="-120"/>
-              </a:rPr>
-              <a:t>Compre pelo celular, pague no PIX,</a:t>
-            </a:r>
-            <a:endParaRPr lang="en-US" sz="1900" dirty="0"/>
-          </a:p>
-          <a:p>
-            <a:pPr indent="0" marL="0">
-              <a:lnSpc>
-                <a:spcPts val="2800"/>
-              </a:lnSpc>
-              <a:buNone/>
-            </a:pPr>
-            <a:r>
-              <a:rPr lang="en-US" sz="1900" dirty="0">
-                <a:solidFill>
-                  <a:srgbClr val="C9D9D1"/>
-                </a:solidFill>
-                <a:latin typeface="Calibri" pitchFamily="34" charset="0"/>
-                <a:ea typeface="Calibri" pitchFamily="34" charset="-122"/>
-                <a:cs typeface="Calibri" pitchFamily="34" charset="-120"/>
-              </a:rPr>
-              <a:t>envie o comprovante. Simples assim.</a:t>
-            </a:r>
-            <a:endParaRPr lang="en-US" sz="1900" dirty="0"/>
-          </a:p>
-        </p:txBody>
-      </p:sp>
-      <p:sp>
-        <p:nvSpPr>
-          <p:cNvPr id="5" name="Text 3"/>
-          <p:cNvSpPr/>
-          <p:nvPr/>
-        </p:nvSpPr>
-        <p:spPr>
-          <a:xfrm>
-            <a:off x="822960" y="1371600"/>
+              <a:t>MERCADINHO DO LITO</a:t>
+            </a:r>
+            <a:endParaRPr lang="en-US" sz="4000" dirty="0"/>
+          </a:p>
+        </p:txBody>
+      </p:sp>
+      <p:sp>
+        <p:nvSpPr>
+          <p:cNvPr id="5" name="Shape 2"/>
+          <p:cNvSpPr/>
+          <p:nvPr/>
+        </p:nvSpPr>
+        <p:spPr>
+          <a:xfrm>
+            <a:off x="822960" y="3657600"/>
+            <a:ext cx="1371600" cy="54864"/>
+          </a:xfrm>
+          <a:prstGeom prst="rect">
+            <a:avLst/>
+          </a:prstGeom>
+          <a:solidFill>
+            <a:srgbClr val="1EC555"/>
+          </a:solidFill>
+          <a:ln/>
+        </p:spPr>
+      </p:sp>
+      <p:sp>
+        <p:nvSpPr>
+          <p:cNvPr id="6" name="Text 3"/>
+          <p:cNvSpPr/>
+          <p:nvPr/>
+        </p:nvSpPr>
+        <p:spPr>
+          <a:xfrm>
+            <a:off x="822960" y="3886200"/>
+            <a:ext cx="7498080" cy="411480"/>
+          </a:xfrm>
+          <a:prstGeom prst="rect">
+            <a:avLst/>
+          </a:prstGeom>
+          <a:noFill/>
+          <a:ln/>
+        </p:spPr>
+        <p:txBody>
+          <a:bodyPr wrap="square" lIns="0" tIns="0" rIns="0" bIns="0" rtlCol="0" anchor="ctr"/>
+          <a:lstStyle/>
+          <a:p>
+            <a:pPr indent="0" marL="0">
+              <a:buNone/>
+            </a:pPr>
+            <a:r>
+              <a:rPr lang="en-US" sz="1800" dirty="0">
+                <a:solidFill>
+                  <a:srgbClr val="AFC2D2"/>
+                </a:solidFill>
+                <a:latin typeface="Calibri" pitchFamily="34" charset="0"/>
+                <a:ea typeface="Calibri" pitchFamily="34" charset="-122"/>
+                <a:cs typeface="Calibri" pitchFamily="34" charset="-120"/>
+              </a:rPr>
+              <a:t>Compre pelo celular, pague no PIX e envie o comprovante.</a:t>
+            </a:r>
+            <a:endParaRPr lang="en-US" sz="1800" dirty="0"/>
+          </a:p>
+        </p:txBody>
+      </p:sp>
+      <p:sp>
+        <p:nvSpPr>
+          <p:cNvPr id="7" name="Text 4"/>
+          <p:cNvSpPr/>
+          <p:nvPr/>
+        </p:nvSpPr>
+        <p:spPr>
+          <a:xfrm>
+            <a:off x="822960" y="5669280"/>
+            <a:ext cx="5486400" cy="365760"/>
+          </a:xfrm>
+          <a:prstGeom prst="rect">
+            <a:avLst/>
+          </a:prstGeom>
+          <a:noFill/>
+          <a:ln/>
+        </p:spPr>
+        <p:txBody>
+          <a:bodyPr wrap="square" lIns="0" tIns="0" rIns="0" bIns="0" rtlCol="0" anchor="ctr"/>
+          <a:lstStyle/>
+          <a:p>
+            <a:pPr indent="0" marL="0">
+              <a:buNone/>
+            </a:pPr>
+            <a:r>
+              <a:rPr lang="en-US" sz="1500" b="1" dirty="0">
+                <a:solidFill>
+                  <a:srgbClr val="1EC555"/>
+                </a:solidFill>
+                <a:latin typeface="Calibri" pitchFamily="34" charset="0"/>
+                <a:ea typeface="Calibri" pitchFamily="34" charset="-122"/>
+                <a:cs typeface="Calibri" pitchFamily="34" charset="-120"/>
+              </a:rPr>
+              <a:t>mercadinho-sigma.vercel.app</a:t>
+            </a:r>
+            <a:endParaRPr lang="en-US" sz="1500" dirty="0"/>
+          </a:p>
+        </p:txBody>
+      </p:sp>
+      <p:sp>
+        <p:nvSpPr>
+          <p:cNvPr id="8" name="Text 5"/>
+          <p:cNvSpPr/>
+          <p:nvPr/>
+        </p:nvSpPr>
+        <p:spPr>
+          <a:xfrm>
+            <a:off x="822960" y="6035040"/>
             <a:ext cx="5486400" cy="274320"/>
           </a:xfrm>
           <a:prstGeom prst="rect">
@@ -1747,93 +1793,15 @@
               <a:buNone/>
             </a:pPr>
             <a:r>
-              <a:rPr lang="en-US" sz="1200" b="1" spc="300" kern="0" dirty="0">
-                <a:solidFill>
-                  <a:srgbClr val="29DF8C"/>
-                </a:solidFill>
-                <a:latin typeface="Calibri" pitchFamily="34" charset="0"/>
-                <a:ea typeface="Calibri" pitchFamily="34" charset="-122"/>
-                <a:cs typeface="Calibri" pitchFamily="34" charset="-120"/>
-              </a:rPr>
-              <a:t>LITO AVIATION ACADEMY</a:t>
-            </a:r>
-            <a:endParaRPr lang="en-US" sz="1200" dirty="0"/>
-          </a:p>
-        </p:txBody>
-      </p:sp>
-      <p:sp>
-        <p:nvSpPr>
-          <p:cNvPr id="6" name="Text 4"/>
-          <p:cNvSpPr/>
-          <p:nvPr/>
-        </p:nvSpPr>
-        <p:spPr>
-          <a:xfrm>
-            <a:off x="822960" y="5715000"/>
-            <a:ext cx="5486400" cy="365760"/>
-          </a:xfrm>
-          <a:prstGeom prst="rect">
-            <a:avLst/>
-          </a:prstGeom>
-          <a:noFill/>
-          <a:ln/>
-        </p:spPr>
-        <p:txBody>
-          <a:bodyPr wrap="square" lIns="0" tIns="0" rIns="0" bIns="0" rtlCol="0" anchor="ctr"/>
-          <a:lstStyle/>
-          <a:p>
-            <a:pPr indent="0" marL="0">
-              <a:buNone/>
-            </a:pPr>
-            <a:r>
-              <a:rPr lang="en-US" sz="1500" b="1" dirty="0">
-                <a:solidFill>
-                  <a:srgbClr val="FFFFFF"/>
-                </a:solidFill>
-                <a:latin typeface="Calibri" pitchFamily="34" charset="0"/>
-                <a:ea typeface="Calibri" pitchFamily="34" charset="-122"/>
-                <a:cs typeface="Calibri" pitchFamily="34" charset="-120"/>
-              </a:rPr>
-              <a:t>mercadinho-sigma.vercel.app</a:t>
-            </a:r>
-            <a:endParaRPr lang="en-US" sz="1500" dirty="0"/>
-          </a:p>
-        </p:txBody>
-      </p:sp>
-      <p:sp>
-        <p:nvSpPr>
-          <p:cNvPr id="7" name="Text 5"/>
-          <p:cNvSpPr/>
-          <p:nvPr/>
-        </p:nvSpPr>
-        <p:spPr>
-          <a:xfrm>
-            <a:off x="822960" y="6080760"/>
-            <a:ext cx="5486400" cy="274320"/>
-          </a:xfrm>
-          <a:prstGeom prst="rect">
-            <a:avLst/>
-          </a:prstGeom>
-          <a:noFill/>
-          <a:ln/>
-        </p:spPr>
-        <p:txBody>
-          <a:bodyPr wrap="square" lIns="0" tIns="0" rIns="0" bIns="0" rtlCol="0" anchor="ctr"/>
-          <a:lstStyle/>
-          <a:p>
-            <a:pPr indent="0" marL="0">
-              <a:buNone/>
-            </a:pPr>
-            <a:r>
               <a:rPr lang="en-US" sz="1200" dirty="0">
                 <a:solidFill>
-                  <a:srgbClr val="8FA79A"/>
-                </a:solidFill>
-                <a:latin typeface="Calibri" pitchFamily="34" charset="0"/>
-                <a:ea typeface="Calibri" pitchFamily="34" charset="-122"/>
-                <a:cs typeface="Calibri" pitchFamily="34" charset="-120"/>
-              </a:rPr>
-              <a:t>Guia rápido para funcionários</a:t>
+                  <a:srgbClr val="7E93A6"/>
+                </a:solidFill>
+                <a:latin typeface="Calibri" pitchFamily="34" charset="0"/>
+                <a:ea typeface="Calibri" pitchFamily="34" charset="-122"/>
+                <a:cs typeface="Calibri" pitchFamily="34" charset="-120"/>
+              </a:rPr>
+              <a:t>Guia rápido para a equipe</a:t>
             </a:r>
             <a:endParaRPr lang="en-US" sz="1200" dirty="0"/>
           </a:p>
@@ -1853,7 +1821,7 @@
     <p:bg>
       <p:bgPr>
         <a:solidFill>
-          <a:srgbClr val="F2F5F9"/>
+          <a:srgbClr val="F4F5F7"/>
         </a:solidFill>
       </p:bgPr>
     </p:bg>
@@ -1879,26 +1847,26 @@
         </p:nvSpPr>
         <p:spPr>
           <a:xfrm>
-            <a:off x="731520" y="457200"/>
-            <a:ext cx="2743200" cy="274320"/>
-          </a:xfrm>
-          <a:prstGeom prst="rect">
-            <a:avLst/>
-          </a:prstGeom>
-          <a:noFill/>
-          <a:ln/>
-        </p:spPr>
-        <p:txBody>
-          <a:bodyPr wrap="square" lIns="0" tIns="0" rIns="0" bIns="0" rtlCol="0" anchor="ctr"/>
-          <a:lstStyle/>
-          <a:p>
-            <a:pPr algn="l" indent="0" marL="0">
+            <a:off x="731520" y="475488"/>
+            <a:ext cx="4572000" cy="274320"/>
+          </a:xfrm>
+          <a:prstGeom prst="rect">
+            <a:avLst/>
+          </a:prstGeom>
+          <a:noFill/>
+          <a:ln/>
+        </p:spPr>
+        <p:txBody>
+          <a:bodyPr wrap="square" lIns="0" tIns="0" rIns="0" bIns="0" rtlCol="0" anchor="ctr"/>
+          <a:lstStyle/>
+          <a:p>
+            <a:pPr indent="0" marL="0">
               <a:buNone/>
             </a:pPr>
             <a:r>
               <a:rPr lang="en-US" sz="1200" b="1" spc="250" kern="0" dirty="0">
                 <a:solidFill>
-                  <a:srgbClr val="0F462D"/>
+                  <a:srgbClr val="002E53"/>
                 </a:solidFill>
                 <a:latin typeface="Calibri" pitchFamily="34" charset="0"/>
                 <a:ea typeface="Calibri" pitchFamily="34" charset="-122"/>
@@ -1918,26 +1886,26 @@
         </p:nvSpPr>
         <p:spPr>
           <a:xfrm>
-            <a:off x="731520" y="777240"/>
-            <a:ext cx="10698480" cy="777240"/>
-          </a:xfrm>
-          <a:prstGeom prst="rect">
-            <a:avLst/>
-          </a:prstGeom>
-          <a:noFill/>
-          <a:ln/>
-        </p:spPr>
-        <p:txBody>
-          <a:bodyPr wrap="square" lIns="0" tIns="0" rIns="0" bIns="0" rtlCol="0" anchor="ctr"/>
-          <a:lstStyle/>
-          <a:p>
-            <a:pPr indent="0" marL="0">
-              <a:buNone/>
-            </a:pPr>
-            <a:r>
-              <a:rPr lang="en-US" sz="3800" b="1" dirty="0">
-                <a:solidFill>
-                  <a:srgbClr val="0F462D"/>
+            <a:off x="731520" y="749808"/>
+            <a:ext cx="10698480" cy="731520"/>
+          </a:xfrm>
+          <a:prstGeom prst="rect">
+            <a:avLst/>
+          </a:prstGeom>
+          <a:noFill/>
+          <a:ln/>
+        </p:spPr>
+        <p:txBody>
+          <a:bodyPr wrap="square" lIns="0" tIns="0" rIns="0" bIns="0" rtlCol="0" anchor="ctr"/>
+          <a:lstStyle/>
+          <a:p>
+            <a:pPr indent="0" marL="0">
+              <a:buNone/>
+            </a:pPr>
+            <a:r>
+              <a:rPr lang="en-US" sz="3600" b="1" dirty="0">
+                <a:solidFill>
+                  <a:srgbClr val="002E53"/>
                 </a:solidFill>
                 <a:latin typeface="Calibri" pitchFamily="34" charset="0"/>
                 <a:ea typeface="Calibri" pitchFamily="34" charset="-122"/>
@@ -1945,7 +1913,7 @@
               </a:rPr>
               <a:t>Como funciona</a:t>
             </a:r>
-            <a:endParaRPr lang="en-US" sz="3800" dirty="0"/>
+            <a:endParaRPr lang="en-US" sz="3600" dirty="0"/>
           </a:p>
         </p:txBody>
       </p:sp>
@@ -1957,12 +1925,12 @@
         </p:nvSpPr>
         <p:spPr>
           <a:xfrm>
-            <a:off x="731520" y="1965960"/>
-            <a:ext cx="3383280" cy="2514600"/>
+            <a:off x="731520" y="1920240"/>
+            <a:ext cx="3383280" cy="2468880"/>
           </a:xfrm>
           <a:prstGeom prst="roundRect">
             <a:avLst>
-              <a:gd name="adj" fmla="val 4364"/>
+              <a:gd name="adj" fmla="val 3704"/>
             </a:avLst>
           </a:prstGeom>
           <a:solidFill>
@@ -1970,14 +1938,14 @@
           </a:solidFill>
           <a:ln w="12700">
             <a:solidFill>
-              <a:srgbClr val="E2E8EF"/>
+              <a:srgbClr val="E3E6EA"/>
             </a:solidFill>
             <a:prstDash val="solid"/>
           </a:ln>
           <a:effectLst>
             <a:outerShdw sx="100000" sy="100000" kx="0" ky="0" algn="bl" rotWithShape="0" blurRad="127000" dist="25400" dir="5400000">
-              <a:srgbClr val="9AA5B1">
-                <a:alpha val="25000"/>
+              <a:srgbClr val="AAB2BC">
+                <a:alpha val="30000"/>
               </a:srgbClr>
             </a:outerShdw>
           </a:effectLst>
@@ -1991,14 +1959,14 @@
         </p:nvSpPr>
         <p:spPr>
           <a:xfrm>
-            <a:off x="1115568" y="2331720"/>
-            <a:ext cx="566928" cy="566928"/>
+            <a:off x="1097280" y="2286000"/>
+            <a:ext cx="548640" cy="548640"/>
           </a:xfrm>
           <a:prstGeom prst="ellipse">
             <a:avLst/>
           </a:prstGeom>
           <a:solidFill>
-            <a:srgbClr val="29DF8C"/>
+            <a:srgbClr val="1EC555"/>
           </a:solidFill>
           <a:ln/>
         </p:spPr>
@@ -2011,8 +1979,8 @@
         </p:nvSpPr>
         <p:spPr>
           <a:xfrm>
-            <a:off x="1115568" y="2331720"/>
-            <a:ext cx="566928" cy="566928"/>
+            <a:off x="1097280" y="2286000"/>
+            <a:ext cx="548640" cy="548640"/>
           </a:xfrm>
           <a:prstGeom prst="rect">
             <a:avLst/>
@@ -2028,9 +1996,9 @@
               <a:buNone/>
             </a:pPr>
             <a:r>
-              <a:rPr lang="en-US" sz="2200" b="1" dirty="0">
-                <a:solidFill>
-                  <a:srgbClr val="0A3421"/>
+              <a:rPr lang="en-US" sz="2100" b="1" dirty="0">
+                <a:solidFill>
+                  <a:srgbClr val="002E53"/>
                 </a:solidFill>
                 <a:latin typeface="Calibri" pitchFamily="34" charset="0"/>
                 <a:ea typeface="Calibri" pitchFamily="34" charset="-122"/>
@@ -2038,7 +2006,7 @@
               </a:rPr>
               <a:t>1</a:t>
             </a:r>
-            <a:endParaRPr lang="en-US" sz="2200" dirty="0"/>
+            <a:endParaRPr lang="en-US" sz="2100" dirty="0"/>
           </a:p>
         </p:txBody>
       </p:sp>
@@ -2050,8 +2018,8 @@
         </p:nvSpPr>
         <p:spPr>
           <a:xfrm>
-            <a:off x="1115568" y="3063240"/>
-            <a:ext cx="2651760" cy="365760"/>
+            <a:off x="1097280" y="2999232"/>
+            <a:ext cx="2651760" cy="347472"/>
           </a:xfrm>
           <a:prstGeom prst="rect">
             <a:avLst/>
@@ -2069,7 +2037,7 @@
             <a:r>
               <a:rPr lang="en-US" sz="1800" b="1" dirty="0">
                 <a:solidFill>
-                  <a:srgbClr val="0F462D"/>
+                  <a:srgbClr val="002E53"/>
                 </a:solidFill>
                 <a:latin typeface="Calibri" pitchFamily="34" charset="0"/>
                 <a:ea typeface="Calibri" pitchFamily="34" charset="-122"/>
@@ -2089,7 +2057,7 @@
         </p:nvSpPr>
         <p:spPr>
           <a:xfrm>
-            <a:off x="1115568" y="3474720"/>
+            <a:off x="1097280" y="3401568"/>
             <a:ext cx="2651760" cy="914400"/>
           </a:xfrm>
           <a:prstGeom prst="rect">
@@ -2111,7 +2079,7 @@
             <a:r>
               <a:rPr lang="en-US" sz="1350" dirty="0">
                 <a:solidFill>
-                  <a:srgbClr val="6B7280"/>
+                  <a:srgbClr val="6E7A87"/>
                 </a:solidFill>
                 <a:latin typeface="Calibri" pitchFamily="34" charset="0"/>
                 <a:ea typeface="Calibri" pitchFamily="34" charset="-122"/>
@@ -2131,12 +2099,12 @@
         </p:nvSpPr>
         <p:spPr>
           <a:xfrm>
-            <a:off x="4416552" y="1965960"/>
-            <a:ext cx="3383280" cy="2514600"/>
+            <a:off x="4416552" y="1920240"/>
+            <a:ext cx="3383280" cy="2468880"/>
           </a:xfrm>
           <a:prstGeom prst="roundRect">
             <a:avLst>
-              <a:gd name="adj" fmla="val 4364"/>
+              <a:gd name="adj" fmla="val 3704"/>
             </a:avLst>
           </a:prstGeom>
           <a:solidFill>
@@ -2144,14 +2112,14 @@
           </a:solidFill>
           <a:ln w="12700">
             <a:solidFill>
-              <a:srgbClr val="E2E8EF"/>
+              <a:srgbClr val="E3E6EA"/>
             </a:solidFill>
             <a:prstDash val="solid"/>
           </a:ln>
           <a:effectLst>
             <a:outerShdw sx="100000" sy="100000" kx="0" ky="0" algn="bl" rotWithShape="0" blurRad="127000" dist="25400" dir="5400000">
-              <a:srgbClr val="9AA5B1">
-                <a:alpha val="25000"/>
+              <a:srgbClr val="AAB2BC">
+                <a:alpha val="30000"/>
               </a:srgbClr>
             </a:outerShdw>
           </a:effectLst>
@@ -2165,14 +2133,14 @@
         </p:nvSpPr>
         <p:spPr>
           <a:xfrm>
-            <a:off x="4800600" y="2331720"/>
-            <a:ext cx="566928" cy="566928"/>
+            <a:off x="4782312" y="2286000"/>
+            <a:ext cx="548640" cy="548640"/>
           </a:xfrm>
           <a:prstGeom prst="ellipse">
             <a:avLst/>
           </a:prstGeom>
           <a:solidFill>
-            <a:srgbClr val="29DF8C"/>
+            <a:srgbClr val="1EC555"/>
           </a:solidFill>
           <a:ln/>
         </p:spPr>
@@ -2185,8 +2153,8 @@
         </p:nvSpPr>
         <p:spPr>
           <a:xfrm>
-            <a:off x="4800600" y="2331720"/>
-            <a:ext cx="566928" cy="566928"/>
+            <a:off x="4782312" y="2286000"/>
+            <a:ext cx="548640" cy="548640"/>
           </a:xfrm>
           <a:prstGeom prst="rect">
             <a:avLst/>
@@ -2202,9 +2170,9 @@
               <a:buNone/>
             </a:pPr>
             <a:r>
-              <a:rPr lang="en-US" sz="2200" b="1" dirty="0">
-                <a:solidFill>
-                  <a:srgbClr val="0A3421"/>
+              <a:rPr lang="en-US" sz="2100" b="1" dirty="0">
+                <a:solidFill>
+                  <a:srgbClr val="002E53"/>
                 </a:solidFill>
                 <a:latin typeface="Calibri" pitchFamily="34" charset="0"/>
                 <a:ea typeface="Calibri" pitchFamily="34" charset="-122"/>
@@ -2212,7 +2180,7 @@
               </a:rPr>
               <a:t>2</a:t>
             </a:r>
-            <a:endParaRPr lang="en-US" sz="2200" dirty="0"/>
+            <a:endParaRPr lang="en-US" sz="2100" dirty="0"/>
           </a:p>
         </p:txBody>
       </p:sp>
@@ -2224,8 +2192,8 @@
         </p:nvSpPr>
         <p:spPr>
           <a:xfrm>
-            <a:off x="4800600" y="3063240"/>
-            <a:ext cx="2651760" cy="365760"/>
+            <a:off x="4782312" y="2999232"/>
+            <a:ext cx="2651760" cy="347472"/>
           </a:xfrm>
           <a:prstGeom prst="rect">
             <a:avLst/>
@@ -2243,7 +2211,7 @@
             <a:r>
               <a:rPr lang="en-US" sz="1800" b="1" dirty="0">
                 <a:solidFill>
-                  <a:srgbClr val="0F462D"/>
+                  <a:srgbClr val="002E53"/>
                 </a:solidFill>
                 <a:latin typeface="Calibri" pitchFamily="34" charset="0"/>
                 <a:ea typeface="Calibri" pitchFamily="34" charset="-122"/>
@@ -2263,7 +2231,7 @@
         </p:nvSpPr>
         <p:spPr>
           <a:xfrm>
-            <a:off x="4800600" y="3474720"/>
+            <a:off x="4782312" y="3401568"/>
             <a:ext cx="2651760" cy="914400"/>
           </a:xfrm>
           <a:prstGeom prst="rect">
@@ -2285,7 +2253,7 @@
             <a:r>
               <a:rPr lang="en-US" sz="1350" dirty="0">
                 <a:solidFill>
-                  <a:srgbClr val="6B7280"/>
+                  <a:srgbClr val="6E7A87"/>
                 </a:solidFill>
                 <a:latin typeface="Calibri" pitchFamily="34" charset="0"/>
                 <a:ea typeface="Calibri" pitchFamily="34" charset="-122"/>
@@ -2305,12 +2273,12 @@
         </p:nvSpPr>
         <p:spPr>
           <a:xfrm>
-            <a:off x="8101584" y="1965960"/>
-            <a:ext cx="3383280" cy="2514600"/>
+            <a:off x="8101584" y="1920240"/>
+            <a:ext cx="3383280" cy="2468880"/>
           </a:xfrm>
           <a:prstGeom prst="roundRect">
             <a:avLst>
-              <a:gd name="adj" fmla="val 4364"/>
+              <a:gd name="adj" fmla="val 3704"/>
             </a:avLst>
           </a:prstGeom>
           <a:solidFill>
@@ -2318,14 +2286,14 @@
           </a:solidFill>
           <a:ln w="12700">
             <a:solidFill>
-              <a:srgbClr val="E2E8EF"/>
+              <a:srgbClr val="E3E6EA"/>
             </a:solidFill>
             <a:prstDash val="solid"/>
           </a:ln>
           <a:effectLst>
             <a:outerShdw sx="100000" sy="100000" kx="0" ky="0" algn="bl" rotWithShape="0" blurRad="127000" dist="25400" dir="5400000">
-              <a:srgbClr val="9AA5B1">
-                <a:alpha val="25000"/>
+              <a:srgbClr val="AAB2BC">
+                <a:alpha val="30000"/>
               </a:srgbClr>
             </a:outerShdw>
           </a:effectLst>
@@ -2339,14 +2307,14 @@
         </p:nvSpPr>
         <p:spPr>
           <a:xfrm>
-            <a:off x="8485632" y="2331720"/>
-            <a:ext cx="566928" cy="566928"/>
+            <a:off x="8467344" y="2286000"/>
+            <a:ext cx="548640" cy="548640"/>
           </a:xfrm>
           <a:prstGeom prst="ellipse">
             <a:avLst/>
           </a:prstGeom>
           <a:solidFill>
-            <a:srgbClr val="29DF8C"/>
+            <a:srgbClr val="1EC555"/>
           </a:solidFill>
           <a:ln/>
         </p:spPr>
@@ -2359,8 +2327,8 @@
         </p:nvSpPr>
         <p:spPr>
           <a:xfrm>
-            <a:off x="8485632" y="2331720"/>
-            <a:ext cx="566928" cy="566928"/>
+            <a:off x="8467344" y="2286000"/>
+            <a:ext cx="548640" cy="548640"/>
           </a:xfrm>
           <a:prstGeom prst="rect">
             <a:avLst/>
@@ -2376,9 +2344,9 @@
               <a:buNone/>
             </a:pPr>
             <a:r>
-              <a:rPr lang="en-US" sz="2200" b="1" dirty="0">
-                <a:solidFill>
-                  <a:srgbClr val="0A3421"/>
+              <a:rPr lang="en-US" sz="2100" b="1" dirty="0">
+                <a:solidFill>
+                  <a:srgbClr val="002E53"/>
                 </a:solidFill>
                 <a:latin typeface="Calibri" pitchFamily="34" charset="0"/>
                 <a:ea typeface="Calibri" pitchFamily="34" charset="-122"/>
@@ -2386,7 +2354,7 @@
               </a:rPr>
               <a:t>3</a:t>
             </a:r>
-            <a:endParaRPr lang="en-US" sz="2200" dirty="0"/>
+            <a:endParaRPr lang="en-US" sz="2100" dirty="0"/>
           </a:p>
         </p:txBody>
       </p:sp>
@@ -2398,8 +2366,8 @@
         </p:nvSpPr>
         <p:spPr>
           <a:xfrm>
-            <a:off x="8485632" y="3063240"/>
-            <a:ext cx="2651760" cy="365760"/>
+            <a:off x="8467344" y="2999232"/>
+            <a:ext cx="2651760" cy="347472"/>
           </a:xfrm>
           <a:prstGeom prst="rect">
             <a:avLst/>
@@ -2417,7 +2385,7 @@
             <a:r>
               <a:rPr lang="en-US" sz="1800" b="1" dirty="0">
                 <a:solidFill>
-                  <a:srgbClr val="0F462D"/>
+                  <a:srgbClr val="002E53"/>
                 </a:solidFill>
                 <a:latin typeface="Calibri" pitchFamily="34" charset="0"/>
                 <a:ea typeface="Calibri" pitchFamily="34" charset="-122"/>
@@ -2437,7 +2405,7 @@
         </p:nvSpPr>
         <p:spPr>
           <a:xfrm>
-            <a:off x="8485632" y="3474720"/>
+            <a:off x="8467344" y="3401568"/>
             <a:ext cx="2651760" cy="914400"/>
           </a:xfrm>
           <a:prstGeom prst="rect">
@@ -2459,7 +2427,7 @@
             <a:r>
               <a:rPr lang="en-US" sz="1350" dirty="0">
                 <a:solidFill>
-                  <a:srgbClr val="6B7280"/>
+                  <a:srgbClr val="6E7A87"/>
                 </a:solidFill>
                 <a:latin typeface="Calibri" pitchFamily="34" charset="0"/>
                 <a:ea typeface="Calibri" pitchFamily="34" charset="-122"/>
@@ -2479,23 +2447,18 @@
         </p:nvSpPr>
         <p:spPr>
           <a:xfrm>
-            <a:off x="731520" y="4800600"/>
+            <a:off x="731520" y="4709160"/>
             <a:ext cx="10698480" cy="777240"/>
           </a:xfrm>
           <a:prstGeom prst="roundRect">
             <a:avLst>
-              <a:gd name="adj" fmla="val 14118"/>
+              <a:gd name="adj" fmla="val 11765"/>
             </a:avLst>
           </a:prstGeom>
           <a:solidFill>
-            <a:srgbClr val="E4F7EE"/>
+            <a:srgbClr val="002E53"/>
           </a:solidFill>
-          <a:ln w="12700">
-            <a:solidFill>
-              <a:srgbClr val="BCE8D5"/>
-            </a:solidFill>
-            <a:prstDash val="solid"/>
-          </a:ln>
+          <a:ln/>
         </p:spPr>
       </p:sp>
       <p:sp>
@@ -2506,7 +2469,7 @@
         </p:nvSpPr>
         <p:spPr>
           <a:xfrm>
-            <a:off x="1051560" y="4983480"/>
+            <a:off x="1051560" y="4892040"/>
             <a:ext cx="10058400" cy="411480"/>
           </a:xfrm>
           <a:prstGeom prst="rect">
@@ -2525,7 +2488,7 @@
             <a:r>
               <a:rPr lang="en-US" sz="1400" b="1" dirty="0">
                 <a:solidFill>
-                  <a:srgbClr val="0F462D"/>
+                  <a:srgbClr val="1EC555"/>
                 </a:solidFill>
                 <a:latin typeface="Calibri" pitchFamily="34" charset="0"/>
                 <a:ea typeface="Calibri" pitchFamily="34" charset="-122"/>
@@ -2539,54 +2502,78 @@
             <a:r>
               <a:rPr lang="en-US" sz="1400" dirty="0">
                 <a:solidFill>
-                  <a:srgbClr val="23282C"/>
-                </a:solidFill>
-                <a:latin typeface="Calibri" pitchFamily="34" charset="0"/>
-                <a:ea typeface="Calibri" pitchFamily="34" charset="-122"/>
-                <a:cs typeface="Calibri" pitchFamily="34" charset="-120"/>
-              </a:rPr>
-              <a:t>Tudo fica no seu histórico e o setor administrativo confere os pagamentos pelo sistema.</a:t>
+                  <a:srgbClr val="FFFFFF"/>
+                </a:solidFill>
+                <a:latin typeface="Calibri" pitchFamily="34" charset="0"/>
+                <a:ea typeface="Calibri" pitchFamily="34" charset="-122"/>
+                <a:cs typeface="Calibri" pitchFamily="34" charset="-120"/>
+              </a:rPr>
+              <a:t>Tudo fica no seu histórico e a administração confere os pagamentos pelo sistema.</a:t>
             </a:r>
             <a:endParaRPr lang="en-US" sz="1400" dirty="0"/>
           </a:p>
         </p:txBody>
       </p:sp>
-      <p:sp>
-        <p:nvSpPr>
-          <p:cNvPr id="21" name="Text 19"/>
-          <p:cNvSpPr/>
-          <p:nvPr/>
-        </p:nvSpPr>
-        <p:spPr>
-          <a:xfrm>
-            <a:off x="731520" y="6199632"/>
-            <a:ext cx="10698480" cy="274320"/>
-          </a:xfrm>
-          <a:prstGeom prst="rect">
-            <a:avLst/>
-          </a:prstGeom>
-          <a:noFill/>
-          <a:ln/>
-        </p:spPr>
-        <p:txBody>
-          <a:bodyPr wrap="square" lIns="0" tIns="0" rIns="0" bIns="0" rtlCol="0" anchor="ctr"/>
-          <a:lstStyle/>
-          <a:p>
-            <a:pPr indent="0" marL="0">
-              <a:buNone/>
-            </a:pPr>
-            <a:r>
-              <a:rPr lang="en-US" sz="1100" dirty="0">
-                <a:solidFill>
-                  <a:srgbClr val="A5AEB8"/>
-                </a:solidFill>
-                <a:latin typeface="Calibri" pitchFamily="34" charset="0"/>
-                <a:ea typeface="Calibri" pitchFamily="34" charset="-122"/>
-                <a:cs typeface="Calibri" pitchFamily="34" charset="-120"/>
-              </a:rPr>
-              <a:t>Mercadinho do Lito · Lito Aviation Academy</a:t>
-            </a:r>
-            <a:endParaRPr lang="en-US" sz="1100" dirty="0"/>
+      <p:pic>
+        <p:nvPicPr>
+          <p:cNvPr id="21" name="Image 0" descr="preencoded.png">    </p:cNvPr>
+          <p:cNvPicPr>
+            <a:picLocks noChangeAspect="1"/>
+          </p:cNvPicPr>
+          <p:nvPr/>
+        </p:nvPicPr>
+        <p:blipFill>
+          <a:blip r:embed="rId1"/>
+          <a:stretch>
+            <a:fillRect/>
+          </a:stretch>
+        </p:blipFill>
+        <p:spPr>
+          <a:xfrm>
+            <a:off x="731520" y="6108192"/>
+            <a:ext cx="1051560" cy="493776"/>
+          </a:xfrm>
+          <a:prstGeom prst="rect">
+            <a:avLst/>
+          </a:prstGeom>
+        </p:spPr>
+      </p:pic>
+      <p:sp>
+        <p:nvSpPr>
+          <p:cNvPr id="22" name="Text 19"/>
+          <p:cNvSpPr/>
+          <p:nvPr/>
+        </p:nvSpPr>
+        <p:spPr>
+          <a:xfrm>
+            <a:off x="1920240" y="6199632"/>
+            <a:ext cx="5486400" cy="274320"/>
+          </a:xfrm>
+          <a:prstGeom prst="rect">
+            <a:avLst/>
+          </a:prstGeom>
+          <a:noFill/>
+          <a:ln/>
+        </p:spPr>
+        <p:txBody>
+          <a:bodyPr wrap="square" lIns="0" tIns="0" rIns="0" bIns="0" rtlCol="0" anchor="ctr"/>
+          <a:lstStyle/>
+          <a:p>
+            <a:pPr indent="0" marL="0">
+              <a:buNone/>
+            </a:pPr>
+            <a:r>
+              <a:rPr lang="en-US" sz="1050" dirty="0">
+                <a:solidFill>
+                  <a:srgbClr val="B0AAAA"/>
+                </a:solidFill>
+                <a:latin typeface="Calibri" pitchFamily="34" charset="0"/>
+                <a:ea typeface="Calibri" pitchFamily="34" charset="-122"/>
+                <a:cs typeface="Calibri" pitchFamily="34" charset="-120"/>
+              </a:rPr>
+              <a:t>Mercadinho do Lito · uso interno</a:t>
+            </a:r>
+            <a:endParaRPr lang="en-US" sz="1050" dirty="0"/>
           </a:p>
         </p:txBody>
       </p:sp>
@@ -2604,7 +2591,7 @@
     <p:bg>
       <p:bgPr>
         <a:solidFill>
-          <a:srgbClr val="F2F5F9"/>
+          <a:srgbClr val="F4F5F7"/>
         </a:solidFill>
       </p:bgPr>
     </p:bg>
@@ -2630,26 +2617,26 @@
         </p:nvSpPr>
         <p:spPr>
           <a:xfrm>
-            <a:off x="731520" y="457200"/>
-            <a:ext cx="2743200" cy="274320"/>
-          </a:xfrm>
-          <a:prstGeom prst="rect">
-            <a:avLst/>
-          </a:prstGeom>
-          <a:noFill/>
-          <a:ln/>
-        </p:spPr>
-        <p:txBody>
-          <a:bodyPr wrap="square" lIns="0" tIns="0" rIns="0" bIns="0" rtlCol="0" anchor="ctr"/>
-          <a:lstStyle/>
-          <a:p>
-            <a:pPr algn="l" indent="0" marL="0">
+            <a:off x="731520" y="475488"/>
+            <a:ext cx="4572000" cy="274320"/>
+          </a:xfrm>
+          <a:prstGeom prst="rect">
+            <a:avLst/>
+          </a:prstGeom>
+          <a:noFill/>
+          <a:ln/>
+        </p:spPr>
+        <p:txBody>
+          <a:bodyPr wrap="square" lIns="0" tIns="0" rIns="0" bIns="0" rtlCol="0" anchor="ctr"/>
+          <a:lstStyle/>
+          <a:p>
+            <a:pPr indent="0" marL="0">
               <a:buNone/>
             </a:pPr>
             <a:r>
               <a:rPr lang="en-US" sz="1200" b="1" spc="250" kern="0" dirty="0">
                 <a:solidFill>
-                  <a:srgbClr val="0F462D"/>
+                  <a:srgbClr val="002E53"/>
                 </a:solidFill>
                 <a:latin typeface="Calibri" pitchFamily="34" charset="0"/>
                 <a:ea typeface="Calibri" pitchFamily="34" charset="-122"/>
@@ -2669,26 +2656,26 @@
         </p:nvSpPr>
         <p:spPr>
           <a:xfrm>
-            <a:off x="731520" y="777240"/>
-            <a:ext cx="10698480" cy="777240"/>
-          </a:xfrm>
-          <a:prstGeom prst="rect">
-            <a:avLst/>
-          </a:prstGeom>
-          <a:noFill/>
-          <a:ln/>
-        </p:spPr>
-        <p:txBody>
-          <a:bodyPr wrap="square" lIns="0" tIns="0" rIns="0" bIns="0" rtlCol="0" anchor="ctr"/>
-          <a:lstStyle/>
-          <a:p>
-            <a:pPr indent="0" marL="0">
-              <a:buNone/>
-            </a:pPr>
-            <a:r>
-              <a:rPr lang="en-US" sz="3800" b="1" dirty="0">
-                <a:solidFill>
-                  <a:srgbClr val="0F462D"/>
+            <a:off x="731520" y="749808"/>
+            <a:ext cx="10698480" cy="731520"/>
+          </a:xfrm>
+          <a:prstGeom prst="rect">
+            <a:avLst/>
+          </a:prstGeom>
+          <a:noFill/>
+          <a:ln/>
+        </p:spPr>
+        <p:txBody>
+          <a:bodyPr wrap="square" lIns="0" tIns="0" rIns="0" bIns="0" rtlCol="0" anchor="ctr"/>
+          <a:lstStyle/>
+          <a:p>
+            <a:pPr indent="0" marL="0">
+              <a:buNone/>
+            </a:pPr>
+            <a:r>
+              <a:rPr lang="en-US" sz="3600" b="1" dirty="0">
+                <a:solidFill>
+                  <a:srgbClr val="002E53"/>
                 </a:solidFill>
                 <a:latin typeface="Calibri" pitchFamily="34" charset="0"/>
                 <a:ea typeface="Calibri" pitchFamily="34" charset="-122"/>
@@ -2696,7 +2683,7 @@
               </a:rPr>
               <a:t>Seu acesso</a:t>
             </a:r>
-            <a:endParaRPr lang="en-US" sz="3800" dirty="0"/>
+            <a:endParaRPr lang="en-US" sz="3600" dirty="0"/>
           </a:p>
         </p:txBody>
       </p:sp>
@@ -2708,12 +2695,12 @@
         </p:nvSpPr>
         <p:spPr>
           <a:xfrm>
-            <a:off x="731520" y="1874520"/>
-            <a:ext cx="6400800" cy="3154680"/>
+            <a:off x="731520" y="1828800"/>
+            <a:ext cx="6400800" cy="3108960"/>
           </a:xfrm>
           <a:prstGeom prst="roundRect">
             <a:avLst>
-              <a:gd name="adj" fmla="val 3478"/>
+              <a:gd name="adj" fmla="val 2941"/>
             </a:avLst>
           </a:prstGeom>
           <a:solidFill>
@@ -2721,14 +2708,14 @@
           </a:solidFill>
           <a:ln w="12700">
             <a:solidFill>
-              <a:srgbClr val="E2E8EF"/>
+              <a:srgbClr val="E3E6EA"/>
             </a:solidFill>
             <a:prstDash val="solid"/>
           </a:ln>
           <a:effectLst>
             <a:outerShdw sx="100000" sy="100000" kx="0" ky="0" algn="bl" rotWithShape="0" blurRad="127000" dist="25400" dir="5400000">
-              <a:srgbClr val="9AA5B1">
-                <a:alpha val="25000"/>
+              <a:srgbClr val="AAB2BC">
+                <a:alpha val="30000"/>
               </a:srgbClr>
             </a:outerShdw>
           </a:effectLst>
@@ -2742,7 +2729,7 @@
         </p:nvSpPr>
         <p:spPr>
           <a:xfrm>
-            <a:off x="1097280" y="2148840"/>
+            <a:off x="1097280" y="2103120"/>
             <a:ext cx="5669280" cy="228600"/>
           </a:xfrm>
           <a:prstGeom prst="rect">
@@ -2761,7 +2748,7 @@
             <a:r>
               <a:rPr lang="en-US" sz="1100" b="1" spc="200" kern="0" dirty="0">
                 <a:solidFill>
-                  <a:srgbClr val="6B7280"/>
+                  <a:srgbClr val="6E7A87"/>
                 </a:solidFill>
                 <a:latin typeface="Calibri" pitchFamily="34" charset="0"/>
                 <a:ea typeface="Calibri" pitchFamily="34" charset="-122"/>
@@ -2781,7 +2768,85 @@
         </p:nvSpPr>
         <p:spPr>
           <a:xfrm>
-            <a:off x="1097280" y="2395728"/>
+            <a:off x="1097280" y="2944368"/>
+            <a:ext cx="5669280" cy="228600"/>
+          </a:xfrm>
+          <a:prstGeom prst="rect">
+            <a:avLst/>
+          </a:prstGeom>
+          <a:noFill/>
+          <a:ln/>
+        </p:spPr>
+        <p:txBody>
+          <a:bodyPr wrap="square" lIns="0" tIns="0" rIns="0" bIns="0" rtlCol="0" anchor="ctr"/>
+          <a:lstStyle/>
+          <a:p>
+            <a:pPr indent="0" marL="0">
+              <a:buNone/>
+            </a:pPr>
+            <a:r>
+              <a:rPr lang="en-US" sz="1100" b="1" spc="200" kern="0" dirty="0">
+                <a:solidFill>
+                  <a:srgbClr val="6E7A87"/>
+                </a:solidFill>
+                <a:latin typeface="Calibri" pitchFamily="34" charset="0"/>
+                <a:ea typeface="Calibri" pitchFamily="34" charset="-122"/>
+                <a:cs typeface="Calibri" pitchFamily="34" charset="-120"/>
+              </a:rPr>
+              <a:t>SEU EMAIL</a:t>
+            </a:r>
+            <a:endParaRPr lang="en-US" sz="1100" dirty="0"/>
+          </a:p>
+        </p:txBody>
+      </p:sp>
+      <p:sp>
+        <p:nvSpPr>
+          <p:cNvPr id="7" name="Text 5"/>
+          <p:cNvSpPr/>
+          <p:nvPr/>
+        </p:nvSpPr>
+        <p:spPr>
+          <a:xfrm>
+            <a:off x="1097280" y="3950208"/>
+            <a:ext cx="5669280" cy="228600"/>
+          </a:xfrm>
+          <a:prstGeom prst="rect">
+            <a:avLst/>
+          </a:prstGeom>
+          <a:noFill/>
+          <a:ln/>
+        </p:spPr>
+        <p:txBody>
+          <a:bodyPr wrap="square" lIns="0" tIns="0" rIns="0" bIns="0" rtlCol="0" anchor="ctr"/>
+          <a:lstStyle/>
+          <a:p>
+            <a:pPr indent="0" marL="0">
+              <a:buNone/>
+            </a:pPr>
+            <a:r>
+              <a:rPr lang="en-US" sz="1100" b="1" spc="200" kern="0" dirty="0">
+                <a:solidFill>
+                  <a:srgbClr val="6E7A87"/>
+                </a:solidFill>
+                <a:latin typeface="Calibri" pitchFamily="34" charset="0"/>
+                <a:ea typeface="Calibri" pitchFamily="34" charset="-122"/>
+                <a:cs typeface="Calibri" pitchFamily="34" charset="-120"/>
+              </a:rPr>
+              <a:t>SENHA INICIAL</a:t>
+            </a:r>
+            <a:endParaRPr lang="en-US" sz="1100" dirty="0"/>
+          </a:p>
+        </p:txBody>
+      </p:sp>
+      <p:sp>
+        <p:nvSpPr>
+          <p:cNvPr id="8" name="Text 6"/>
+          <p:cNvSpPr/>
+          <p:nvPr/>
+        </p:nvSpPr>
+        <p:spPr>
+          <a:xfrm>
+            <a:off x="1097280" y="2350008"/>
             <a:ext cx="5669280" cy="384048"/>
           </a:xfrm>
           <a:prstGeom prst="rect">
@@ -2800,7 +2865,7 @@
             <a:r>
               <a:rPr lang="en-US" sz="2000" b="1" dirty="0">
                 <a:solidFill>
-                  <a:srgbClr val="0F462D"/>
+                  <a:srgbClr val="002E53"/>
                 </a:solidFill>
                 <a:latin typeface="Calibri" pitchFamily="34" charset="0"/>
                 <a:ea typeface="Calibri" pitchFamily="34" charset="-122"/>
@@ -2814,52 +2879,13 @@
       </p:sp>
       <p:sp>
         <p:nvSpPr>
-          <p:cNvPr id="7" name="Text 5"/>
-          <p:cNvSpPr/>
-          <p:nvPr/>
-        </p:nvSpPr>
-        <p:spPr>
-          <a:xfrm>
-            <a:off x="1097280" y="3035808"/>
-            <a:ext cx="5669280" cy="228600"/>
-          </a:xfrm>
-          <a:prstGeom prst="rect">
-            <a:avLst/>
-          </a:prstGeom>
-          <a:noFill/>
-          <a:ln/>
-        </p:spPr>
-        <p:txBody>
-          <a:bodyPr wrap="square" lIns="0" tIns="0" rIns="0" bIns="0" rtlCol="0" anchor="ctr"/>
-          <a:lstStyle/>
-          <a:p>
-            <a:pPr indent="0" marL="0">
-              <a:buNone/>
-            </a:pPr>
-            <a:r>
-              <a:rPr lang="en-US" sz="1100" b="1" spc="200" kern="0" dirty="0">
-                <a:solidFill>
-                  <a:srgbClr val="6B7280"/>
-                </a:solidFill>
-                <a:latin typeface="Calibri" pitchFamily="34" charset="0"/>
-                <a:ea typeface="Calibri" pitchFamily="34" charset="-122"/>
-                <a:cs typeface="Calibri" pitchFamily="34" charset="-120"/>
-              </a:rPr>
-              <a:t>SEU EMAIL</a:t>
-            </a:r>
-            <a:endParaRPr lang="en-US" sz="1100" dirty="0"/>
-          </a:p>
-        </p:txBody>
-      </p:sp>
-      <p:sp>
-        <p:nvSpPr>
-          <p:cNvPr id="8" name="Text 6"/>
-          <p:cNvSpPr/>
-          <p:nvPr/>
-        </p:nvSpPr>
-        <p:spPr>
-          <a:xfrm>
-            <a:off x="1097280" y="3282696"/>
+          <p:cNvPr id="9" name="Text 7"/>
+          <p:cNvSpPr/>
+          <p:nvPr/>
+        </p:nvSpPr>
+        <p:spPr>
+          <a:xfrm>
+            <a:off x="1097280" y="3191256"/>
             <a:ext cx="5669280" cy="384048"/>
           </a:xfrm>
           <a:prstGeom prst="rect">
@@ -2878,7 +2904,7 @@
             <a:r>
               <a:rPr lang="en-US" sz="2000" b="1" dirty="0">
                 <a:solidFill>
-                  <a:srgbClr val="0F462D"/>
+                  <a:srgbClr val="002E53"/>
                 </a:solidFill>
                 <a:latin typeface="Calibri" pitchFamily="34" charset="0"/>
                 <a:ea typeface="Calibri" pitchFamily="34" charset="-122"/>
@@ -2892,7 +2918,7 @@
             <a:r>
               <a:rPr lang="en-US" sz="2000" dirty="0">
                 <a:solidFill>
-                  <a:srgbClr val="23282C"/>
+                  <a:srgbClr val="1B2733"/>
                 </a:solidFill>
                 <a:latin typeface="Calibri" pitchFamily="34" charset="0"/>
                 <a:ea typeface="Calibri" pitchFamily="34" charset="-122"/>
@@ -2906,13 +2932,13 @@
       </p:sp>
       <p:sp>
         <p:nvSpPr>
-          <p:cNvPr id="9" name="Text 7"/>
-          <p:cNvSpPr/>
-          <p:nvPr/>
-        </p:nvSpPr>
-        <p:spPr>
-          <a:xfrm>
-            <a:off x="1097280" y="3657600"/>
+          <p:cNvPr id="10" name="Text 8"/>
+          <p:cNvSpPr/>
+          <p:nvPr/>
+        </p:nvSpPr>
+        <p:spPr>
+          <a:xfrm>
+            <a:off x="1097280" y="3566160"/>
             <a:ext cx="5669280" cy="274320"/>
           </a:xfrm>
           <a:prstGeom prst="rect">
@@ -2931,7 +2957,7 @@
             <a:r>
               <a:rPr lang="en-US" sz="1250" dirty="0">
                 <a:solidFill>
-                  <a:srgbClr val="6B7280"/>
+                  <a:srgbClr val="6E7A87"/>
                 </a:solidFill>
                 <a:latin typeface="Calibri" pitchFamily="34" charset="0"/>
                 <a:ea typeface="Calibri" pitchFamily="34" charset="-122"/>
@@ -2945,61 +2971,22 @@
       </p:sp>
       <p:sp>
         <p:nvSpPr>
-          <p:cNvPr id="10" name="Text 8"/>
-          <p:cNvSpPr/>
-          <p:nvPr/>
-        </p:nvSpPr>
-        <p:spPr>
-          <a:xfrm>
-            <a:off x="1097280" y="4069080"/>
-            <a:ext cx="5669280" cy="228600"/>
-          </a:xfrm>
-          <a:prstGeom prst="rect">
-            <a:avLst/>
-          </a:prstGeom>
-          <a:noFill/>
-          <a:ln/>
-        </p:spPr>
-        <p:txBody>
-          <a:bodyPr wrap="square" lIns="0" tIns="0" rIns="0" bIns="0" rtlCol="0" anchor="ctr"/>
-          <a:lstStyle/>
-          <a:p>
-            <a:pPr indent="0" marL="0">
-              <a:buNone/>
-            </a:pPr>
-            <a:r>
-              <a:rPr lang="en-US" sz="1100" b="1" spc="200" kern="0" dirty="0">
-                <a:solidFill>
-                  <a:srgbClr val="6B7280"/>
-                </a:solidFill>
-                <a:latin typeface="Calibri" pitchFamily="34" charset="0"/>
-                <a:ea typeface="Calibri" pitchFamily="34" charset="-122"/>
-                <a:cs typeface="Calibri" pitchFamily="34" charset="-120"/>
-              </a:rPr>
-              <a:t>SENHA INICIAL</a:t>
-            </a:r>
-            <a:endParaRPr lang="en-US" sz="1100" dirty="0"/>
-          </a:p>
-        </p:txBody>
-      </p:sp>
-      <p:sp>
-        <p:nvSpPr>
           <p:cNvPr id="11" name="Shape 9"/>
           <p:cNvSpPr/>
           <p:nvPr/>
         </p:nvSpPr>
         <p:spPr>
           <a:xfrm>
-            <a:off x="1097280" y="4315968"/>
-            <a:ext cx="1874520" cy="475488"/>
+            <a:off x="1097280" y="4197096"/>
+            <a:ext cx="1828800" cy="457200"/>
           </a:xfrm>
           <a:prstGeom prst="roundRect">
             <a:avLst>
-              <a:gd name="adj" fmla="val 15385"/>
+              <a:gd name="adj" fmla="val 14000"/>
             </a:avLst>
           </a:prstGeom>
           <a:solidFill>
-            <a:srgbClr val="0F462D"/>
+            <a:srgbClr val="1EC555"/>
           </a:solidFill>
           <a:ln/>
         </p:spPr>
@@ -3012,8 +2999,8 @@
         </p:nvSpPr>
         <p:spPr>
           <a:xfrm>
-            <a:off x="1097280" y="4315968"/>
-            <a:ext cx="1874520" cy="475488"/>
+            <a:off x="1097280" y="4197096"/>
+            <a:ext cx="1828800" cy="457200"/>
           </a:xfrm>
           <a:prstGeom prst="rect">
             <a:avLst/>
@@ -3029,9 +3016,9 @@
               <a:buNone/>
             </a:pPr>
             <a:r>
-              <a:rPr lang="en-US" sz="2100" b="1" dirty="0">
-                <a:solidFill>
-                  <a:srgbClr val="29DF8C"/>
+              <a:rPr lang="en-US" sz="2000" b="1" dirty="0">
+                <a:solidFill>
+                  <a:srgbClr val="002E53"/>
                 </a:solidFill>
                 <a:latin typeface="Calibri" pitchFamily="34" charset="0"/>
                 <a:ea typeface="Calibri" pitchFamily="34" charset="-122"/>
@@ -3039,7 +3026,7 @@
               </a:rPr>
               <a:t>Mudar123</a:t>
             </a:r>
-            <a:endParaRPr lang="en-US" sz="2100" dirty="0"/>
+            <a:endParaRPr lang="en-US" sz="2000" dirty="0"/>
           </a:p>
         </p:txBody>
       </p:sp>
@@ -3051,8 +3038,8 @@
         </p:nvSpPr>
         <p:spPr>
           <a:xfrm>
-            <a:off x="3127248" y="4315968"/>
-            <a:ext cx="3657600" cy="475488"/>
+            <a:off x="3081528" y="4197096"/>
+            <a:ext cx="3703320" cy="457200"/>
           </a:xfrm>
           <a:prstGeom prst="rect">
             <a:avLst/>
@@ -3070,13 +3057,13 @@
             <a:r>
               <a:rPr lang="en-US" sz="1250" dirty="0">
                 <a:solidFill>
-                  <a:srgbClr val="6B7280"/>
-                </a:solidFill>
-                <a:latin typeface="Calibri" pitchFamily="34" charset="0"/>
-                <a:ea typeface="Calibri" pitchFamily="34" charset="-122"/>
-                <a:cs typeface="Calibri" pitchFamily="34" charset="-120"/>
-              </a:rPr>
-              <a:t>Igual para todo mundo — por isso você vai trocar já no primeiro acesso.</a:t>
+                  <a:srgbClr val="6E7A87"/>
+                </a:solidFill>
+                <a:latin typeface="Calibri" pitchFamily="34" charset="0"/>
+                <a:ea typeface="Calibri" pitchFamily="34" charset="-122"/>
+                <a:cs typeface="Calibri" pitchFamily="34" charset="-120"/>
+              </a:rPr>
+              <a:t>Igual para todo mundo — por isso você troca no primeiro acesso.</a:t>
             </a:r>
             <a:endParaRPr lang="en-US" sz="1250" dirty="0"/>
           </a:p>
@@ -3090,16 +3077,16 @@
         </p:nvSpPr>
         <p:spPr>
           <a:xfrm>
-            <a:off x="7452360" y="1874520"/>
-            <a:ext cx="3977640" cy="3154680"/>
+            <a:off x="7452360" y="1828800"/>
+            <a:ext cx="3977640" cy="3108960"/>
           </a:xfrm>
           <a:prstGeom prst="roundRect">
             <a:avLst>
-              <a:gd name="adj" fmla="val 3478"/>
+              <a:gd name="adj" fmla="val 2941"/>
             </a:avLst>
           </a:prstGeom>
           <a:solidFill>
-            <a:srgbClr val="0F462D"/>
+            <a:srgbClr val="002E53"/>
           </a:solidFill>
           <a:ln/>
         </p:spPr>
@@ -3112,14 +3099,14 @@
         </p:nvSpPr>
         <p:spPr>
           <a:xfrm>
-            <a:off x="7863840" y="2240280"/>
-            <a:ext cx="566928" cy="566928"/>
+            <a:off x="7863840" y="2176272"/>
+            <a:ext cx="548640" cy="548640"/>
           </a:xfrm>
           <a:prstGeom prst="ellipse">
             <a:avLst/>
           </a:prstGeom>
           <a:solidFill>
-            <a:srgbClr val="29DF8C"/>
+            <a:srgbClr val="1EC555"/>
           </a:solidFill>
           <a:ln/>
         </p:spPr>
@@ -3132,8 +3119,8 @@
         </p:nvSpPr>
         <p:spPr>
           <a:xfrm>
-            <a:off x="7863840" y="2240280"/>
-            <a:ext cx="566928" cy="566928"/>
+            <a:off x="7863840" y="2176272"/>
+            <a:ext cx="548640" cy="548640"/>
           </a:xfrm>
           <a:prstGeom prst="rect">
             <a:avLst/>
@@ -3149,9 +3136,9 @@
               <a:buNone/>
             </a:pPr>
             <a:r>
-              <a:rPr lang="en-US" sz="2400" b="1" dirty="0">
-                <a:solidFill>
-                  <a:srgbClr val="0A3421"/>
+              <a:rPr lang="en-US" sz="2300" b="1" dirty="0">
+                <a:solidFill>
+                  <a:srgbClr val="002E53"/>
                 </a:solidFill>
                 <a:latin typeface="Calibri" pitchFamily="34" charset="0"/>
                 <a:ea typeface="Calibri" pitchFamily="34" charset="-122"/>
@@ -3159,7 +3146,7 @@
               </a:rPr>
               <a:t>!</a:t>
             </a:r>
-            <a:endParaRPr lang="en-US" sz="2400" dirty="0"/>
+            <a:endParaRPr lang="en-US" sz="2300" dirty="0"/>
           </a:p>
         </p:txBody>
       </p:sp>
@@ -3171,8 +3158,8 @@
         </p:nvSpPr>
         <p:spPr>
           <a:xfrm>
-            <a:off x="7863840" y="2971800"/>
-            <a:ext cx="3154680" cy="365760"/>
+            <a:off x="7863840" y="2880360"/>
+            <a:ext cx="3154680" cy="347472"/>
           </a:xfrm>
           <a:prstGeom prst="rect">
             <a:avLst/>
@@ -3210,8 +3197,8 @@
         </p:nvSpPr>
         <p:spPr>
           <a:xfrm>
-            <a:off x="7863840" y="3401568"/>
-            <a:ext cx="3154680" cy="1508760"/>
+            <a:off x="7863840" y="3310128"/>
+            <a:ext cx="3154680" cy="1463040"/>
           </a:xfrm>
           <a:prstGeom prst="rect">
             <a:avLst/>
@@ -3235,13 +3222,13 @@
             <a:r>
               <a:rPr lang="en-US" sz="1350" dirty="0">
                 <a:solidFill>
-                  <a:srgbClr val="C9D9D1"/>
-                </a:solidFill>
-                <a:latin typeface="Calibri" pitchFamily="34" charset="0"/>
-                <a:ea typeface="Calibri" pitchFamily="34" charset="-122"/>
-                <a:cs typeface="Calibri" pitchFamily="34" charset="-120"/>
-              </a:rPr>
-              <a:t>A conta é criada pelo administrador — não existe cadastro por conta própria.</a:t>
+                  <a:srgbClr val="AFC2D2"/>
+                </a:solidFill>
+                <a:latin typeface="Calibri" pitchFamily="34" charset="0"/>
+                <a:ea typeface="Calibri" pitchFamily="34" charset="-122"/>
+                <a:cs typeface="Calibri" pitchFamily="34" charset="-120"/>
+              </a:rPr>
+              <a:t>A conta é criada pela administração — não existe cadastro por conta própria.</a:t>
             </a:r>
             <a:endParaRPr lang="en-US" sz="1350" dirty="0"/>
           </a:p>
@@ -3255,54 +3242,78 @@
             <a:r>
               <a:rPr lang="en-US" sz="1350" dirty="0">
                 <a:solidFill>
-                  <a:srgbClr val="C9D9D1"/>
-                </a:solidFill>
-                <a:latin typeface="Calibri" pitchFamily="34" charset="0"/>
-                <a:ea typeface="Calibri" pitchFamily="34" charset="-122"/>
-                <a:cs typeface="Calibri" pitchFamily="34" charset="-120"/>
-              </a:rPr>
-              <a:t>Se aparecer "email ou senha incorretos", fale com o Gabriel.</a:t>
+                  <a:srgbClr val="AFC2D2"/>
+                </a:solidFill>
+                <a:latin typeface="Calibri" pitchFamily="34" charset="0"/>
+                <a:ea typeface="Calibri" pitchFamily="34" charset="-122"/>
+                <a:cs typeface="Calibri" pitchFamily="34" charset="-120"/>
+              </a:rPr>
+              <a:t>Se aparecer "email ou senha incorretos", fale com a Mayane.</a:t>
             </a:r>
             <a:endParaRPr lang="en-US" sz="1350" dirty="0"/>
           </a:p>
         </p:txBody>
       </p:sp>
-      <p:sp>
-        <p:nvSpPr>
-          <p:cNvPr id="19" name="Text 17"/>
-          <p:cNvSpPr/>
-          <p:nvPr/>
-        </p:nvSpPr>
-        <p:spPr>
-          <a:xfrm>
-            <a:off x="731520" y="6199632"/>
-            <a:ext cx="10698480" cy="274320"/>
-          </a:xfrm>
-          <a:prstGeom prst="rect">
-            <a:avLst/>
-          </a:prstGeom>
-          <a:noFill/>
-          <a:ln/>
-        </p:spPr>
-        <p:txBody>
-          <a:bodyPr wrap="square" lIns="0" tIns="0" rIns="0" bIns="0" rtlCol="0" anchor="ctr"/>
-          <a:lstStyle/>
-          <a:p>
-            <a:pPr indent="0" marL="0">
-              <a:buNone/>
-            </a:pPr>
-            <a:r>
-              <a:rPr lang="en-US" sz="1100" dirty="0">
-                <a:solidFill>
-                  <a:srgbClr val="A5AEB8"/>
-                </a:solidFill>
-                <a:latin typeface="Calibri" pitchFamily="34" charset="0"/>
-                <a:ea typeface="Calibri" pitchFamily="34" charset="-122"/>
-                <a:cs typeface="Calibri" pitchFamily="34" charset="-120"/>
-              </a:rPr>
-              <a:t>Mercadinho do Lito · Lito Aviation Academy</a:t>
-            </a:r>
-            <a:endParaRPr lang="en-US" sz="1100" dirty="0"/>
+      <p:pic>
+        <p:nvPicPr>
+          <p:cNvPr id="19" name="Image 0" descr="preencoded.png">    </p:cNvPr>
+          <p:cNvPicPr>
+            <a:picLocks noChangeAspect="1"/>
+          </p:cNvPicPr>
+          <p:nvPr/>
+        </p:nvPicPr>
+        <p:blipFill>
+          <a:blip r:embed="rId1"/>
+          <a:stretch>
+            <a:fillRect/>
+          </a:stretch>
+        </p:blipFill>
+        <p:spPr>
+          <a:xfrm>
+            <a:off x="731520" y="6108192"/>
+            <a:ext cx="1051560" cy="493776"/>
+          </a:xfrm>
+          <a:prstGeom prst="rect">
+            <a:avLst/>
+          </a:prstGeom>
+        </p:spPr>
+      </p:pic>
+      <p:sp>
+        <p:nvSpPr>
+          <p:cNvPr id="20" name="Text 17"/>
+          <p:cNvSpPr/>
+          <p:nvPr/>
+        </p:nvSpPr>
+        <p:spPr>
+          <a:xfrm>
+            <a:off x="1920240" y="6199632"/>
+            <a:ext cx="5486400" cy="274320"/>
+          </a:xfrm>
+          <a:prstGeom prst="rect">
+            <a:avLst/>
+          </a:prstGeom>
+          <a:noFill/>
+          <a:ln/>
+        </p:spPr>
+        <p:txBody>
+          <a:bodyPr wrap="square" lIns="0" tIns="0" rIns="0" bIns="0" rtlCol="0" anchor="ctr"/>
+          <a:lstStyle/>
+          <a:p>
+            <a:pPr indent="0" marL="0">
+              <a:buNone/>
+            </a:pPr>
+            <a:r>
+              <a:rPr lang="en-US" sz="1050" dirty="0">
+                <a:solidFill>
+                  <a:srgbClr val="B0AAAA"/>
+                </a:solidFill>
+                <a:latin typeface="Calibri" pitchFamily="34" charset="0"/>
+                <a:ea typeface="Calibri" pitchFamily="34" charset="-122"/>
+                <a:cs typeface="Calibri" pitchFamily="34" charset="-120"/>
+              </a:rPr>
+              <a:t>Mercadinho do Lito · uso interno</a:t>
+            </a:r>
+            <a:endParaRPr lang="en-US" sz="1050" dirty="0"/>
           </a:p>
         </p:txBody>
       </p:sp>
@@ -3320,7 +3331,7 @@
     <p:bg>
       <p:bgPr>
         <a:solidFill>
-          <a:srgbClr val="F2F5F9"/>
+          <a:srgbClr val="F4F5F7"/>
         </a:solidFill>
       </p:bgPr>
     </p:bg>
@@ -3346,26 +3357,26 @@
         </p:nvSpPr>
         <p:spPr>
           <a:xfrm>
-            <a:off x="731520" y="457200"/>
-            <a:ext cx="2743200" cy="274320"/>
-          </a:xfrm>
-          <a:prstGeom prst="rect">
-            <a:avLst/>
-          </a:prstGeom>
-          <a:noFill/>
-          <a:ln/>
-        </p:spPr>
-        <p:txBody>
-          <a:bodyPr wrap="square" lIns="0" tIns="0" rIns="0" bIns="0" rtlCol="0" anchor="ctr"/>
-          <a:lstStyle/>
-          <a:p>
-            <a:pPr algn="l" indent="0" marL="0">
+            <a:off x="731520" y="475488"/>
+            <a:ext cx="4572000" cy="274320"/>
+          </a:xfrm>
+          <a:prstGeom prst="rect">
+            <a:avLst/>
+          </a:prstGeom>
+          <a:noFill/>
+          <a:ln/>
+        </p:spPr>
+        <p:txBody>
+          <a:bodyPr wrap="square" lIns="0" tIns="0" rIns="0" bIns="0" rtlCol="0" anchor="ctr"/>
+          <a:lstStyle/>
+          <a:p>
+            <a:pPr indent="0" marL="0">
               <a:buNone/>
             </a:pPr>
             <a:r>
               <a:rPr lang="en-US" sz="1200" b="1" spc="250" kern="0" dirty="0">
                 <a:solidFill>
-                  <a:srgbClr val="0F462D"/>
+                  <a:srgbClr val="002E53"/>
                 </a:solidFill>
                 <a:latin typeface="Calibri" pitchFamily="34" charset="0"/>
                 <a:ea typeface="Calibri" pitchFamily="34" charset="-122"/>
@@ -3385,26 +3396,26 @@
         </p:nvSpPr>
         <p:spPr>
           <a:xfrm>
-            <a:off x="731520" y="777240"/>
-            <a:ext cx="10698480" cy="777240"/>
-          </a:xfrm>
-          <a:prstGeom prst="rect">
-            <a:avLst/>
-          </a:prstGeom>
-          <a:noFill/>
-          <a:ln/>
-        </p:spPr>
-        <p:txBody>
-          <a:bodyPr wrap="square" lIns="0" tIns="0" rIns="0" bIns="0" rtlCol="0" anchor="ctr"/>
-          <a:lstStyle/>
-          <a:p>
-            <a:pPr indent="0" marL="0">
-              <a:buNone/>
-            </a:pPr>
-            <a:r>
-              <a:rPr lang="en-US" sz="3800" b="1" dirty="0">
-                <a:solidFill>
-                  <a:srgbClr val="0F462D"/>
+            <a:off x="731520" y="749808"/>
+            <a:ext cx="10698480" cy="731520"/>
+          </a:xfrm>
+          <a:prstGeom prst="rect">
+            <a:avLst/>
+          </a:prstGeom>
+          <a:noFill/>
+          <a:ln/>
+        </p:spPr>
+        <p:txBody>
+          <a:bodyPr wrap="square" lIns="0" tIns="0" rIns="0" bIns="0" rtlCol="0" anchor="ctr"/>
+          <a:lstStyle/>
+          <a:p>
+            <a:pPr indent="0" marL="0">
+              <a:buNone/>
+            </a:pPr>
+            <a:r>
+              <a:rPr lang="en-US" sz="3600" b="1" dirty="0">
+                <a:solidFill>
+                  <a:srgbClr val="002E53"/>
                 </a:solidFill>
                 <a:latin typeface="Calibri" pitchFamily="34" charset="0"/>
                 <a:ea typeface="Calibri" pitchFamily="34" charset="-122"/>
@@ -3412,7 +3423,7 @@
               </a:rPr>
               <a:t>Instale o app no seu celular</a:t>
             </a:r>
-            <a:endParaRPr lang="en-US" sz="3800" dirty="0"/>
+            <a:endParaRPr lang="en-US" sz="3600" dirty="0"/>
           </a:p>
         </p:txBody>
       </p:sp>
@@ -3424,7 +3435,7 @@
         </p:nvSpPr>
         <p:spPr>
           <a:xfrm>
-            <a:off x="731520" y="1572768"/>
+            <a:off x="731520" y="1554480"/>
             <a:ext cx="10698480" cy="320040"/>
           </a:xfrm>
           <a:prstGeom prst="rect">
@@ -3443,7 +3454,7 @@
             <a:r>
               <a:rPr lang="en-US" sz="1500" dirty="0">
                 <a:solidFill>
-                  <a:srgbClr val="6B7280"/>
+                  <a:srgbClr val="6E7A87"/>
                 </a:solidFill>
                 <a:latin typeface="Calibri" pitchFamily="34" charset="0"/>
                 <a:ea typeface="Calibri" pitchFamily="34" charset="-122"/>
@@ -3463,12 +3474,12 @@
         </p:nvSpPr>
         <p:spPr>
           <a:xfrm>
-            <a:off x="731520" y="2148840"/>
-            <a:ext cx="5230368" cy="2971800"/>
+            <a:off x="731520" y="2103120"/>
+            <a:ext cx="5230368" cy="2926080"/>
           </a:xfrm>
           <a:prstGeom prst="roundRect">
             <a:avLst>
-              <a:gd name="adj" fmla="val 3692"/>
+              <a:gd name="adj" fmla="val 3125"/>
             </a:avLst>
           </a:prstGeom>
           <a:solidFill>
@@ -3476,14 +3487,14 @@
           </a:solidFill>
           <a:ln w="12700">
             <a:solidFill>
-              <a:srgbClr val="E2E8EF"/>
+              <a:srgbClr val="E3E6EA"/>
             </a:solidFill>
             <a:prstDash val="solid"/>
           </a:ln>
           <a:effectLst>
             <a:outerShdw sx="100000" sy="100000" kx="0" ky="0" algn="bl" rotWithShape="0" blurRad="127000" dist="25400" dir="5400000">
-              <a:srgbClr val="9AA5B1">
-                <a:alpha val="25000"/>
+              <a:srgbClr val="AAB2BC">
+                <a:alpha val="30000"/>
               </a:srgbClr>
             </a:outerShdw>
           </a:effectLst>
@@ -3497,16 +3508,16 @@
         </p:nvSpPr>
         <p:spPr>
           <a:xfrm>
-            <a:off x="1097280" y="2468880"/>
-            <a:ext cx="1371600" cy="384048"/>
+            <a:off x="1097280" y="2395728"/>
+            <a:ext cx="1325880" cy="365760"/>
           </a:xfrm>
           <a:prstGeom prst="roundRect">
             <a:avLst>
-              <a:gd name="adj" fmla="val 47619"/>
+              <a:gd name="adj" fmla="val 50000"/>
             </a:avLst>
           </a:prstGeom>
           <a:solidFill>
-            <a:srgbClr val="E4F7EE"/>
+            <a:srgbClr val="002E53"/>
           </a:solidFill>
           <a:ln/>
         </p:spPr>
@@ -3519,8 +3530,8 @@
         </p:nvSpPr>
         <p:spPr>
           <a:xfrm>
-            <a:off x="1097280" y="2468880"/>
-            <a:ext cx="1371600" cy="384048"/>
+            <a:off x="1097280" y="2395728"/>
+            <a:ext cx="1325880" cy="365760"/>
           </a:xfrm>
           <a:prstGeom prst="rect">
             <a:avLst/>
@@ -3536,9 +3547,9 @@
               <a:buNone/>
             </a:pPr>
             <a:r>
-              <a:rPr lang="en-US" sz="1200" b="1" spc="100" kern="0" dirty="0">
-                <a:solidFill>
-                  <a:srgbClr val="0F462D"/>
+              <a:rPr lang="en-US" sz="1150" b="1" spc="100" kern="0" dirty="0">
+                <a:solidFill>
+                  <a:srgbClr val="1EC555"/>
                 </a:solidFill>
                 <a:latin typeface="Calibri" pitchFamily="34" charset="0"/>
                 <a:ea typeface="Calibri" pitchFamily="34" charset="-122"/>
@@ -3546,7 +3557,7 @@
               </a:rPr>
               <a:t>ANDROID</a:t>
             </a:r>
-            <a:endParaRPr lang="en-US" sz="1200" dirty="0"/>
+            <a:endParaRPr lang="en-US" sz="1150" dirty="0"/>
           </a:p>
         </p:txBody>
       </p:sp>
@@ -3558,7 +3569,7 @@
         </p:nvSpPr>
         <p:spPr>
           <a:xfrm>
-            <a:off x="1097280" y="3063240"/>
+            <a:off x="1097280" y="2971800"/>
             <a:ext cx="4526280" cy="1737360"/>
           </a:xfrm>
           <a:prstGeom prst="rect">
@@ -3581,7 +3592,7 @@
             <a:r>
               <a:rPr lang="en-US" sz="1450" dirty="0">
                 <a:solidFill>
-                  <a:srgbClr val="23282C"/>
+                  <a:srgbClr val="1B2733"/>
                 </a:solidFill>
                 <a:latin typeface="Calibri" pitchFamily="34" charset="0"/>
                 <a:ea typeface="Calibri" pitchFamily="34" charset="-122"/>
@@ -3602,7 +3613,7 @@
             <a:r>
               <a:rPr lang="en-US" sz="1450" dirty="0">
                 <a:solidFill>
-                  <a:srgbClr val="23282C"/>
+                  <a:srgbClr val="1B2733"/>
                 </a:solidFill>
                 <a:latin typeface="Calibri" pitchFamily="34" charset="0"/>
                 <a:ea typeface="Calibri" pitchFamily="34" charset="-122"/>
@@ -3623,13 +3634,13 @@
             <a:r>
               <a:rPr lang="en-US" sz="1450" dirty="0">
                 <a:solidFill>
-                  <a:srgbClr val="23282C"/>
-                </a:solidFill>
-                <a:latin typeface="Calibri" pitchFamily="34" charset="0"/>
-                <a:ea typeface="Calibri" pitchFamily="34" charset="-122"/>
-                <a:cs typeface="Calibri" pitchFamily="34" charset="-120"/>
-              </a:rPr>
-              <a:t>Pronto: o ícone aparece na sua tela inicial.</a:t>
+                  <a:srgbClr val="1B2733"/>
+                </a:solidFill>
+                <a:latin typeface="Calibri" pitchFamily="34" charset="0"/>
+                <a:ea typeface="Calibri" pitchFamily="34" charset="-122"/>
+                <a:cs typeface="Calibri" pitchFamily="34" charset="-120"/>
+              </a:rPr>
+              <a:t>Pronto: o ícone aparece na tela inicial.</a:t>
             </a:r>
             <a:endParaRPr lang="en-US" sz="1450" dirty="0"/>
           </a:p>
@@ -3643,12 +3654,12 @@
         </p:nvSpPr>
         <p:spPr>
           <a:xfrm>
-            <a:off x="6199632" y="2148840"/>
-            <a:ext cx="5230368" cy="2971800"/>
+            <a:off x="6199632" y="2103120"/>
+            <a:ext cx="5230368" cy="2926080"/>
           </a:xfrm>
           <a:prstGeom prst="roundRect">
             <a:avLst>
-              <a:gd name="adj" fmla="val 3692"/>
+              <a:gd name="adj" fmla="val 3125"/>
             </a:avLst>
           </a:prstGeom>
           <a:solidFill>
@@ -3656,14 +3667,14 @@
           </a:solidFill>
           <a:ln w="12700">
             <a:solidFill>
-              <a:srgbClr val="E2E8EF"/>
+              <a:srgbClr val="E3E6EA"/>
             </a:solidFill>
             <a:prstDash val="solid"/>
           </a:ln>
           <a:effectLst>
             <a:outerShdw sx="100000" sy="100000" kx="0" ky="0" algn="bl" rotWithShape="0" blurRad="127000" dist="25400" dir="5400000">
-              <a:srgbClr val="9AA5B1">
-                <a:alpha val="25000"/>
+              <a:srgbClr val="AAB2BC">
+                <a:alpha val="30000"/>
               </a:srgbClr>
             </a:outerShdw>
           </a:effectLst>
@@ -3677,16 +3688,16 @@
         </p:nvSpPr>
         <p:spPr>
           <a:xfrm>
-            <a:off x="6565392" y="2468880"/>
-            <a:ext cx="1371600" cy="384048"/>
+            <a:off x="6565392" y="2395728"/>
+            <a:ext cx="1325880" cy="365760"/>
           </a:xfrm>
           <a:prstGeom prst="roundRect">
             <a:avLst>
-              <a:gd name="adj" fmla="val 47619"/>
+              <a:gd name="adj" fmla="val 50000"/>
             </a:avLst>
           </a:prstGeom>
           <a:solidFill>
-            <a:srgbClr val="E4F7EE"/>
+            <a:srgbClr val="002E53"/>
           </a:solidFill>
           <a:ln/>
         </p:spPr>
@@ -3699,8 +3710,8 @@
         </p:nvSpPr>
         <p:spPr>
           <a:xfrm>
-            <a:off x="6565392" y="2468880"/>
-            <a:ext cx="1371600" cy="384048"/>
+            <a:off x="6565392" y="2395728"/>
+            <a:ext cx="1325880" cy="365760"/>
           </a:xfrm>
           <a:prstGeom prst="rect">
             <a:avLst/>
@@ -3716,9 +3727,9 @@
               <a:buNone/>
             </a:pPr>
             <a:r>
-              <a:rPr lang="en-US" sz="1200" b="1" spc="100" kern="0" dirty="0">
-                <a:solidFill>
-                  <a:srgbClr val="0F462D"/>
+              <a:rPr lang="en-US" sz="1150" b="1" spc="100" kern="0" dirty="0">
+                <a:solidFill>
+                  <a:srgbClr val="1EC555"/>
                 </a:solidFill>
                 <a:latin typeface="Calibri" pitchFamily="34" charset="0"/>
                 <a:ea typeface="Calibri" pitchFamily="34" charset="-122"/>
@@ -3726,7 +3737,7 @@
               </a:rPr>
               <a:t>IPHONE</a:t>
             </a:r>
-            <a:endParaRPr lang="en-US" sz="1200" dirty="0"/>
+            <a:endParaRPr lang="en-US" sz="1150" dirty="0"/>
           </a:p>
         </p:txBody>
       </p:sp>
@@ -3738,7 +3749,7 @@
         </p:nvSpPr>
         <p:spPr>
           <a:xfrm>
-            <a:off x="6565392" y="3063240"/>
+            <a:off x="6565392" y="2971800"/>
             <a:ext cx="4526280" cy="1737360"/>
           </a:xfrm>
           <a:prstGeom prst="rect">
@@ -3761,7 +3772,7 @@
             <a:r>
               <a:rPr lang="en-US" sz="1450" dirty="0">
                 <a:solidFill>
-                  <a:srgbClr val="23282C"/>
+                  <a:srgbClr val="1B2733"/>
                 </a:solidFill>
                 <a:latin typeface="Calibri" pitchFamily="34" charset="0"/>
                 <a:ea typeface="Calibri" pitchFamily="34" charset="-122"/>
@@ -3782,7 +3793,7 @@
             <a:r>
               <a:rPr lang="en-US" sz="1450" dirty="0">
                 <a:solidFill>
-                  <a:srgbClr val="23282C"/>
+                  <a:srgbClr val="1B2733"/>
                 </a:solidFill>
                 <a:latin typeface="Calibri" pitchFamily="34" charset="0"/>
                 <a:ea typeface="Calibri" pitchFamily="34" charset="-122"/>
@@ -3803,7 +3814,7 @@
             <a:r>
               <a:rPr lang="en-US" sz="1450" dirty="0">
                 <a:solidFill>
-                  <a:srgbClr val="23282C"/>
+                  <a:srgbClr val="1B2733"/>
                 </a:solidFill>
                 <a:latin typeface="Calibri" pitchFamily="34" charset="0"/>
                 <a:ea typeface="Calibri" pitchFamily="34" charset="-122"/>
@@ -3823,7 +3834,7 @@
         </p:nvSpPr>
         <p:spPr>
           <a:xfrm>
-            <a:off x="731520" y="5349240"/>
+            <a:off x="731520" y="5230368"/>
             <a:ext cx="10698480" cy="320040"/>
           </a:xfrm>
           <a:prstGeom prst="rect">
@@ -3842,54 +3853,78 @@
             <a:r>
               <a:rPr lang="en-US" sz="1300" i="1" dirty="0">
                 <a:solidFill>
-                  <a:srgbClr val="6B7280"/>
-                </a:solidFill>
-                <a:latin typeface="Calibri" pitchFamily="34" charset="0"/>
-                <a:ea typeface="Calibri" pitchFamily="34" charset="-122"/>
-                <a:cs typeface="Calibri" pitchFamily="34" charset="-120"/>
-              </a:rPr>
-              <a:t>Instalar não é obrigatório — mas deixa o Mercadinho a um toque, sem precisar digitar o endereço.</a:t>
+                  <a:srgbClr val="6E7A87"/>
+                </a:solidFill>
+                <a:latin typeface="Calibri" pitchFamily="34" charset="0"/>
+                <a:ea typeface="Calibri" pitchFamily="34" charset="-122"/>
+                <a:cs typeface="Calibri" pitchFamily="34" charset="-120"/>
+              </a:rPr>
+              <a:t>Instalar não é obrigatório — mas deixa o Mercadinho a um toque, sem digitar o endereço.</a:t>
             </a:r>
             <a:endParaRPr lang="en-US" sz="1300" dirty="0"/>
           </a:p>
         </p:txBody>
       </p:sp>
-      <p:sp>
-        <p:nvSpPr>
-          <p:cNvPr id="14" name="Text 12"/>
-          <p:cNvSpPr/>
-          <p:nvPr/>
-        </p:nvSpPr>
-        <p:spPr>
-          <a:xfrm>
-            <a:off x="731520" y="6199632"/>
-            <a:ext cx="10698480" cy="274320"/>
-          </a:xfrm>
-          <a:prstGeom prst="rect">
-            <a:avLst/>
-          </a:prstGeom>
-          <a:noFill/>
-          <a:ln/>
-        </p:spPr>
-        <p:txBody>
-          <a:bodyPr wrap="square" lIns="0" tIns="0" rIns="0" bIns="0" rtlCol="0" anchor="ctr"/>
-          <a:lstStyle/>
-          <a:p>
-            <a:pPr indent="0" marL="0">
-              <a:buNone/>
-            </a:pPr>
-            <a:r>
-              <a:rPr lang="en-US" sz="1100" dirty="0">
-                <a:solidFill>
-                  <a:srgbClr val="A5AEB8"/>
-                </a:solidFill>
-                <a:latin typeface="Calibri" pitchFamily="34" charset="0"/>
-                <a:ea typeface="Calibri" pitchFamily="34" charset="-122"/>
-                <a:cs typeface="Calibri" pitchFamily="34" charset="-120"/>
-              </a:rPr>
-              <a:t>Mercadinho do Lito · Lito Aviation Academy</a:t>
-            </a:r>
-            <a:endParaRPr lang="en-US" sz="1100" dirty="0"/>
+      <p:pic>
+        <p:nvPicPr>
+          <p:cNvPr id="14" name="Image 0" descr="preencoded.png">    </p:cNvPr>
+          <p:cNvPicPr>
+            <a:picLocks noChangeAspect="1"/>
+          </p:cNvPicPr>
+          <p:nvPr/>
+        </p:nvPicPr>
+        <p:blipFill>
+          <a:blip r:embed="rId1"/>
+          <a:stretch>
+            <a:fillRect/>
+          </a:stretch>
+        </p:blipFill>
+        <p:spPr>
+          <a:xfrm>
+            <a:off x="731520" y="6108192"/>
+            <a:ext cx="1051560" cy="493776"/>
+          </a:xfrm>
+          <a:prstGeom prst="rect">
+            <a:avLst/>
+          </a:prstGeom>
+        </p:spPr>
+      </p:pic>
+      <p:sp>
+        <p:nvSpPr>
+          <p:cNvPr id="15" name="Text 12"/>
+          <p:cNvSpPr/>
+          <p:nvPr/>
+        </p:nvSpPr>
+        <p:spPr>
+          <a:xfrm>
+            <a:off x="1920240" y="6199632"/>
+            <a:ext cx="5486400" cy="274320"/>
+          </a:xfrm>
+          <a:prstGeom prst="rect">
+            <a:avLst/>
+          </a:prstGeom>
+          <a:noFill/>
+          <a:ln/>
+        </p:spPr>
+        <p:txBody>
+          <a:bodyPr wrap="square" lIns="0" tIns="0" rIns="0" bIns="0" rtlCol="0" anchor="ctr"/>
+          <a:lstStyle/>
+          <a:p>
+            <a:pPr indent="0" marL="0">
+              <a:buNone/>
+            </a:pPr>
+            <a:r>
+              <a:rPr lang="en-US" sz="1050" dirty="0">
+                <a:solidFill>
+                  <a:srgbClr val="B0AAAA"/>
+                </a:solidFill>
+                <a:latin typeface="Calibri" pitchFamily="34" charset="0"/>
+                <a:ea typeface="Calibri" pitchFamily="34" charset="-122"/>
+                <a:cs typeface="Calibri" pitchFamily="34" charset="-120"/>
+              </a:rPr>
+              <a:t>Mercadinho do Lito · uso interno</a:t>
+            </a:r>
+            <a:endParaRPr lang="en-US" sz="1050" dirty="0"/>
           </a:p>
         </p:txBody>
       </p:sp>
@@ -3907,7 +3942,7 @@
     <p:bg>
       <p:bgPr>
         <a:solidFill>
-          <a:srgbClr val="F2F5F9"/>
+          <a:srgbClr val="F4F5F7"/>
         </a:solidFill>
       </p:bgPr>
     </p:bg>
@@ -3933,26 +3968,26 @@
         </p:nvSpPr>
         <p:spPr>
           <a:xfrm>
-            <a:off x="731520" y="457200"/>
-            <a:ext cx="2743200" cy="274320"/>
-          </a:xfrm>
-          <a:prstGeom prst="rect">
-            <a:avLst/>
-          </a:prstGeom>
-          <a:noFill/>
-          <a:ln/>
-        </p:spPr>
-        <p:txBody>
-          <a:bodyPr wrap="square" lIns="0" tIns="0" rIns="0" bIns="0" rtlCol="0" anchor="ctr"/>
-          <a:lstStyle/>
-          <a:p>
-            <a:pPr algn="l" indent="0" marL="0">
+            <a:off x="731520" y="475488"/>
+            <a:ext cx="4572000" cy="274320"/>
+          </a:xfrm>
+          <a:prstGeom prst="rect">
+            <a:avLst/>
+          </a:prstGeom>
+          <a:noFill/>
+          <a:ln/>
+        </p:spPr>
+        <p:txBody>
+          <a:bodyPr wrap="square" lIns="0" tIns="0" rIns="0" bIns="0" rtlCol="0" anchor="ctr"/>
+          <a:lstStyle/>
+          <a:p>
+            <a:pPr indent="0" marL="0">
               <a:buNone/>
             </a:pPr>
             <a:r>
               <a:rPr lang="en-US" sz="1200" b="1" spc="250" kern="0" dirty="0">
                 <a:solidFill>
-                  <a:srgbClr val="B45309"/>
+                  <a:srgbClr val="D97706"/>
                 </a:solidFill>
                 <a:latin typeface="Calibri" pitchFamily="34" charset="0"/>
                 <a:ea typeface="Calibri" pitchFamily="34" charset="-122"/>
@@ -3972,26 +4007,26 @@
         </p:nvSpPr>
         <p:spPr>
           <a:xfrm>
-            <a:off x="731520" y="777240"/>
-            <a:ext cx="10698480" cy="777240"/>
-          </a:xfrm>
-          <a:prstGeom prst="rect">
-            <a:avLst/>
-          </a:prstGeom>
-          <a:noFill/>
-          <a:ln/>
-        </p:spPr>
-        <p:txBody>
-          <a:bodyPr wrap="square" lIns="0" tIns="0" rIns="0" bIns="0" rtlCol="0" anchor="ctr"/>
-          <a:lstStyle/>
-          <a:p>
-            <a:pPr indent="0" marL="0">
-              <a:buNone/>
-            </a:pPr>
-            <a:r>
-              <a:rPr lang="en-US" sz="3800" b="1" dirty="0">
-                <a:solidFill>
-                  <a:srgbClr val="0F462D"/>
+            <a:off x="731520" y="749808"/>
+            <a:ext cx="10698480" cy="731520"/>
+          </a:xfrm>
+          <a:prstGeom prst="rect">
+            <a:avLst/>
+          </a:prstGeom>
+          <a:noFill/>
+          <a:ln/>
+        </p:spPr>
+        <p:txBody>
+          <a:bodyPr wrap="square" lIns="0" tIns="0" rIns="0" bIns="0" rtlCol="0" anchor="ctr"/>
+          <a:lstStyle/>
+          <a:p>
+            <a:pPr indent="0" marL="0">
+              <a:buNone/>
+            </a:pPr>
+            <a:r>
+              <a:rPr lang="en-US" sz="3600" b="1" dirty="0">
+                <a:solidFill>
+                  <a:srgbClr val="002E53"/>
                 </a:solidFill>
                 <a:latin typeface="Calibri" pitchFamily="34" charset="0"/>
                 <a:ea typeface="Calibri" pitchFamily="34" charset="-122"/>
@@ -3999,7 +4034,7 @@
               </a:rPr>
               <a:t>Troque a senha no primeiro acesso</a:t>
             </a:r>
-            <a:endParaRPr lang="en-US" sz="3800" dirty="0"/>
+            <a:endParaRPr lang="en-US" sz="3600" dirty="0"/>
           </a:p>
         </p:txBody>
       </p:sp>
@@ -4012,13 +4047,13 @@
         <p:spPr>
           <a:xfrm>
             <a:off x="777240" y="1828800"/>
-            <a:ext cx="502920" cy="502920"/>
+            <a:ext cx="475488" cy="475488"/>
           </a:xfrm>
           <a:prstGeom prst="ellipse">
             <a:avLst/>
           </a:prstGeom>
           <a:solidFill>
-            <a:srgbClr val="29DF8C"/>
+            <a:srgbClr val="1EC555"/>
           </a:solidFill>
           <a:ln/>
         </p:spPr>
@@ -4032,7 +4067,7 @@
         <p:spPr>
           <a:xfrm>
             <a:off x="777240" y="1828800"/>
-            <a:ext cx="502920" cy="502920"/>
+            <a:ext cx="475488" cy="475488"/>
           </a:xfrm>
           <a:prstGeom prst="rect">
             <a:avLst/>
@@ -4048,9 +4083,9 @@
               <a:buNone/>
             </a:pPr>
             <a:r>
-              <a:rPr lang="en-US" sz="1900" b="1" dirty="0">
-                <a:solidFill>
-                  <a:srgbClr val="0A3421"/>
+              <a:rPr lang="en-US" sz="1800" b="1" dirty="0">
+                <a:solidFill>
+                  <a:srgbClr val="002E53"/>
                 </a:solidFill>
                 <a:latin typeface="Calibri" pitchFamily="34" charset="0"/>
                 <a:ea typeface="Calibri" pitchFamily="34" charset="-122"/>
@@ -4058,7 +4093,7 @@
               </a:rPr>
               <a:t>1</a:t>
             </a:r>
-            <a:endParaRPr lang="en-US" sz="1900" dirty="0"/>
+            <a:endParaRPr lang="en-US" sz="1800" dirty="0"/>
           </a:p>
         </p:txBody>
       </p:sp>
@@ -4070,8 +4105,8 @@
         </p:nvSpPr>
         <p:spPr>
           <a:xfrm>
-            <a:off x="1481328" y="1801368"/>
-            <a:ext cx="3017520" cy="292608"/>
+            <a:off x="1463040" y="1792224"/>
+            <a:ext cx="3108960" cy="274320"/>
           </a:xfrm>
           <a:prstGeom prst="rect">
             <a:avLst/>
@@ -4089,7 +4124,7 @@
             <a:r>
               <a:rPr lang="en-US" sz="1600" b="1" dirty="0">
                 <a:solidFill>
-                  <a:srgbClr val="0F462D"/>
+                  <a:srgbClr val="002E53"/>
                 </a:solidFill>
                 <a:latin typeface="Calibri" pitchFamily="34" charset="0"/>
                 <a:ea typeface="Calibri" pitchFamily="34" charset="-122"/>
@@ -4109,8 +4144,8 @@
         </p:nvSpPr>
         <p:spPr>
           <a:xfrm>
-            <a:off x="1481328" y="2093976"/>
-            <a:ext cx="5486400" cy="320040"/>
+            <a:off x="1463040" y="2075688"/>
+            <a:ext cx="5486400" cy="292608"/>
           </a:xfrm>
           <a:prstGeom prst="rect">
             <a:avLst/>
@@ -4128,7 +4163,7 @@
             <a:r>
               <a:rPr lang="en-US" sz="1350" dirty="0">
                 <a:solidFill>
-                  <a:srgbClr val="6B7280"/>
+                  <a:srgbClr val="6E7A87"/>
                 </a:solidFill>
                 <a:latin typeface="Calibri" pitchFamily="34" charset="0"/>
                 <a:ea typeface="Calibri" pitchFamily="34" charset="-122"/>
@@ -4148,14 +4183,14 @@
         </p:nvSpPr>
         <p:spPr>
           <a:xfrm>
-            <a:off x="777240" y="2697480"/>
-            <a:ext cx="502920" cy="502920"/>
+            <a:off x="777240" y="2670048"/>
+            <a:ext cx="475488" cy="475488"/>
           </a:xfrm>
           <a:prstGeom prst="ellipse">
             <a:avLst/>
           </a:prstGeom>
           <a:solidFill>
-            <a:srgbClr val="29DF8C"/>
+            <a:srgbClr val="1EC555"/>
           </a:solidFill>
           <a:ln/>
         </p:spPr>
@@ -4168,8 +4203,8 @@
         </p:nvSpPr>
         <p:spPr>
           <a:xfrm>
-            <a:off x="777240" y="2697480"/>
-            <a:ext cx="502920" cy="502920"/>
+            <a:off x="777240" y="2670048"/>
+            <a:ext cx="475488" cy="475488"/>
           </a:xfrm>
           <a:prstGeom prst="rect">
             <a:avLst/>
@@ -4185,9 +4220,9 @@
               <a:buNone/>
             </a:pPr>
             <a:r>
-              <a:rPr lang="en-US" sz="1900" b="1" dirty="0">
-                <a:solidFill>
-                  <a:srgbClr val="0A3421"/>
+              <a:rPr lang="en-US" sz="1800" b="1" dirty="0">
+                <a:solidFill>
+                  <a:srgbClr val="002E53"/>
                 </a:solidFill>
                 <a:latin typeface="Calibri" pitchFamily="34" charset="0"/>
                 <a:ea typeface="Calibri" pitchFamily="34" charset="-122"/>
@@ -4195,7 +4230,7 @@
               </a:rPr>
               <a:t>2</a:t>
             </a:r>
-            <a:endParaRPr lang="en-US" sz="1900" dirty="0"/>
+            <a:endParaRPr lang="en-US" sz="1800" dirty="0"/>
           </a:p>
         </p:txBody>
       </p:sp>
@@ -4207,8 +4242,8 @@
         </p:nvSpPr>
         <p:spPr>
           <a:xfrm>
-            <a:off x="1481328" y="2670048"/>
-            <a:ext cx="3017520" cy="292608"/>
+            <a:off x="1463040" y="2633472"/>
+            <a:ext cx="3108960" cy="274320"/>
           </a:xfrm>
           <a:prstGeom prst="rect">
             <a:avLst/>
@@ -4226,7 +4261,7 @@
             <a:r>
               <a:rPr lang="en-US" sz="1600" b="1" dirty="0">
                 <a:solidFill>
-                  <a:srgbClr val="0F462D"/>
+                  <a:srgbClr val="002E53"/>
                 </a:solidFill>
                 <a:latin typeface="Calibri" pitchFamily="34" charset="0"/>
                 <a:ea typeface="Calibri" pitchFamily="34" charset="-122"/>
@@ -4246,8 +4281,8 @@
         </p:nvSpPr>
         <p:spPr>
           <a:xfrm>
-            <a:off x="1481328" y="2962656"/>
-            <a:ext cx="5486400" cy="320040"/>
+            <a:off x="1463040" y="2916936"/>
+            <a:ext cx="5486400" cy="292608"/>
           </a:xfrm>
           <a:prstGeom prst="rect">
             <a:avLst/>
@@ -4265,13 +4300,13 @@
             <a:r>
               <a:rPr lang="en-US" sz="1350" dirty="0">
                 <a:solidFill>
-                  <a:srgbClr val="6B7280"/>
-                </a:solidFill>
-                <a:latin typeface="Calibri" pitchFamily="34" charset="0"/>
-                <a:ea typeface="Calibri" pitchFamily="34" charset="-122"/>
-                <a:cs typeface="Calibri" pitchFamily="34" charset="-120"/>
-              </a:rPr>
-              <a:t>No computador, fica no topo da tela. No celular, na aba Pedidos.</a:t>
+                  <a:srgbClr val="6E7A87"/>
+                </a:solidFill>
+                <a:latin typeface="Calibri" pitchFamily="34" charset="0"/>
+                <a:ea typeface="Calibri" pitchFamily="34" charset="-122"/>
+                <a:cs typeface="Calibri" pitchFamily="34" charset="-120"/>
+              </a:rPr>
+              <a:t>No computador, no topo da tela. No celular, na aba Pedidos.</a:t>
             </a:r>
             <a:endParaRPr lang="en-US" sz="1350" dirty="0"/>
           </a:p>
@@ -4285,14 +4320,14 @@
         </p:nvSpPr>
         <p:spPr>
           <a:xfrm>
-            <a:off x="777240" y="3566160"/>
-            <a:ext cx="502920" cy="502920"/>
+            <a:off x="777240" y="3511296"/>
+            <a:ext cx="475488" cy="475488"/>
           </a:xfrm>
           <a:prstGeom prst="ellipse">
             <a:avLst/>
           </a:prstGeom>
           <a:solidFill>
-            <a:srgbClr val="29DF8C"/>
+            <a:srgbClr val="1EC555"/>
           </a:solidFill>
           <a:ln/>
         </p:spPr>
@@ -4305,8 +4340,8 @@
         </p:nvSpPr>
         <p:spPr>
           <a:xfrm>
-            <a:off x="777240" y="3566160"/>
-            <a:ext cx="502920" cy="502920"/>
+            <a:off x="777240" y="3511296"/>
+            <a:ext cx="475488" cy="475488"/>
           </a:xfrm>
           <a:prstGeom prst="rect">
             <a:avLst/>
@@ -4322,9 +4357,9 @@
               <a:buNone/>
             </a:pPr>
             <a:r>
-              <a:rPr lang="en-US" sz="1900" b="1" dirty="0">
-                <a:solidFill>
-                  <a:srgbClr val="0A3421"/>
+              <a:rPr lang="en-US" sz="1800" b="1" dirty="0">
+                <a:solidFill>
+                  <a:srgbClr val="002E53"/>
                 </a:solidFill>
                 <a:latin typeface="Calibri" pitchFamily="34" charset="0"/>
                 <a:ea typeface="Calibri" pitchFamily="34" charset="-122"/>
@@ -4332,7 +4367,7 @@
               </a:rPr>
               <a:t>3</a:t>
             </a:r>
-            <a:endParaRPr lang="en-US" sz="1900" dirty="0"/>
+            <a:endParaRPr lang="en-US" sz="1800" dirty="0"/>
           </a:p>
         </p:txBody>
       </p:sp>
@@ -4344,8 +4379,8 @@
         </p:nvSpPr>
         <p:spPr>
           <a:xfrm>
-            <a:off x="1481328" y="3538728"/>
-            <a:ext cx="3017520" cy="292608"/>
+            <a:off x="1463040" y="3474720"/>
+            <a:ext cx="3108960" cy="274320"/>
           </a:xfrm>
           <a:prstGeom prst="rect">
             <a:avLst/>
@@ -4363,7 +4398,7 @@
             <a:r>
               <a:rPr lang="en-US" sz="1600" b="1" dirty="0">
                 <a:solidFill>
-                  <a:srgbClr val="0F462D"/>
+                  <a:srgbClr val="002E53"/>
                 </a:solidFill>
                 <a:latin typeface="Calibri" pitchFamily="34" charset="0"/>
                 <a:ea typeface="Calibri" pitchFamily="34" charset="-122"/>
@@ -4383,8 +4418,8 @@
         </p:nvSpPr>
         <p:spPr>
           <a:xfrm>
-            <a:off x="1481328" y="3831336"/>
-            <a:ext cx="5486400" cy="320040"/>
+            <a:off x="1463040" y="3758184"/>
+            <a:ext cx="5486400" cy="292608"/>
           </a:xfrm>
           <a:prstGeom prst="rect">
             <a:avLst/>
@@ -4402,7 +4437,7 @@
             <a:r>
               <a:rPr lang="en-US" sz="1350" dirty="0">
                 <a:solidFill>
-                  <a:srgbClr val="6B7280"/>
+                  <a:srgbClr val="6E7A87"/>
                 </a:solidFill>
                 <a:latin typeface="Calibri" pitchFamily="34" charset="0"/>
                 <a:ea typeface="Calibri" pitchFamily="34" charset="-122"/>
@@ -4422,14 +4457,14 @@
         </p:nvSpPr>
         <p:spPr>
           <a:xfrm>
-            <a:off x="777240" y="4434840"/>
-            <a:ext cx="502920" cy="502920"/>
+            <a:off x="777240" y="4352544"/>
+            <a:ext cx="475488" cy="475488"/>
           </a:xfrm>
           <a:prstGeom prst="ellipse">
             <a:avLst/>
           </a:prstGeom>
           <a:solidFill>
-            <a:srgbClr val="29DF8C"/>
+            <a:srgbClr val="1EC555"/>
           </a:solidFill>
           <a:ln/>
         </p:spPr>
@@ -4442,8 +4477,8 @@
         </p:nvSpPr>
         <p:spPr>
           <a:xfrm>
-            <a:off x="777240" y="4434840"/>
-            <a:ext cx="502920" cy="502920"/>
+            <a:off x="777240" y="4352544"/>
+            <a:ext cx="475488" cy="475488"/>
           </a:xfrm>
           <a:prstGeom prst="rect">
             <a:avLst/>
@@ -4459,9 +4494,9 @@
               <a:buNone/>
             </a:pPr>
             <a:r>
-              <a:rPr lang="en-US" sz="1900" b="1" dirty="0">
-                <a:solidFill>
-                  <a:srgbClr val="0A3421"/>
+              <a:rPr lang="en-US" sz="1800" b="1" dirty="0">
+                <a:solidFill>
+                  <a:srgbClr val="002E53"/>
                 </a:solidFill>
                 <a:latin typeface="Calibri" pitchFamily="34" charset="0"/>
                 <a:ea typeface="Calibri" pitchFamily="34" charset="-122"/>
@@ -4469,7 +4504,7 @@
               </a:rPr>
               <a:t>4</a:t>
             </a:r>
-            <a:endParaRPr lang="en-US" sz="1900" dirty="0"/>
+            <a:endParaRPr lang="en-US" sz="1800" dirty="0"/>
           </a:p>
         </p:txBody>
       </p:sp>
@@ -4481,8 +4516,8 @@
         </p:nvSpPr>
         <p:spPr>
           <a:xfrm>
-            <a:off x="1481328" y="4407408"/>
-            <a:ext cx="3017520" cy="292608"/>
+            <a:off x="1463040" y="4315968"/>
+            <a:ext cx="3108960" cy="274320"/>
           </a:xfrm>
           <a:prstGeom prst="rect">
             <a:avLst/>
@@ -4500,7 +4535,7 @@
             <a:r>
               <a:rPr lang="en-US" sz="1600" b="1" dirty="0">
                 <a:solidFill>
-                  <a:srgbClr val="0F462D"/>
+                  <a:srgbClr val="002E53"/>
                 </a:solidFill>
                 <a:latin typeface="Calibri" pitchFamily="34" charset="0"/>
                 <a:ea typeface="Calibri" pitchFamily="34" charset="-122"/>
@@ -4520,8 +4555,8 @@
         </p:nvSpPr>
         <p:spPr>
           <a:xfrm>
-            <a:off x="1481328" y="4700016"/>
-            <a:ext cx="5486400" cy="320040"/>
+            <a:off x="1463040" y="4599432"/>
+            <a:ext cx="5486400" cy="292608"/>
           </a:xfrm>
           <a:prstGeom prst="rect">
             <a:avLst/>
@@ -4539,7 +4574,7 @@
             <a:r>
               <a:rPr lang="en-US" sz="1350" dirty="0">
                 <a:solidFill>
-                  <a:srgbClr val="6B7280"/>
+                  <a:srgbClr val="6E7A87"/>
                 </a:solidFill>
                 <a:latin typeface="Calibri" pitchFamily="34" charset="0"/>
                 <a:ea typeface="Calibri" pitchFamily="34" charset="-122"/>
@@ -4560,15 +4595,15 @@
         <p:spPr>
           <a:xfrm>
             <a:off x="7452360" y="1828800"/>
-            <a:ext cx="3977640" cy="3383280"/>
+            <a:ext cx="3977640" cy="3246120"/>
           </a:xfrm>
           <a:prstGeom prst="roundRect">
             <a:avLst>
-              <a:gd name="adj" fmla="val 3243"/>
+              <a:gd name="adj" fmla="val 2817"/>
             </a:avLst>
           </a:prstGeom>
           <a:solidFill>
-            <a:srgbClr val="0F462D"/>
+            <a:srgbClr val="002E53"/>
           </a:solidFill>
           <a:ln/>
         </p:spPr>
@@ -4581,8 +4616,8 @@
         </p:nvSpPr>
         <p:spPr>
           <a:xfrm>
-            <a:off x="7863840" y="2194560"/>
-            <a:ext cx="3154680" cy="365760"/>
+            <a:off x="7863840" y="2176272"/>
+            <a:ext cx="3154680" cy="347472"/>
           </a:xfrm>
           <a:prstGeom prst="rect">
             <a:avLst/>
@@ -4600,7 +4635,7 @@
             <a:r>
               <a:rPr lang="en-US" sz="1900" b="1" dirty="0">
                 <a:solidFill>
-                  <a:srgbClr val="29DF8C"/>
+                  <a:srgbClr val="1EC555"/>
                 </a:solidFill>
                 <a:latin typeface="Calibri" pitchFamily="34" charset="0"/>
                 <a:ea typeface="Calibri" pitchFamily="34" charset="-122"/>
@@ -4620,8 +4655,8 @@
         </p:nvSpPr>
         <p:spPr>
           <a:xfrm>
-            <a:off x="7863840" y="2697480"/>
-            <a:ext cx="3154680" cy="2194560"/>
+            <a:off x="7863840" y="2670048"/>
+            <a:ext cx="3154680" cy="2103120"/>
           </a:xfrm>
           <a:prstGeom prst="rect">
             <a:avLst/>
@@ -4637,18 +4672,21 @@
               <a:lnSpc>
                 <a:spcPts val="2000"/>
               </a:lnSpc>
+              <a:spcAft>
+                <a:spcPts val="1000"/>
+              </a:spcAft>
               <a:buNone/>
             </a:pPr>
             <a:r>
               <a:rPr lang="en-US" sz="1400" dirty="0">
                 <a:solidFill>
-                  <a:srgbClr val="C9D9D1"/>
-                </a:solidFill>
-                <a:latin typeface="Calibri" pitchFamily="34" charset="0"/>
-                <a:ea typeface="Calibri" pitchFamily="34" charset="-122"/>
-                <a:cs typeface="Calibri" pitchFamily="34" charset="-120"/>
-              </a:rPr>
-              <a:t>A senha inicial é a mesma para todos os funcionários.</a:t>
+                  <a:srgbClr val="AFC2D2"/>
+                </a:solidFill>
+                <a:latin typeface="Calibri" pitchFamily="34" charset="0"/>
+                <a:ea typeface="Calibri" pitchFamily="34" charset="-122"/>
+                <a:cs typeface="Calibri" pitchFamily="34" charset="-120"/>
+              </a:rPr>
+              <a:t>A senha inicial é a mesma para toda a equipe.</a:t>
             </a:r>
             <a:endParaRPr lang="en-US" sz="1400" dirty="0"/>
           </a:p>
@@ -4659,66 +4697,81 @@
               </a:lnSpc>
               <a:buNone/>
             </a:pPr>
+            <a:r>
+              <a:rPr lang="en-US" sz="1400" dirty="0">
+                <a:solidFill>
+                  <a:srgbClr val="AFC2D2"/>
+                </a:solidFill>
+                <a:latin typeface="Calibri" pitchFamily="34" charset="0"/>
+                <a:ea typeface="Calibri" pitchFamily="34" charset="-122"/>
+                <a:cs typeface="Calibri" pitchFamily="34" charset="-120"/>
+              </a:rPr>
+              <a:t>Seus pedidos e comprovantes ficam na sua conta — a senha garante que só você compra em seu nome.</a:t>
+            </a:r>
             <a:endParaRPr lang="en-US" sz="1400" dirty="0"/>
           </a:p>
-          <a:p>
-            <a:pPr indent="0" marL="0">
-              <a:lnSpc>
-                <a:spcPts val="2000"/>
-              </a:lnSpc>
-              <a:buNone/>
-            </a:pPr>
-            <a:r>
-              <a:rPr lang="en-US" sz="1400" dirty="0">
-                <a:solidFill>
-                  <a:srgbClr val="C9D9D1"/>
-                </a:solidFill>
-                <a:latin typeface="Calibri" pitchFamily="34" charset="0"/>
-                <a:ea typeface="Calibri" pitchFamily="34" charset="-122"/>
-                <a:cs typeface="Calibri" pitchFamily="34" charset="-120"/>
-              </a:rPr>
-              <a:t>Seus pedidos e comprovantes ficam na sua conta — a senha é o que garante que só você compra em seu nome.</a:t>
-            </a:r>
-            <a:endParaRPr lang="en-US" sz="1400" dirty="0"/>
-          </a:p>
-        </p:txBody>
-      </p:sp>
-      <p:sp>
-        <p:nvSpPr>
-          <p:cNvPr id="23" name="Text 21"/>
-          <p:cNvSpPr/>
-          <p:nvPr/>
-        </p:nvSpPr>
-        <p:spPr>
-          <a:xfrm>
-            <a:off x="731520" y="6199632"/>
-            <a:ext cx="10698480" cy="274320"/>
-          </a:xfrm>
-          <a:prstGeom prst="rect">
-            <a:avLst/>
-          </a:prstGeom>
-          <a:noFill/>
-          <a:ln/>
-        </p:spPr>
-        <p:txBody>
-          <a:bodyPr wrap="square" lIns="0" tIns="0" rIns="0" bIns="0" rtlCol="0" anchor="ctr"/>
-          <a:lstStyle/>
-          <a:p>
-            <a:pPr indent="0" marL="0">
-              <a:buNone/>
-            </a:pPr>
-            <a:r>
-              <a:rPr lang="en-US" sz="1100" dirty="0">
-                <a:solidFill>
-                  <a:srgbClr val="A5AEB8"/>
-                </a:solidFill>
-                <a:latin typeface="Calibri" pitchFamily="34" charset="0"/>
-                <a:ea typeface="Calibri" pitchFamily="34" charset="-122"/>
-                <a:cs typeface="Calibri" pitchFamily="34" charset="-120"/>
-              </a:rPr>
-              <a:t>Mercadinho do Lito · Lito Aviation Academy</a:t>
-            </a:r>
-            <a:endParaRPr lang="en-US" sz="1100" dirty="0"/>
+        </p:txBody>
+      </p:sp>
+      <p:pic>
+        <p:nvPicPr>
+          <p:cNvPr id="23" name="Image 0" descr="preencoded.png">    </p:cNvPr>
+          <p:cNvPicPr>
+            <a:picLocks noChangeAspect="1"/>
+          </p:cNvPicPr>
+          <p:nvPr/>
+        </p:nvPicPr>
+        <p:blipFill>
+          <a:blip r:embed="rId1"/>
+          <a:stretch>
+            <a:fillRect/>
+          </a:stretch>
+        </p:blipFill>
+        <p:spPr>
+          <a:xfrm>
+            <a:off x="731520" y="6108192"/>
+            <a:ext cx="1051560" cy="493776"/>
+          </a:xfrm>
+          <a:prstGeom prst="rect">
+            <a:avLst/>
+          </a:prstGeom>
+        </p:spPr>
+      </p:pic>
+      <p:sp>
+        <p:nvSpPr>
+          <p:cNvPr id="24" name="Text 21"/>
+          <p:cNvSpPr/>
+          <p:nvPr/>
+        </p:nvSpPr>
+        <p:spPr>
+          <a:xfrm>
+            <a:off x="1920240" y="6199632"/>
+            <a:ext cx="5486400" cy="274320"/>
+          </a:xfrm>
+          <a:prstGeom prst="rect">
+            <a:avLst/>
+          </a:prstGeom>
+          <a:noFill/>
+          <a:ln/>
+        </p:spPr>
+        <p:txBody>
+          <a:bodyPr wrap="square" lIns="0" tIns="0" rIns="0" bIns="0" rtlCol="0" anchor="ctr"/>
+          <a:lstStyle/>
+          <a:p>
+            <a:pPr indent="0" marL="0">
+              <a:buNone/>
+            </a:pPr>
+            <a:r>
+              <a:rPr lang="en-US" sz="1050" dirty="0">
+                <a:solidFill>
+                  <a:srgbClr val="B0AAAA"/>
+                </a:solidFill>
+                <a:latin typeface="Calibri" pitchFamily="34" charset="0"/>
+                <a:ea typeface="Calibri" pitchFamily="34" charset="-122"/>
+                <a:cs typeface="Calibri" pitchFamily="34" charset="-120"/>
+              </a:rPr>
+              <a:t>Mercadinho do Lito · uso interno</a:t>
+            </a:r>
+            <a:endParaRPr lang="en-US" sz="1050" dirty="0"/>
           </a:p>
         </p:txBody>
       </p:sp>
@@ -4736,7 +4789,7 @@
     <p:bg>
       <p:bgPr>
         <a:solidFill>
-          <a:srgbClr val="F2F5F9"/>
+          <a:srgbClr val="F4F5F7"/>
         </a:solidFill>
       </p:bgPr>
     </p:bg>
@@ -4762,26 +4815,26 @@
         </p:nvSpPr>
         <p:spPr>
           <a:xfrm>
-            <a:off x="731520" y="457200"/>
-            <a:ext cx="2743200" cy="274320"/>
-          </a:xfrm>
-          <a:prstGeom prst="rect">
-            <a:avLst/>
-          </a:prstGeom>
-          <a:noFill/>
-          <a:ln/>
-        </p:spPr>
-        <p:txBody>
-          <a:bodyPr wrap="square" lIns="0" tIns="0" rIns="0" bIns="0" rtlCol="0" anchor="ctr"/>
-          <a:lstStyle/>
-          <a:p>
-            <a:pPr algn="l" indent="0" marL="0">
+            <a:off x="731520" y="475488"/>
+            <a:ext cx="4572000" cy="274320"/>
+          </a:xfrm>
+          <a:prstGeom prst="rect">
+            <a:avLst/>
+          </a:prstGeom>
+          <a:noFill/>
+          <a:ln/>
+        </p:spPr>
+        <p:txBody>
+          <a:bodyPr wrap="square" lIns="0" tIns="0" rIns="0" bIns="0" rtlCol="0" anchor="ctr"/>
+          <a:lstStyle/>
+          <a:p>
+            <a:pPr indent="0" marL="0">
               <a:buNone/>
             </a:pPr>
             <a:r>
               <a:rPr lang="en-US" sz="1200" b="1" spc="250" kern="0" dirty="0">
                 <a:solidFill>
-                  <a:srgbClr val="0F462D"/>
+                  <a:srgbClr val="002E53"/>
                 </a:solidFill>
                 <a:latin typeface="Calibri" pitchFamily="34" charset="0"/>
                 <a:ea typeface="Calibri" pitchFamily="34" charset="-122"/>
@@ -4801,26 +4854,26 @@
         </p:nvSpPr>
         <p:spPr>
           <a:xfrm>
-            <a:off x="731520" y="777240"/>
-            <a:ext cx="10698480" cy="777240"/>
-          </a:xfrm>
-          <a:prstGeom prst="rect">
-            <a:avLst/>
-          </a:prstGeom>
-          <a:noFill/>
-          <a:ln/>
-        </p:spPr>
-        <p:txBody>
-          <a:bodyPr wrap="square" lIns="0" tIns="0" rIns="0" bIns="0" rtlCol="0" anchor="ctr"/>
-          <a:lstStyle/>
-          <a:p>
-            <a:pPr indent="0" marL="0">
-              <a:buNone/>
-            </a:pPr>
-            <a:r>
-              <a:rPr lang="en-US" sz="3800" b="1" dirty="0">
-                <a:solidFill>
-                  <a:srgbClr val="0F462D"/>
+            <a:off x="731520" y="749808"/>
+            <a:ext cx="10698480" cy="731520"/>
+          </a:xfrm>
+          <a:prstGeom prst="rect">
+            <a:avLst/>
+          </a:prstGeom>
+          <a:noFill/>
+          <a:ln/>
+        </p:spPr>
+        <p:txBody>
+          <a:bodyPr wrap="square" lIns="0" tIns="0" rIns="0" bIns="0" rtlCol="0" anchor="ctr"/>
+          <a:lstStyle/>
+          <a:p>
+            <a:pPr indent="0" marL="0">
+              <a:buNone/>
+            </a:pPr>
+            <a:r>
+              <a:rPr lang="en-US" sz="3600" b="1" dirty="0">
+                <a:solidFill>
+                  <a:srgbClr val="002E53"/>
                 </a:solidFill>
                 <a:latin typeface="Calibri" pitchFamily="34" charset="0"/>
                 <a:ea typeface="Calibri" pitchFamily="34" charset="-122"/>
@@ -4828,7 +4881,7 @@
               </a:rPr>
               <a:t>Escolha os produtos</a:t>
             </a:r>
-            <a:endParaRPr lang="en-US" sz="3800" dirty="0"/>
+            <a:endParaRPr lang="en-US" sz="3600" dirty="0"/>
           </a:p>
         </p:txBody>
       </p:sp>
@@ -4841,11 +4894,11 @@
         <p:spPr>
           <a:xfrm>
             <a:off x="731520" y="1828800"/>
-            <a:ext cx="6400800" cy="3291840"/>
+            <a:ext cx="6400800" cy="3200400"/>
           </a:xfrm>
           <a:prstGeom prst="roundRect">
             <a:avLst>
-              <a:gd name="adj" fmla="val 3333"/>
+              <a:gd name="adj" fmla="val 2857"/>
             </a:avLst>
           </a:prstGeom>
           <a:solidFill>
@@ -4853,14 +4906,14 @@
           </a:solidFill>
           <a:ln w="12700">
             <a:solidFill>
-              <a:srgbClr val="E2E8EF"/>
+              <a:srgbClr val="E3E6EA"/>
             </a:solidFill>
             <a:prstDash val="solid"/>
           </a:ln>
           <a:effectLst>
             <a:outerShdw sx="100000" sy="100000" kx="0" ky="0" algn="bl" rotWithShape="0" blurRad="127000" dist="25400" dir="5400000">
-              <a:srgbClr val="9AA5B1">
-                <a:alpha val="25000"/>
+              <a:srgbClr val="AAB2BC">
+                <a:alpha val="30000"/>
               </a:srgbClr>
             </a:outerShdw>
           </a:effectLst>
@@ -4874,14 +4927,14 @@
         </p:nvSpPr>
         <p:spPr>
           <a:xfrm>
-            <a:off x="1097280" y="2176272"/>
-            <a:ext cx="146304" cy="146304"/>
+            <a:off x="1097280" y="2157984"/>
+            <a:ext cx="137160" cy="137160"/>
           </a:xfrm>
           <a:prstGeom prst="ellipse">
             <a:avLst/>
           </a:prstGeom>
           <a:solidFill>
-            <a:srgbClr val="29DF8C"/>
+            <a:srgbClr val="1EC555"/>
           </a:solidFill>
           <a:ln/>
         </p:spPr>
@@ -4894,7 +4947,7 @@
         </p:nvSpPr>
         <p:spPr>
           <a:xfrm>
-            <a:off x="1417320" y="2084832"/>
+            <a:off x="1399032" y="2057400"/>
             <a:ext cx="5394960" cy="274320"/>
           </a:xfrm>
           <a:prstGeom prst="rect">
@@ -4913,7 +4966,7 @@
             <a:r>
               <a:rPr lang="en-US" sz="1550" b="1" dirty="0">
                 <a:solidFill>
-                  <a:srgbClr val="0F462D"/>
+                  <a:srgbClr val="002E53"/>
                 </a:solidFill>
                 <a:latin typeface="Calibri" pitchFamily="34" charset="0"/>
                 <a:ea typeface="Calibri" pitchFamily="34" charset="-122"/>
@@ -4933,7 +4986,7 @@
         </p:nvSpPr>
         <p:spPr>
           <a:xfrm>
-            <a:off x="1417320" y="2359152"/>
+            <a:off x="1399032" y="2331720"/>
             <a:ext cx="5394960" cy="274320"/>
           </a:xfrm>
           <a:prstGeom prst="rect">
@@ -4952,7 +5005,7 @@
             <a:r>
               <a:rPr lang="en-US" sz="1300" dirty="0">
                 <a:solidFill>
-                  <a:srgbClr val="6B7280"/>
+                  <a:srgbClr val="6E7A87"/>
                 </a:solidFill>
                 <a:latin typeface="Calibri" pitchFamily="34" charset="0"/>
                 <a:ea typeface="Calibri" pitchFamily="34" charset="-122"/>
@@ -4972,14 +5025,14 @@
         </p:nvSpPr>
         <p:spPr>
           <a:xfrm>
-            <a:off x="1097280" y="2926080"/>
-            <a:ext cx="146304" cy="146304"/>
+            <a:off x="1097280" y="2889504"/>
+            <a:ext cx="137160" cy="137160"/>
           </a:xfrm>
           <a:prstGeom prst="ellipse">
             <a:avLst/>
           </a:prstGeom>
           <a:solidFill>
-            <a:srgbClr val="29DF8C"/>
+            <a:srgbClr val="1EC555"/>
           </a:solidFill>
           <a:ln/>
         </p:spPr>
@@ -4992,7 +5045,7 @@
         </p:nvSpPr>
         <p:spPr>
           <a:xfrm>
-            <a:off x="1417320" y="2834640"/>
+            <a:off x="1399032" y="2788920"/>
             <a:ext cx="5394960" cy="274320"/>
           </a:xfrm>
           <a:prstGeom prst="rect">
@@ -5011,7 +5064,7 @@
             <a:r>
               <a:rPr lang="en-US" sz="1550" b="1" dirty="0">
                 <a:solidFill>
-                  <a:srgbClr val="0F462D"/>
+                  <a:srgbClr val="002E53"/>
                 </a:solidFill>
                 <a:latin typeface="Calibri" pitchFamily="34" charset="0"/>
                 <a:ea typeface="Calibri" pitchFamily="34" charset="-122"/>
@@ -5031,7 +5084,7 @@
         </p:nvSpPr>
         <p:spPr>
           <a:xfrm>
-            <a:off x="1417320" y="3108960"/>
+            <a:off x="1399032" y="3063240"/>
             <a:ext cx="5394960" cy="274320"/>
           </a:xfrm>
           <a:prstGeom prst="rect">
@@ -5050,7 +5103,7 @@
             <a:r>
               <a:rPr lang="en-US" sz="1300" dirty="0">
                 <a:solidFill>
-                  <a:srgbClr val="6B7280"/>
+                  <a:srgbClr val="6E7A87"/>
                 </a:solidFill>
                 <a:latin typeface="Calibri" pitchFamily="34" charset="0"/>
                 <a:ea typeface="Calibri" pitchFamily="34" charset="-122"/>
@@ -5070,14 +5123,14 @@
         </p:nvSpPr>
         <p:spPr>
           <a:xfrm>
-            <a:off x="1097280" y="3675888"/>
-            <a:ext cx="146304" cy="146304"/>
+            <a:off x="1097280" y="3621024"/>
+            <a:ext cx="137160" cy="137160"/>
           </a:xfrm>
           <a:prstGeom prst="ellipse">
             <a:avLst/>
           </a:prstGeom>
           <a:solidFill>
-            <a:srgbClr val="29DF8C"/>
+            <a:srgbClr val="1EC555"/>
           </a:solidFill>
           <a:ln/>
         </p:spPr>
@@ -5090,7 +5143,7 @@
         </p:nvSpPr>
         <p:spPr>
           <a:xfrm>
-            <a:off x="1417320" y="3584448"/>
+            <a:off x="1399032" y="3520440"/>
             <a:ext cx="5394960" cy="274320"/>
           </a:xfrm>
           <a:prstGeom prst="rect">
@@ -5109,7 +5162,7 @@
             <a:r>
               <a:rPr lang="en-US" sz="1550" b="1" dirty="0">
                 <a:solidFill>
-                  <a:srgbClr val="0F462D"/>
+                  <a:srgbClr val="002E53"/>
                 </a:solidFill>
                 <a:latin typeface="Calibri" pitchFamily="34" charset="0"/>
                 <a:ea typeface="Calibri" pitchFamily="34" charset="-122"/>
@@ -5129,7 +5182,7 @@
         </p:nvSpPr>
         <p:spPr>
           <a:xfrm>
-            <a:off x="1417320" y="3858768"/>
+            <a:off x="1399032" y="3794760"/>
             <a:ext cx="5394960" cy="274320"/>
           </a:xfrm>
           <a:prstGeom prst="rect">
@@ -5148,7 +5201,7 @@
             <a:r>
               <a:rPr lang="en-US" sz="1300" dirty="0">
                 <a:solidFill>
-                  <a:srgbClr val="6B7280"/>
+                  <a:srgbClr val="6E7A87"/>
                 </a:solidFill>
                 <a:latin typeface="Calibri" pitchFamily="34" charset="0"/>
                 <a:ea typeface="Calibri" pitchFamily="34" charset="-122"/>
@@ -5168,14 +5221,14 @@
         </p:nvSpPr>
         <p:spPr>
           <a:xfrm>
-            <a:off x="1097280" y="4425696"/>
-            <a:ext cx="146304" cy="146304"/>
+            <a:off x="1097280" y="4352544"/>
+            <a:ext cx="137160" cy="137160"/>
           </a:xfrm>
           <a:prstGeom prst="ellipse">
             <a:avLst/>
           </a:prstGeom>
           <a:solidFill>
-            <a:srgbClr val="29DF8C"/>
+            <a:srgbClr val="1EC555"/>
           </a:solidFill>
           <a:ln/>
         </p:spPr>
@@ -5188,7 +5241,7 @@
         </p:nvSpPr>
         <p:spPr>
           <a:xfrm>
-            <a:off x="1417320" y="4334256"/>
+            <a:off x="1399032" y="4251960"/>
             <a:ext cx="5394960" cy="274320"/>
           </a:xfrm>
           <a:prstGeom prst="rect">
@@ -5207,7 +5260,7 @@
             <a:r>
               <a:rPr lang="en-US" sz="1550" b="1" dirty="0">
                 <a:solidFill>
-                  <a:srgbClr val="0F462D"/>
+                  <a:srgbClr val="002E53"/>
                 </a:solidFill>
                 <a:latin typeface="Calibri" pitchFamily="34" charset="0"/>
                 <a:ea typeface="Calibri" pitchFamily="34" charset="-122"/>
@@ -5227,7 +5280,7 @@
         </p:nvSpPr>
         <p:spPr>
           <a:xfrm>
-            <a:off x="1417320" y="4608576"/>
+            <a:off x="1399032" y="4526280"/>
             <a:ext cx="5394960" cy="274320"/>
           </a:xfrm>
           <a:prstGeom prst="rect">
@@ -5246,7 +5299,7 @@
             <a:r>
               <a:rPr lang="en-US" sz="1300" dirty="0">
                 <a:solidFill>
-                  <a:srgbClr val="6B7280"/>
+                  <a:srgbClr val="6E7A87"/>
                 </a:solidFill>
                 <a:latin typeface="Calibri" pitchFamily="34" charset="0"/>
                 <a:ea typeface="Calibri" pitchFamily="34" charset="-122"/>
@@ -5267,19 +5320,19 @@
         <p:spPr>
           <a:xfrm>
             <a:off x="7452360" y="1828800"/>
-            <a:ext cx="3977640" cy="3291840"/>
+            <a:ext cx="3977640" cy="3200400"/>
           </a:xfrm>
           <a:prstGeom prst="roundRect">
             <a:avLst>
-              <a:gd name="adj" fmla="val 3333"/>
+              <a:gd name="adj" fmla="val 2857"/>
             </a:avLst>
           </a:prstGeom>
           <a:solidFill>
-            <a:srgbClr val="E4F7EE"/>
+            <a:srgbClr val="E8F8EE"/>
           </a:solidFill>
           <a:ln w="12700">
             <a:solidFill>
-              <a:srgbClr val="BCE8D5"/>
+              <a:srgbClr val="BEE9CE"/>
             </a:solidFill>
             <a:prstDash val="solid"/>
           </a:ln>
@@ -5293,8 +5346,8 @@
         </p:nvSpPr>
         <p:spPr>
           <a:xfrm>
-            <a:off x="7863840" y="2148840"/>
-            <a:ext cx="3154680" cy="320040"/>
+            <a:off x="7863840" y="2121408"/>
+            <a:ext cx="3154680" cy="301752"/>
           </a:xfrm>
           <a:prstGeom prst="rect">
             <a:avLst/>
@@ -5312,7 +5365,7 @@
             <a:r>
               <a:rPr lang="en-US" sz="1700" b="1" dirty="0">
                 <a:solidFill>
-                  <a:srgbClr val="0F462D"/>
+                  <a:srgbClr val="002E53"/>
                 </a:solidFill>
                 <a:latin typeface="Calibri" pitchFamily="34" charset="0"/>
                 <a:ea typeface="Calibri" pitchFamily="34" charset="-122"/>
@@ -5332,8 +5385,8 @@
         </p:nvSpPr>
         <p:spPr>
           <a:xfrm>
-            <a:off x="7863840" y="2606040"/>
-            <a:ext cx="3154680" cy="2286000"/>
+            <a:off x="7863840" y="2560320"/>
+            <a:ext cx="3154680" cy="2194560"/>
           </a:xfrm>
           <a:prstGeom prst="rect">
             <a:avLst/>
@@ -5355,13 +5408,13 @@
             <a:r>
               <a:rPr lang="en-US" sz="1350" dirty="0">
                 <a:solidFill>
-                  <a:srgbClr val="23282C"/>
-                </a:solidFill>
-                <a:latin typeface="Calibri" pitchFamily="34" charset="0"/>
-                <a:ea typeface="Calibri" pitchFamily="34" charset="-122"/>
-                <a:cs typeface="Calibri" pitchFamily="34" charset="-120"/>
-              </a:rPr>
-              <a:t>O preço de cada item aparece no card, e o total no carrinho.</a:t>
+                  <a:srgbClr val="1B2733"/>
+                </a:solidFill>
+                <a:latin typeface="Calibri" pitchFamily="34" charset="0"/>
+                <a:ea typeface="Calibri" pitchFamily="34" charset="-122"/>
+                <a:cs typeface="Calibri" pitchFamily="34" charset="-120"/>
+              </a:rPr>
+              <a:t>O preço aparece em cada produto, e o total no carrinho.</a:t>
             </a:r>
             <a:endParaRPr lang="en-US" sz="1350" dirty="0"/>
           </a:p>
@@ -5376,13 +5429,13 @@
             <a:r>
               <a:rPr lang="en-US" sz="1350" dirty="0">
                 <a:solidFill>
-                  <a:srgbClr val="23282C"/>
-                </a:solidFill>
-                <a:latin typeface="Calibri" pitchFamily="34" charset="0"/>
-                <a:ea typeface="Calibri" pitchFamily="34" charset="-122"/>
-                <a:cs typeface="Calibri" pitchFamily="34" charset="-120"/>
-              </a:rPr>
-              <a:t>Se aparecer "Esgotado", o produto acabou — avise o administrador.</a:t>
+                  <a:srgbClr val="1B2733"/>
+                </a:solidFill>
+                <a:latin typeface="Calibri" pitchFamily="34" charset="0"/>
+                <a:ea typeface="Calibri" pitchFamily="34" charset="-122"/>
+                <a:cs typeface="Calibri" pitchFamily="34" charset="-120"/>
+              </a:rPr>
+              <a:t>Se aparecer "Esgotado", o produto acabou — avise a administração.</a:t>
             </a:r>
             <a:endParaRPr lang="en-US" sz="1350" dirty="0"/>
           </a:p>
@@ -5397,54 +5450,78 @@
             <a:r>
               <a:rPr lang="en-US" sz="1350" dirty="0">
                 <a:solidFill>
-                  <a:srgbClr val="23282C"/>
-                </a:solidFill>
-                <a:latin typeface="Calibri" pitchFamily="34" charset="0"/>
-                <a:ea typeface="Calibri" pitchFamily="34" charset="-122"/>
-                <a:cs typeface="Calibri" pitchFamily="34" charset="-120"/>
-              </a:rPr>
-              <a:t>O carrinho fica salvo no seu celular se você sair sem finalizar.</a:t>
+                  <a:srgbClr val="1B2733"/>
+                </a:solidFill>
+                <a:latin typeface="Calibri" pitchFamily="34" charset="0"/>
+                <a:ea typeface="Calibri" pitchFamily="34" charset="-122"/>
+                <a:cs typeface="Calibri" pitchFamily="34" charset="-120"/>
+              </a:rPr>
+              <a:t>O carrinho fica salvo se você sair sem finalizar.</a:t>
             </a:r>
             <a:endParaRPr lang="en-US" sz="1350" dirty="0"/>
           </a:p>
         </p:txBody>
       </p:sp>
-      <p:sp>
-        <p:nvSpPr>
-          <p:cNvPr id="20" name="Text 18"/>
-          <p:cNvSpPr/>
-          <p:nvPr/>
-        </p:nvSpPr>
-        <p:spPr>
-          <a:xfrm>
-            <a:off x="731520" y="6199632"/>
-            <a:ext cx="10698480" cy="274320"/>
-          </a:xfrm>
-          <a:prstGeom prst="rect">
-            <a:avLst/>
-          </a:prstGeom>
-          <a:noFill/>
-          <a:ln/>
-        </p:spPr>
-        <p:txBody>
-          <a:bodyPr wrap="square" lIns="0" tIns="0" rIns="0" bIns="0" rtlCol="0" anchor="ctr"/>
-          <a:lstStyle/>
-          <a:p>
-            <a:pPr indent="0" marL="0">
-              <a:buNone/>
-            </a:pPr>
-            <a:r>
-              <a:rPr lang="en-US" sz="1100" dirty="0">
-                <a:solidFill>
-                  <a:srgbClr val="A5AEB8"/>
-                </a:solidFill>
-                <a:latin typeface="Calibri" pitchFamily="34" charset="0"/>
-                <a:ea typeface="Calibri" pitchFamily="34" charset="-122"/>
-                <a:cs typeface="Calibri" pitchFamily="34" charset="-120"/>
-              </a:rPr>
-              <a:t>Mercadinho do Lito · Lito Aviation Academy</a:t>
-            </a:r>
-            <a:endParaRPr lang="en-US" sz="1100" dirty="0"/>
+      <p:pic>
+        <p:nvPicPr>
+          <p:cNvPr id="20" name="Image 0" descr="preencoded.png">    </p:cNvPr>
+          <p:cNvPicPr>
+            <a:picLocks noChangeAspect="1"/>
+          </p:cNvPicPr>
+          <p:nvPr/>
+        </p:nvPicPr>
+        <p:blipFill>
+          <a:blip r:embed="rId1"/>
+          <a:stretch>
+            <a:fillRect/>
+          </a:stretch>
+        </p:blipFill>
+        <p:spPr>
+          <a:xfrm>
+            <a:off x="731520" y="6108192"/>
+            <a:ext cx="1051560" cy="493776"/>
+          </a:xfrm>
+          <a:prstGeom prst="rect">
+            <a:avLst/>
+          </a:prstGeom>
+        </p:spPr>
+      </p:pic>
+      <p:sp>
+        <p:nvSpPr>
+          <p:cNvPr id="21" name="Text 18"/>
+          <p:cNvSpPr/>
+          <p:nvPr/>
+        </p:nvSpPr>
+        <p:spPr>
+          <a:xfrm>
+            <a:off x="1920240" y="6199632"/>
+            <a:ext cx="5486400" cy="274320"/>
+          </a:xfrm>
+          <a:prstGeom prst="rect">
+            <a:avLst/>
+          </a:prstGeom>
+          <a:noFill/>
+          <a:ln/>
+        </p:spPr>
+        <p:txBody>
+          <a:bodyPr wrap="square" lIns="0" tIns="0" rIns="0" bIns="0" rtlCol="0" anchor="ctr"/>
+          <a:lstStyle/>
+          <a:p>
+            <a:pPr indent="0" marL="0">
+              <a:buNone/>
+            </a:pPr>
+            <a:r>
+              <a:rPr lang="en-US" sz="1050" dirty="0">
+                <a:solidFill>
+                  <a:srgbClr val="B0AAAA"/>
+                </a:solidFill>
+                <a:latin typeface="Calibri" pitchFamily="34" charset="0"/>
+                <a:ea typeface="Calibri" pitchFamily="34" charset="-122"/>
+                <a:cs typeface="Calibri" pitchFamily="34" charset="-120"/>
+              </a:rPr>
+              <a:t>Mercadinho do Lito · uso interno</a:t>
+            </a:r>
+            <a:endParaRPr lang="en-US" sz="1050" dirty="0"/>
           </a:p>
         </p:txBody>
       </p:sp>
@@ -5462,7 +5539,7 @@
     <p:bg>
       <p:bgPr>
         <a:solidFill>
-          <a:srgbClr val="F2F5F9"/>
+          <a:srgbClr val="F4F5F7"/>
         </a:solidFill>
       </p:bgPr>
     </p:bg>
@@ -5488,26 +5565,26 @@
         </p:nvSpPr>
         <p:spPr>
           <a:xfrm>
-            <a:off x="731520" y="457200"/>
-            <a:ext cx="2743200" cy="274320"/>
-          </a:xfrm>
-          <a:prstGeom prst="rect">
-            <a:avLst/>
-          </a:prstGeom>
-          <a:noFill/>
-          <a:ln/>
-        </p:spPr>
-        <p:txBody>
-          <a:bodyPr wrap="square" lIns="0" tIns="0" rIns="0" bIns="0" rtlCol="0" anchor="ctr"/>
-          <a:lstStyle/>
-          <a:p>
-            <a:pPr algn="l" indent="0" marL="0">
+            <a:off x="731520" y="475488"/>
+            <a:ext cx="4572000" cy="274320"/>
+          </a:xfrm>
+          <a:prstGeom prst="rect">
+            <a:avLst/>
+          </a:prstGeom>
+          <a:noFill/>
+          <a:ln/>
+        </p:spPr>
+        <p:txBody>
+          <a:bodyPr wrap="square" lIns="0" tIns="0" rIns="0" bIns="0" rtlCol="0" anchor="ctr"/>
+          <a:lstStyle/>
+          <a:p>
+            <a:pPr indent="0" marL="0">
               <a:buNone/>
             </a:pPr>
             <a:r>
               <a:rPr lang="en-US" sz="1200" b="1" spc="250" kern="0" dirty="0">
                 <a:solidFill>
-                  <a:srgbClr val="0F462D"/>
+                  <a:srgbClr val="002E53"/>
                 </a:solidFill>
                 <a:latin typeface="Calibri" pitchFamily="34" charset="0"/>
                 <a:ea typeface="Calibri" pitchFamily="34" charset="-122"/>
@@ -5527,26 +5604,26 @@
         </p:nvSpPr>
         <p:spPr>
           <a:xfrm>
-            <a:off x="731520" y="777240"/>
-            <a:ext cx="10698480" cy="777240"/>
-          </a:xfrm>
-          <a:prstGeom prst="rect">
-            <a:avLst/>
-          </a:prstGeom>
-          <a:noFill/>
-          <a:ln/>
-        </p:spPr>
-        <p:txBody>
-          <a:bodyPr wrap="square" lIns="0" tIns="0" rIns="0" bIns="0" rtlCol="0" anchor="ctr"/>
-          <a:lstStyle/>
-          <a:p>
-            <a:pPr indent="0" marL="0">
-              <a:buNone/>
-            </a:pPr>
-            <a:r>
-              <a:rPr lang="en-US" sz="3800" b="1" dirty="0">
-                <a:solidFill>
-                  <a:srgbClr val="0F462D"/>
+            <a:off x="731520" y="749808"/>
+            <a:ext cx="10698480" cy="731520"/>
+          </a:xfrm>
+          <a:prstGeom prst="rect">
+            <a:avLst/>
+          </a:prstGeom>
+          <a:noFill/>
+          <a:ln/>
+        </p:spPr>
+        <p:txBody>
+          <a:bodyPr wrap="square" lIns="0" tIns="0" rIns="0" bIns="0" rtlCol="0" anchor="ctr"/>
+          <a:lstStyle/>
+          <a:p>
+            <a:pPr indent="0" marL="0">
+              <a:buNone/>
+            </a:pPr>
+            <a:r>
+              <a:rPr lang="en-US" sz="3600" b="1" dirty="0">
+                <a:solidFill>
+                  <a:srgbClr val="002E53"/>
                 </a:solidFill>
                 <a:latin typeface="Calibri" pitchFamily="34" charset="0"/>
                 <a:ea typeface="Calibri" pitchFamily="34" charset="-122"/>
@@ -5554,7 +5631,7 @@
               </a:rPr>
               <a:t>Pague com PIX</a:t>
             </a:r>
-            <a:endParaRPr lang="en-US" sz="3800" dirty="0"/>
+            <a:endParaRPr lang="en-US" sz="3600" dirty="0"/>
           </a:p>
         </p:txBody>
       </p:sp>
@@ -5567,11 +5644,11 @@
         <p:spPr>
           <a:xfrm>
             <a:off x="731520" y="1874520"/>
-            <a:ext cx="3383280" cy="2377440"/>
+            <a:ext cx="3383280" cy="2331720"/>
           </a:xfrm>
           <a:prstGeom prst="roundRect">
             <a:avLst>
-              <a:gd name="adj" fmla="val 4615"/>
+              <a:gd name="adj" fmla="val 3922"/>
             </a:avLst>
           </a:prstGeom>
           <a:solidFill>
@@ -5579,14 +5656,14 @@
           </a:solidFill>
           <a:ln w="12700">
             <a:solidFill>
-              <a:srgbClr val="E2E8EF"/>
+              <a:srgbClr val="E3E6EA"/>
             </a:solidFill>
             <a:prstDash val="solid"/>
           </a:ln>
           <a:effectLst>
             <a:outerShdw sx="100000" sy="100000" kx="0" ky="0" algn="bl" rotWithShape="0" blurRad="127000" dist="25400" dir="5400000">
-              <a:srgbClr val="9AA5B1">
-                <a:alpha val="25000"/>
+              <a:srgbClr val="AAB2BC">
+                <a:alpha val="30000"/>
               </a:srgbClr>
             </a:outerShdw>
           </a:effectLst>
@@ -5600,14 +5677,14 @@
         </p:nvSpPr>
         <p:spPr>
           <a:xfrm>
-            <a:off x="1115568" y="2194560"/>
-            <a:ext cx="502920" cy="502920"/>
+            <a:off x="1097280" y="2176272"/>
+            <a:ext cx="475488" cy="475488"/>
           </a:xfrm>
           <a:prstGeom prst="ellipse">
             <a:avLst/>
           </a:prstGeom>
           <a:solidFill>
-            <a:srgbClr val="29DF8C"/>
+            <a:srgbClr val="1EC555"/>
           </a:solidFill>
           <a:ln/>
         </p:spPr>
@@ -5620,8 +5697,8 @@
         </p:nvSpPr>
         <p:spPr>
           <a:xfrm>
-            <a:off x="1115568" y="2194560"/>
-            <a:ext cx="502920" cy="502920"/>
+            <a:off x="1097280" y="2176272"/>
+            <a:ext cx="475488" cy="475488"/>
           </a:xfrm>
           <a:prstGeom prst="rect">
             <a:avLst/>
@@ -5637,9 +5714,9 @@
               <a:buNone/>
             </a:pPr>
             <a:r>
-              <a:rPr lang="en-US" sz="1900" b="1" dirty="0">
-                <a:solidFill>
-                  <a:srgbClr val="0A3421"/>
+              <a:rPr lang="en-US" sz="1800" b="1" dirty="0">
+                <a:solidFill>
+                  <a:srgbClr val="002E53"/>
                 </a:solidFill>
                 <a:latin typeface="Calibri" pitchFamily="34" charset="0"/>
                 <a:ea typeface="Calibri" pitchFamily="34" charset="-122"/>
@@ -5647,7 +5724,7 @@
               </a:rPr>
               <a:t>1</a:t>
             </a:r>
-            <a:endParaRPr lang="en-US" sz="1900" dirty="0"/>
+            <a:endParaRPr lang="en-US" sz="1800" dirty="0"/>
           </a:p>
         </p:txBody>
       </p:sp>
@@ -5659,7 +5736,7 @@
         </p:nvSpPr>
         <p:spPr>
           <a:xfrm>
-            <a:off x="1115568" y="2834640"/>
+            <a:off x="1097280" y="2788920"/>
             <a:ext cx="2651760" cy="502920"/>
           </a:xfrm>
           <a:prstGeom prst="rect">
@@ -5678,7 +5755,7 @@
             <a:r>
               <a:rPr lang="en-US" sz="1600" b="1" dirty="0">
                 <a:solidFill>
-                  <a:srgbClr val="0F462D"/>
+                  <a:srgbClr val="002E53"/>
                 </a:solidFill>
                 <a:latin typeface="Calibri" pitchFamily="34" charset="0"/>
                 <a:ea typeface="Calibri" pitchFamily="34" charset="-122"/>
@@ -5698,7 +5775,7 @@
         </p:nvSpPr>
         <p:spPr>
           <a:xfrm>
-            <a:off x="1115568" y="3364992"/>
+            <a:off x="1097280" y="3310128"/>
             <a:ext cx="2651760" cy="731520"/>
           </a:xfrm>
           <a:prstGeom prst="rect">
@@ -5720,13 +5797,13 @@
             <a:r>
               <a:rPr lang="en-US" sz="1300" dirty="0">
                 <a:solidFill>
-                  <a:srgbClr val="6B7280"/>
-                </a:solidFill>
-                <a:latin typeface="Calibri" pitchFamily="34" charset="0"/>
-                <a:ea typeface="Calibri" pitchFamily="34" charset="-122"/>
-                <a:cs typeface="Calibri" pitchFamily="34" charset="-120"/>
-              </a:rPr>
-              <a:t>O app abre a tela de pagamento com o QR code do Mercadinho.</a:t>
+                  <a:srgbClr val="6E7A87"/>
+                </a:solidFill>
+                <a:latin typeface="Calibri" pitchFamily="34" charset="0"/>
+                <a:ea typeface="Calibri" pitchFamily="34" charset="-122"/>
+                <a:cs typeface="Calibri" pitchFamily="34" charset="-120"/>
+              </a:rPr>
+              <a:t>O app abre a tela de pagamento com o QR code.</a:t>
             </a:r>
             <a:endParaRPr lang="en-US" sz="1300" dirty="0"/>
           </a:p>
@@ -5741,11 +5818,11 @@
         <p:spPr>
           <a:xfrm>
             <a:off x="4416552" y="1874520"/>
-            <a:ext cx="3383280" cy="2377440"/>
+            <a:ext cx="3383280" cy="2331720"/>
           </a:xfrm>
           <a:prstGeom prst="roundRect">
             <a:avLst>
-              <a:gd name="adj" fmla="val 4615"/>
+              <a:gd name="adj" fmla="val 3922"/>
             </a:avLst>
           </a:prstGeom>
           <a:solidFill>
@@ -5753,14 +5830,14 @@
           </a:solidFill>
           <a:ln w="12700">
             <a:solidFill>
-              <a:srgbClr val="E2E8EF"/>
+              <a:srgbClr val="E3E6EA"/>
             </a:solidFill>
             <a:prstDash val="solid"/>
           </a:ln>
           <a:effectLst>
             <a:outerShdw sx="100000" sy="100000" kx="0" ky="0" algn="bl" rotWithShape="0" blurRad="127000" dist="25400" dir="5400000">
-              <a:srgbClr val="9AA5B1">
-                <a:alpha val="25000"/>
+              <a:srgbClr val="AAB2BC">
+                <a:alpha val="30000"/>
               </a:srgbClr>
             </a:outerShdw>
           </a:effectLst>
@@ -5774,14 +5851,14 @@
         </p:nvSpPr>
         <p:spPr>
           <a:xfrm>
-            <a:off x="4800600" y="2194560"/>
-            <a:ext cx="502920" cy="502920"/>
+            <a:off x="4782312" y="2176272"/>
+            <a:ext cx="475488" cy="475488"/>
           </a:xfrm>
           <a:prstGeom prst="ellipse">
             <a:avLst/>
           </a:prstGeom>
           <a:solidFill>
-            <a:srgbClr val="29DF8C"/>
+            <a:srgbClr val="1EC555"/>
           </a:solidFill>
           <a:ln/>
         </p:spPr>
@@ -5794,8 +5871,8 @@
         </p:nvSpPr>
         <p:spPr>
           <a:xfrm>
-            <a:off x="4800600" y="2194560"/>
-            <a:ext cx="502920" cy="502920"/>
+            <a:off x="4782312" y="2176272"/>
+            <a:ext cx="475488" cy="475488"/>
           </a:xfrm>
           <a:prstGeom prst="rect">
             <a:avLst/>
@@ -5811,9 +5888,9 @@
               <a:buNone/>
             </a:pPr>
             <a:r>
-              <a:rPr lang="en-US" sz="1900" b="1" dirty="0">
-                <a:solidFill>
-                  <a:srgbClr val="0A3421"/>
+              <a:rPr lang="en-US" sz="1800" b="1" dirty="0">
+                <a:solidFill>
+                  <a:srgbClr val="002E53"/>
                 </a:solidFill>
                 <a:latin typeface="Calibri" pitchFamily="34" charset="0"/>
                 <a:ea typeface="Calibri" pitchFamily="34" charset="-122"/>
@@ -5821,7 +5898,7 @@
               </a:rPr>
               <a:t>2</a:t>
             </a:r>
-            <a:endParaRPr lang="en-US" sz="1900" dirty="0"/>
+            <a:endParaRPr lang="en-US" sz="1800" dirty="0"/>
           </a:p>
         </p:txBody>
       </p:sp>
@@ -5833,7 +5910,7 @@
         </p:nvSpPr>
         <p:spPr>
           <a:xfrm>
-            <a:off x="4800600" y="2834640"/>
+            <a:off x="4782312" y="2788920"/>
             <a:ext cx="2651760" cy="502920"/>
           </a:xfrm>
           <a:prstGeom prst="rect">
@@ -5852,7 +5929,7 @@
             <a:r>
               <a:rPr lang="en-US" sz="1600" b="1" dirty="0">
                 <a:solidFill>
-                  <a:srgbClr val="0F462D"/>
+                  <a:srgbClr val="002E53"/>
                 </a:solidFill>
                 <a:latin typeface="Calibri" pitchFamily="34" charset="0"/>
                 <a:ea typeface="Calibri" pitchFamily="34" charset="-122"/>
@@ -5872,7 +5949,7 @@
         </p:nvSpPr>
         <p:spPr>
           <a:xfrm>
-            <a:off x="4800600" y="3364992"/>
+            <a:off x="4782312" y="3310128"/>
             <a:ext cx="2651760" cy="731520"/>
           </a:xfrm>
           <a:prstGeom prst="rect">
@@ -5894,13 +5971,13 @@
             <a:r>
               <a:rPr lang="en-US" sz="1300" dirty="0">
                 <a:solidFill>
-                  <a:srgbClr val="6B7280"/>
-                </a:solidFill>
-                <a:latin typeface="Calibri" pitchFamily="34" charset="0"/>
-                <a:ea typeface="Calibri" pitchFamily="34" charset="-122"/>
-                <a:cs typeface="Calibri" pitchFamily="34" charset="-120"/>
-              </a:rPr>
-              <a:t>Escaneie o QR code na tela ou use "PIX copia e cola".</a:t>
+                  <a:srgbClr val="6E7A87"/>
+                </a:solidFill>
+                <a:latin typeface="Calibri" pitchFamily="34" charset="0"/>
+                <a:ea typeface="Calibri" pitchFamily="34" charset="-122"/>
+                <a:cs typeface="Calibri" pitchFamily="34" charset="-120"/>
+              </a:rPr>
+              <a:t>Escaneie o QR code ou use "PIX copia e cola".</a:t>
             </a:r>
             <a:endParaRPr lang="en-US" sz="1300" dirty="0"/>
           </a:p>
@@ -5915,11 +5992,11 @@
         <p:spPr>
           <a:xfrm>
             <a:off x="8101584" y="1874520"/>
-            <a:ext cx="3383280" cy="2377440"/>
+            <a:ext cx="3383280" cy="2331720"/>
           </a:xfrm>
           <a:prstGeom prst="roundRect">
             <a:avLst>
-              <a:gd name="adj" fmla="val 4615"/>
+              <a:gd name="adj" fmla="val 3922"/>
             </a:avLst>
           </a:prstGeom>
           <a:solidFill>
@@ -5927,14 +6004,14 @@
           </a:solidFill>
           <a:ln w="12700">
             <a:solidFill>
-              <a:srgbClr val="E2E8EF"/>
+              <a:srgbClr val="E3E6EA"/>
             </a:solidFill>
             <a:prstDash val="solid"/>
           </a:ln>
           <a:effectLst>
             <a:outerShdw sx="100000" sy="100000" kx="0" ky="0" algn="bl" rotWithShape="0" blurRad="127000" dist="25400" dir="5400000">
-              <a:srgbClr val="9AA5B1">
-                <a:alpha val="25000"/>
+              <a:srgbClr val="AAB2BC">
+                <a:alpha val="30000"/>
               </a:srgbClr>
             </a:outerShdw>
           </a:effectLst>
@@ -5948,14 +6025,14 @@
         </p:nvSpPr>
         <p:spPr>
           <a:xfrm>
-            <a:off x="8485632" y="2194560"/>
-            <a:ext cx="502920" cy="502920"/>
+            <a:off x="8467344" y="2176272"/>
+            <a:ext cx="475488" cy="475488"/>
           </a:xfrm>
           <a:prstGeom prst="ellipse">
             <a:avLst/>
           </a:prstGeom>
           <a:solidFill>
-            <a:srgbClr val="29DF8C"/>
+            <a:srgbClr val="1EC555"/>
           </a:solidFill>
           <a:ln/>
         </p:spPr>
@@ -5968,8 +6045,8 @@
         </p:nvSpPr>
         <p:spPr>
           <a:xfrm>
-            <a:off x="8485632" y="2194560"/>
-            <a:ext cx="502920" cy="502920"/>
+            <a:off x="8467344" y="2176272"/>
+            <a:ext cx="475488" cy="475488"/>
           </a:xfrm>
           <a:prstGeom prst="rect">
             <a:avLst/>
@@ -5985,9 +6062,9 @@
               <a:buNone/>
             </a:pPr>
             <a:r>
-              <a:rPr lang="en-US" sz="1900" b="1" dirty="0">
-                <a:solidFill>
-                  <a:srgbClr val="0A3421"/>
+              <a:rPr lang="en-US" sz="1800" b="1" dirty="0">
+                <a:solidFill>
+                  <a:srgbClr val="002E53"/>
                 </a:solidFill>
                 <a:latin typeface="Calibri" pitchFamily="34" charset="0"/>
                 <a:ea typeface="Calibri" pitchFamily="34" charset="-122"/>
@@ -5995,7 +6072,7 @@
               </a:rPr>
               <a:t>3</a:t>
             </a:r>
-            <a:endParaRPr lang="en-US" sz="1900" dirty="0"/>
+            <a:endParaRPr lang="en-US" sz="1800" dirty="0"/>
           </a:p>
         </p:txBody>
       </p:sp>
@@ -6007,7 +6084,7 @@
         </p:nvSpPr>
         <p:spPr>
           <a:xfrm>
-            <a:off x="8485632" y="2834640"/>
+            <a:off x="8467344" y="2788920"/>
             <a:ext cx="2651760" cy="502920"/>
           </a:xfrm>
           <a:prstGeom prst="rect">
@@ -6026,7 +6103,7 @@
             <a:r>
               <a:rPr lang="en-US" sz="1600" b="1" dirty="0">
                 <a:solidFill>
-                  <a:srgbClr val="0F462D"/>
+                  <a:srgbClr val="002E53"/>
                 </a:solidFill>
                 <a:latin typeface="Calibri" pitchFamily="34" charset="0"/>
                 <a:ea typeface="Calibri" pitchFamily="34" charset="-122"/>
@@ -6046,7 +6123,7 @@
         </p:nvSpPr>
         <p:spPr>
           <a:xfrm>
-            <a:off x="8485632" y="3364992"/>
+            <a:off x="8467344" y="3310128"/>
             <a:ext cx="2651760" cy="731520"/>
           </a:xfrm>
           <a:prstGeom prst="rect">
@@ -6068,13 +6145,13 @@
             <a:r>
               <a:rPr lang="en-US" sz="1300" dirty="0">
                 <a:solidFill>
-                  <a:srgbClr val="6B7280"/>
-                </a:solidFill>
-                <a:latin typeface="Calibri" pitchFamily="34" charset="0"/>
-                <a:ea typeface="Calibri" pitchFamily="34" charset="-122"/>
-                <a:cs typeface="Calibri" pitchFamily="34" charset="-120"/>
-              </a:rPr>
-              <a:t>O QR code não leva valor. Informe o total que o app mostrou.</a:t>
+                  <a:srgbClr val="6E7A87"/>
+                </a:solidFill>
+                <a:latin typeface="Calibri" pitchFamily="34" charset="0"/>
+                <a:ea typeface="Calibri" pitchFamily="34" charset="-122"/>
+                <a:cs typeface="Calibri" pitchFamily="34" charset="-120"/>
+              </a:rPr>
+              <a:t>O QR não leva valor. Informe o total que o app mostrou.</a:t>
             </a:r>
             <a:endParaRPr lang="en-US" sz="1300" dirty="0"/>
           </a:p>
@@ -6088,16 +6165,16 @@
         </p:nvSpPr>
         <p:spPr>
           <a:xfrm>
-            <a:off x="731520" y="4526280"/>
-            <a:ext cx="10698480" cy="1051560"/>
+            <a:off x="731520" y="4480560"/>
+            <a:ext cx="10698480" cy="1005840"/>
           </a:xfrm>
           <a:prstGeom prst="roundRect">
             <a:avLst>
-              <a:gd name="adj" fmla="val 10435"/>
+              <a:gd name="adj" fmla="val 9091"/>
             </a:avLst>
           </a:prstGeom>
           <a:solidFill>
-            <a:srgbClr val="0F462D"/>
+            <a:srgbClr val="002E53"/>
           </a:solidFill>
           <a:ln/>
         </p:spPr>
@@ -6110,8 +6187,8 @@
         </p:nvSpPr>
         <p:spPr>
           <a:xfrm>
-            <a:off x="1097280" y="4709160"/>
-            <a:ext cx="3657600" cy="256032"/>
+            <a:off x="1097280" y="4663440"/>
+            <a:ext cx="4114800" cy="246888"/>
           </a:xfrm>
           <a:prstGeom prst="rect">
             <a:avLst/>
@@ -6129,7 +6206,7 @@
             <a:r>
               <a:rPr lang="en-US" sz="1100" b="1" spc="200" kern="0" dirty="0">
                 <a:solidFill>
-                  <a:srgbClr val="29DF8C"/>
+                  <a:srgbClr val="1EC555"/>
                 </a:solidFill>
                 <a:latin typeface="Calibri" pitchFamily="34" charset="0"/>
                 <a:ea typeface="Calibri" pitchFamily="34" charset="-122"/>
@@ -6149,7 +6226,7 @@
         </p:nvSpPr>
         <p:spPr>
           <a:xfrm>
-            <a:off x="1097280" y="4983480"/>
+            <a:off x="1097280" y="4937760"/>
             <a:ext cx="9966960" cy="365760"/>
           </a:xfrm>
           <a:prstGeom prst="rect">
@@ -6180,42 +6257,66 @@
           </a:p>
         </p:txBody>
       </p:sp>
-      <p:sp>
-        <p:nvSpPr>
-          <p:cNvPr id="22" name="Text 20"/>
-          <p:cNvSpPr/>
-          <p:nvPr/>
-        </p:nvSpPr>
-        <p:spPr>
-          <a:xfrm>
-            <a:off x="731520" y="6199632"/>
-            <a:ext cx="10698480" cy="274320"/>
-          </a:xfrm>
-          <a:prstGeom prst="rect">
-            <a:avLst/>
-          </a:prstGeom>
-          <a:noFill/>
-          <a:ln/>
-        </p:spPr>
-        <p:txBody>
-          <a:bodyPr wrap="square" lIns="0" tIns="0" rIns="0" bIns="0" rtlCol="0" anchor="ctr"/>
-          <a:lstStyle/>
-          <a:p>
-            <a:pPr indent="0" marL="0">
-              <a:buNone/>
-            </a:pPr>
-            <a:r>
-              <a:rPr lang="en-US" sz="1100" dirty="0">
-                <a:solidFill>
-                  <a:srgbClr val="A5AEB8"/>
-                </a:solidFill>
-                <a:latin typeface="Calibri" pitchFamily="34" charset="0"/>
-                <a:ea typeface="Calibri" pitchFamily="34" charset="-122"/>
-                <a:cs typeface="Calibri" pitchFamily="34" charset="-120"/>
-              </a:rPr>
-              <a:t>Mercadinho do Lito · Lito Aviation Academy</a:t>
-            </a:r>
-            <a:endParaRPr lang="en-US" sz="1100" dirty="0"/>
+      <p:pic>
+        <p:nvPicPr>
+          <p:cNvPr id="22" name="Image 0" descr="preencoded.png">    </p:cNvPr>
+          <p:cNvPicPr>
+            <a:picLocks noChangeAspect="1"/>
+          </p:cNvPicPr>
+          <p:nvPr/>
+        </p:nvPicPr>
+        <p:blipFill>
+          <a:blip r:embed="rId1"/>
+          <a:stretch>
+            <a:fillRect/>
+          </a:stretch>
+        </p:blipFill>
+        <p:spPr>
+          <a:xfrm>
+            <a:off x="731520" y="6108192"/>
+            <a:ext cx="1051560" cy="493776"/>
+          </a:xfrm>
+          <a:prstGeom prst="rect">
+            <a:avLst/>
+          </a:prstGeom>
+        </p:spPr>
+      </p:pic>
+      <p:sp>
+        <p:nvSpPr>
+          <p:cNvPr id="23" name="Text 20"/>
+          <p:cNvSpPr/>
+          <p:nvPr/>
+        </p:nvSpPr>
+        <p:spPr>
+          <a:xfrm>
+            <a:off x="1920240" y="6199632"/>
+            <a:ext cx="5486400" cy="274320"/>
+          </a:xfrm>
+          <a:prstGeom prst="rect">
+            <a:avLst/>
+          </a:prstGeom>
+          <a:noFill/>
+          <a:ln/>
+        </p:spPr>
+        <p:txBody>
+          <a:bodyPr wrap="square" lIns="0" tIns="0" rIns="0" bIns="0" rtlCol="0" anchor="ctr"/>
+          <a:lstStyle/>
+          <a:p>
+            <a:pPr indent="0" marL="0">
+              <a:buNone/>
+            </a:pPr>
+            <a:r>
+              <a:rPr lang="en-US" sz="1050" dirty="0">
+                <a:solidFill>
+                  <a:srgbClr val="B0AAAA"/>
+                </a:solidFill>
+                <a:latin typeface="Calibri" pitchFamily="34" charset="0"/>
+                <a:ea typeface="Calibri" pitchFamily="34" charset="-122"/>
+                <a:cs typeface="Calibri" pitchFamily="34" charset="-120"/>
+              </a:rPr>
+              <a:t>Mercadinho do Lito · uso interno</a:t>
+            </a:r>
+            <a:endParaRPr lang="en-US" sz="1050" dirty="0"/>
           </a:p>
         </p:txBody>
       </p:sp>
@@ -6233,7 +6334,7 @@
     <p:bg>
       <p:bgPr>
         <a:solidFill>
-          <a:srgbClr val="F2F5F9"/>
+          <a:srgbClr val="F4F5F7"/>
         </a:solidFill>
       </p:bgPr>
     </p:bg>
@@ -6259,26 +6360,26 @@
         </p:nvSpPr>
         <p:spPr>
           <a:xfrm>
-            <a:off x="731520" y="457200"/>
-            <a:ext cx="2743200" cy="274320"/>
-          </a:xfrm>
-          <a:prstGeom prst="rect">
-            <a:avLst/>
-          </a:prstGeom>
-          <a:noFill/>
-          <a:ln/>
-        </p:spPr>
-        <p:txBody>
-          <a:bodyPr wrap="square" lIns="0" tIns="0" rIns="0" bIns="0" rtlCol="0" anchor="ctr"/>
-          <a:lstStyle/>
-          <a:p>
-            <a:pPr algn="l" indent="0" marL="0">
+            <a:off x="731520" y="475488"/>
+            <a:ext cx="4572000" cy="274320"/>
+          </a:xfrm>
+          <a:prstGeom prst="rect">
+            <a:avLst/>
+          </a:prstGeom>
+          <a:noFill/>
+          <a:ln/>
+        </p:spPr>
+        <p:txBody>
+          <a:bodyPr wrap="square" lIns="0" tIns="0" rIns="0" bIns="0" rtlCol="0" anchor="ctr"/>
+          <a:lstStyle/>
+          <a:p>
+            <a:pPr indent="0" marL="0">
               <a:buNone/>
             </a:pPr>
             <a:r>
               <a:rPr lang="en-US" sz="1200" b="1" spc="250" kern="0" dirty="0">
                 <a:solidFill>
-                  <a:srgbClr val="0F462D"/>
+                  <a:srgbClr val="002E53"/>
                 </a:solidFill>
                 <a:latin typeface="Calibri" pitchFamily="34" charset="0"/>
                 <a:ea typeface="Calibri" pitchFamily="34" charset="-122"/>
@@ -6298,26 +6399,26 @@
         </p:nvSpPr>
         <p:spPr>
           <a:xfrm>
-            <a:off x="731520" y="777240"/>
-            <a:ext cx="10698480" cy="777240"/>
-          </a:xfrm>
-          <a:prstGeom prst="rect">
-            <a:avLst/>
-          </a:prstGeom>
-          <a:noFill/>
-          <a:ln/>
-        </p:spPr>
-        <p:txBody>
-          <a:bodyPr wrap="square" lIns="0" tIns="0" rIns="0" bIns="0" rtlCol="0" anchor="ctr"/>
-          <a:lstStyle/>
-          <a:p>
-            <a:pPr indent="0" marL="0">
-              <a:buNone/>
-            </a:pPr>
-            <a:r>
-              <a:rPr lang="en-US" sz="3800" b="1" dirty="0">
-                <a:solidFill>
-                  <a:srgbClr val="0F462D"/>
+            <a:off x="731520" y="749808"/>
+            <a:ext cx="10698480" cy="731520"/>
+          </a:xfrm>
+          <a:prstGeom prst="rect">
+            <a:avLst/>
+          </a:prstGeom>
+          <a:noFill/>
+          <a:ln/>
+        </p:spPr>
+        <p:txBody>
+          <a:bodyPr wrap="square" lIns="0" tIns="0" rIns="0" bIns="0" rtlCol="0" anchor="ctr"/>
+          <a:lstStyle/>
+          <a:p>
+            <a:pPr indent="0" marL="0">
+              <a:buNone/>
+            </a:pPr>
+            <a:r>
+              <a:rPr lang="en-US" sz="3600" b="1" dirty="0">
+                <a:solidFill>
+                  <a:srgbClr val="002E53"/>
                 </a:solidFill>
                 <a:latin typeface="Calibri" pitchFamily="34" charset="0"/>
                 <a:ea typeface="Calibri" pitchFamily="34" charset="-122"/>
@@ -6325,7 +6426,7 @@
               </a:rPr>
               <a:t>Envie o comprovante</a:t>
             </a:r>
-            <a:endParaRPr lang="en-US" sz="3800" dirty="0"/>
+            <a:endParaRPr lang="en-US" sz="3600" dirty="0"/>
           </a:p>
         </p:txBody>
       </p:sp>
@@ -6338,11 +6439,11 @@
         <p:spPr>
           <a:xfrm>
             <a:off x="731520" y="1828800"/>
-            <a:ext cx="6400800" cy="3291840"/>
+            <a:ext cx="6400800" cy="3200400"/>
           </a:xfrm>
           <a:prstGeom prst="roundRect">
             <a:avLst>
-              <a:gd name="adj" fmla="val 3333"/>
+              <a:gd name="adj" fmla="val 2857"/>
             </a:avLst>
           </a:prstGeom>
           <a:solidFill>
@@ -6350,14 +6451,14 @@
           </a:solidFill>
           <a:ln w="12700">
             <a:solidFill>
-              <a:srgbClr val="E2E8EF"/>
+              <a:srgbClr val="E3E6EA"/>
             </a:solidFill>
             <a:prstDash val="solid"/>
           </a:ln>
           <a:effectLst>
             <a:outerShdw sx="100000" sy="100000" kx="0" ky="0" algn="bl" rotWithShape="0" blurRad="127000" dist="25400" dir="5400000">
-              <a:srgbClr val="9AA5B1">
-                <a:alpha val="25000"/>
+              <a:srgbClr val="AAB2BC">
+                <a:alpha val="30000"/>
               </a:srgbClr>
             </a:outerShdw>
           </a:effectLst>
@@ -6371,14 +6472,14 @@
         </p:nvSpPr>
         <p:spPr>
           <a:xfrm>
-            <a:off x="1097280" y="2176272"/>
-            <a:ext cx="146304" cy="146304"/>
+            <a:off x="1097280" y="2157984"/>
+            <a:ext cx="137160" cy="137160"/>
           </a:xfrm>
           <a:prstGeom prst="ellipse">
             <a:avLst/>
           </a:prstGeom>
           <a:solidFill>
-            <a:srgbClr val="29DF8C"/>
+            <a:srgbClr val="1EC555"/>
           </a:solidFill>
           <a:ln/>
         </p:spPr>
@@ -6391,7 +6492,7 @@
         </p:nvSpPr>
         <p:spPr>
           <a:xfrm>
-            <a:off x="1417320" y="2084832"/>
+            <a:off x="1399032" y="2057400"/>
             <a:ext cx="5394960" cy="274320"/>
           </a:xfrm>
           <a:prstGeom prst="rect">
@@ -6410,7 +6511,7 @@
             <a:r>
               <a:rPr lang="en-US" sz="1550" b="1" dirty="0">
                 <a:solidFill>
-                  <a:srgbClr val="0F462D"/>
+                  <a:srgbClr val="002E53"/>
                 </a:solidFill>
                 <a:latin typeface="Calibri" pitchFamily="34" charset="0"/>
                 <a:ea typeface="Calibri" pitchFamily="34" charset="-122"/>
@@ -6430,7 +6531,7 @@
         </p:nvSpPr>
         <p:spPr>
           <a:xfrm>
-            <a:off x="1417320" y="2359152"/>
+            <a:off x="1399032" y="2331720"/>
             <a:ext cx="5394960" cy="274320"/>
           </a:xfrm>
           <a:prstGeom prst="rect">
@@ -6449,7 +6550,7 @@
             <a:r>
               <a:rPr lang="en-US" sz="1300" dirty="0">
                 <a:solidFill>
-                  <a:srgbClr val="6B7280"/>
+                  <a:srgbClr val="6E7A87"/>
                 </a:solidFill>
                 <a:latin typeface="Calibri" pitchFamily="34" charset="0"/>
                 <a:ea typeface="Calibri" pitchFamily="34" charset="-122"/>
@@ -6469,14 +6570,14 @@
         </p:nvSpPr>
         <p:spPr>
           <a:xfrm>
-            <a:off x="1097280" y="2926080"/>
-            <a:ext cx="146304" cy="146304"/>
+            <a:off x="1097280" y="2889504"/>
+            <a:ext cx="137160" cy="137160"/>
           </a:xfrm>
           <a:prstGeom prst="ellipse">
             <a:avLst/>
           </a:prstGeom>
           <a:solidFill>
-            <a:srgbClr val="29DF8C"/>
+            <a:srgbClr val="1EC555"/>
           </a:solidFill>
           <a:ln/>
         </p:spPr>
@@ -6489,7 +6590,7 @@
         </p:nvSpPr>
         <p:spPr>
           <a:xfrm>
-            <a:off x="1417320" y="2834640"/>
+            <a:off x="1399032" y="2788920"/>
             <a:ext cx="5394960" cy="274320"/>
           </a:xfrm>
           <a:prstGeom prst="rect">
@@ -6508,7 +6609,7 @@
             <a:r>
               <a:rPr lang="en-US" sz="1550" b="1" dirty="0">
                 <a:solidFill>
-                  <a:srgbClr val="0F462D"/>
+                  <a:srgbClr val="002E53"/>
                 </a:solidFill>
                 <a:latin typeface="Calibri" pitchFamily="34" charset="0"/>
                 <a:ea typeface="Calibri" pitchFamily="34" charset="-122"/>
@@ -6528,7 +6629,7 @@
         </p:nvSpPr>
         <p:spPr>
           <a:xfrm>
-            <a:off x="1417320" y="3108960"/>
+            <a:off x="1399032" y="3063240"/>
             <a:ext cx="5394960" cy="274320"/>
           </a:xfrm>
           <a:prstGeom prst="rect">
@@ -6547,13 +6648,13 @@
             <a:r>
               <a:rPr lang="en-US" sz="1300" dirty="0">
                 <a:solidFill>
-                  <a:srgbClr val="6B7280"/>
-                </a:solidFill>
-                <a:latin typeface="Calibri" pitchFamily="34" charset="0"/>
-                <a:ea typeface="Calibri" pitchFamily="34" charset="-122"/>
-                <a:cs typeface="Calibri" pitchFamily="34" charset="-120"/>
-              </a:rPr>
-              <a:t>Na mesma tela, toque em escolher arquivo e selecione o comprovante.</a:t>
+                  <a:srgbClr val="6E7A87"/>
+                </a:solidFill>
+                <a:latin typeface="Calibri" pitchFamily="34" charset="0"/>
+                <a:ea typeface="Calibri" pitchFamily="34" charset="-122"/>
+                <a:cs typeface="Calibri" pitchFamily="34" charset="-120"/>
+              </a:rPr>
+              <a:t>Toque em escolher arquivo e selecione o comprovante.</a:t>
             </a:r>
             <a:endParaRPr lang="en-US" sz="1300" dirty="0"/>
           </a:p>
@@ -6567,14 +6668,14 @@
         </p:nvSpPr>
         <p:spPr>
           <a:xfrm>
-            <a:off x="1097280" y="3675888"/>
-            <a:ext cx="146304" cy="146304"/>
+            <a:off x="1097280" y="3621024"/>
+            <a:ext cx="137160" cy="137160"/>
           </a:xfrm>
           <a:prstGeom prst="ellipse">
             <a:avLst/>
           </a:prstGeom>
           <a:solidFill>
-            <a:srgbClr val="29DF8C"/>
+            <a:srgbClr val="1EC555"/>
           </a:solidFill>
           <a:ln/>
         </p:spPr>
@@ -6587,7 +6688,7 @@
         </p:nvSpPr>
         <p:spPr>
           <a:xfrm>
-            <a:off x="1417320" y="3584448"/>
+            <a:off x="1399032" y="3520440"/>
             <a:ext cx="5394960" cy="274320"/>
           </a:xfrm>
           <a:prstGeom prst="rect">
@@ -6606,7 +6707,7 @@
             <a:r>
               <a:rPr lang="en-US" sz="1550" b="1" dirty="0">
                 <a:solidFill>
-                  <a:srgbClr val="0F462D"/>
+                  <a:srgbClr val="002E53"/>
                 </a:solidFill>
                 <a:latin typeface="Calibri" pitchFamily="34" charset="0"/>
                 <a:ea typeface="Calibri" pitchFamily="34" charset="-122"/>
@@ -6626,7 +6727,7 @@
         </p:nvSpPr>
         <p:spPr>
           <a:xfrm>
-            <a:off x="1417320" y="3858768"/>
+            <a:off x="1399032" y="3794760"/>
             <a:ext cx="5394960" cy="274320"/>
           </a:xfrm>
           <a:prstGeom prst="rect">
@@ -6645,7 +6746,7 @@
             <a:r>
               <a:rPr lang="en-US" sz="1300" dirty="0">
                 <a:solidFill>
-                  <a:srgbClr val="6B7280"/>
+                  <a:srgbClr val="6E7A87"/>
                 </a:solidFill>
                 <a:latin typeface="Calibri" pitchFamily="34" charset="0"/>
                 <a:ea typeface="Calibri" pitchFamily="34" charset="-122"/>
@@ -6665,14 +6766,14 @@
         </p:nvSpPr>
         <p:spPr>
           <a:xfrm>
-            <a:off x="1097280" y="4425696"/>
-            <a:ext cx="146304" cy="146304"/>
+            <a:off x="1097280" y="4352544"/>
+            <a:ext cx="137160" cy="137160"/>
           </a:xfrm>
           <a:prstGeom prst="ellipse">
             <a:avLst/>
           </a:prstGeom>
           <a:solidFill>
-            <a:srgbClr val="29DF8C"/>
+            <a:srgbClr val="1EC555"/>
           </a:solidFill>
           <a:ln/>
         </p:spPr>
@@ -6685,7 +6786,7 @@
         </p:nvSpPr>
         <p:spPr>
           <a:xfrm>
-            <a:off x="1417320" y="4334256"/>
+            <a:off x="1399032" y="4251960"/>
             <a:ext cx="5394960" cy="274320"/>
           </a:xfrm>
           <a:prstGeom prst="rect">
@@ -6704,7 +6805,7 @@
             <a:r>
               <a:rPr lang="en-US" sz="1550" b="1" dirty="0">
                 <a:solidFill>
-                  <a:srgbClr val="0F462D"/>
+                  <a:srgbClr val="002E53"/>
                 </a:solidFill>
                 <a:latin typeface="Calibri" pitchFamily="34" charset="0"/>
                 <a:ea typeface="Calibri" pitchFamily="34" charset="-122"/>
@@ -6724,7 +6825,7 @@
         </p:nvSpPr>
         <p:spPr>
           <a:xfrm>
-            <a:off x="1417320" y="4608576"/>
+            <a:off x="1399032" y="4526280"/>
             <a:ext cx="5394960" cy="274320"/>
           </a:xfrm>
           <a:prstGeom prst="rect">
@@ -6743,7 +6844,7 @@
             <a:r>
               <a:rPr lang="en-US" sz="1300" dirty="0">
                 <a:solidFill>
-                  <a:srgbClr val="6B7280"/>
+                  <a:srgbClr val="6E7A87"/>
                 </a:solidFill>
                 <a:latin typeface="Calibri" pitchFamily="34" charset="0"/>
                 <a:ea typeface="Calibri" pitchFamily="34" charset="-122"/>
@@ -6764,7 +6865,7 @@
         <p:spPr>
           <a:xfrm>
             <a:off x="7452360" y="1828800"/>
-            <a:ext cx="3977640" cy="256032"/>
+            <a:ext cx="3977640" cy="246888"/>
           </a:xfrm>
           <a:prstGeom prst="rect">
             <a:avLst/>
@@ -6782,7 +6883,7 @@
             <a:r>
               <a:rPr lang="en-US" sz="1100" b="1" spc="200" kern="0" dirty="0">
                 <a:solidFill>
-                  <a:srgbClr val="6B7280"/>
+                  <a:srgbClr val="6E7A87"/>
                 </a:solidFill>
                 <a:latin typeface="Calibri" pitchFamily="34" charset="0"/>
                 <a:ea typeface="Calibri" pitchFamily="34" charset="-122"/>
@@ -6802,12 +6903,12 @@
         </p:nvSpPr>
         <p:spPr>
           <a:xfrm>
-            <a:off x="7452360" y="2212848"/>
-            <a:ext cx="3977640" cy="841248"/>
+            <a:off x="7452360" y="2194560"/>
+            <a:ext cx="3977640" cy="822960"/>
           </a:xfrm>
           <a:prstGeom prst="roundRect">
             <a:avLst>
-              <a:gd name="adj" fmla="val 13043"/>
+              <a:gd name="adj" fmla="val 11111"/>
             </a:avLst>
           </a:prstGeom>
           <a:solidFill>
@@ -6815,14 +6916,14 @@
           </a:solidFill>
           <a:ln w="12700">
             <a:solidFill>
-              <a:srgbClr val="E2E8EF"/>
+              <a:srgbClr val="E3E6EA"/>
             </a:solidFill>
             <a:prstDash val="solid"/>
           </a:ln>
           <a:effectLst>
             <a:outerShdw sx="100000" sy="100000" kx="0" ky="0" algn="bl" rotWithShape="0" blurRad="127000" dist="25400" dir="5400000">
-              <a:srgbClr val="9AA5B1">
-                <a:alpha val="25000"/>
+              <a:srgbClr val="AAB2BC">
+                <a:alpha val="30000"/>
               </a:srgbClr>
             </a:outerShdw>
           </a:effectLst>
@@ -6836,14 +6937,14 @@
         </p:nvSpPr>
         <p:spPr>
           <a:xfrm>
-            <a:off x="7726680" y="2414016"/>
+            <a:off x="7726680" y="2386584"/>
             <a:ext cx="182880" cy="182880"/>
           </a:xfrm>
           <a:prstGeom prst="ellipse">
             <a:avLst/>
           </a:prstGeom>
           <a:solidFill>
-            <a:srgbClr val="F59E0B"/>
+            <a:srgbClr val="D97706"/>
           </a:solidFill>
           <a:ln/>
         </p:spPr>
@@ -6856,7 +6957,7 @@
         </p:nvSpPr>
         <p:spPr>
           <a:xfrm>
-            <a:off x="8046720" y="2322576"/>
+            <a:off x="8046720" y="2295144"/>
             <a:ext cx="3200400" cy="274320"/>
           </a:xfrm>
           <a:prstGeom prst="rect">
@@ -6875,7 +6976,7 @@
             <a:r>
               <a:rPr lang="en-US" sz="1450" b="1" dirty="0">
                 <a:solidFill>
-                  <a:srgbClr val="23282C"/>
+                  <a:srgbClr val="1B2733"/>
                 </a:solidFill>
                 <a:latin typeface="Calibri" pitchFamily="34" charset="0"/>
                 <a:ea typeface="Calibri" pitchFamily="34" charset="-122"/>
@@ -6895,8 +6996,8 @@
         </p:nvSpPr>
         <p:spPr>
           <a:xfrm>
-            <a:off x="8046720" y="2615184"/>
-            <a:ext cx="3200400" cy="320040"/>
+            <a:off x="8046720" y="2587752"/>
+            <a:ext cx="3200400" cy="274320"/>
           </a:xfrm>
           <a:prstGeom prst="rect">
             <a:avLst/>
@@ -6914,13 +7015,13 @@
             <a:r>
               <a:rPr lang="en-US" sz="1250" dirty="0">
                 <a:solidFill>
-                  <a:srgbClr val="6B7280"/>
-                </a:solidFill>
-                <a:latin typeface="Calibri" pitchFamily="34" charset="0"/>
-                <a:ea typeface="Calibri" pitchFamily="34" charset="-122"/>
-                <a:cs typeface="Calibri" pitchFamily="34" charset="-120"/>
-              </a:rPr>
-              <a:t>O administrador ainda vai conferir.</a:t>
+                  <a:srgbClr val="6E7A87"/>
+                </a:solidFill>
+                <a:latin typeface="Calibri" pitchFamily="34" charset="0"/>
+                <a:ea typeface="Calibri" pitchFamily="34" charset="-122"/>
+                <a:cs typeface="Calibri" pitchFamily="34" charset="-120"/>
+              </a:rPr>
+              <a:t>A administração ainda vai conferir.</a:t>
             </a:r>
             <a:endParaRPr lang="en-US" sz="1250" dirty="0"/>
           </a:p>
@@ -6934,12 +7035,12 @@
         </p:nvSpPr>
         <p:spPr>
           <a:xfrm>
-            <a:off x="7452360" y="3200400"/>
-            <a:ext cx="3977640" cy="841248"/>
+            <a:off x="7452360" y="3154680"/>
+            <a:ext cx="3977640" cy="822960"/>
           </a:xfrm>
           <a:prstGeom prst="roundRect">
             <a:avLst>
-              <a:gd name="adj" fmla="val 13043"/>
+              <a:gd name="adj" fmla="val 11111"/>
             </a:avLst>
           </a:prstGeom>
           <a:solidFill>
@@ -6947,14 +7048,14 @@
           </a:solidFill>
           <a:ln w="12700">
             <a:solidFill>
-              <a:srgbClr val="E2E8EF"/>
+              <a:srgbClr val="E3E6EA"/>
             </a:solidFill>
             <a:prstDash val="solid"/>
           </a:ln>
           <a:effectLst>
             <a:outerShdw sx="100000" sy="100000" kx="0" ky="0" algn="bl" rotWithShape="0" blurRad="127000" dist="25400" dir="5400000">
-              <a:srgbClr val="9AA5B1">
-                <a:alpha val="25000"/>
+              <a:srgbClr val="AAB2BC">
+                <a:alpha val="30000"/>
               </a:srgbClr>
             </a:outerShdw>
           </a:effectLst>
@@ -6968,14 +7069,14 @@
         </p:nvSpPr>
         <p:spPr>
           <a:xfrm>
-            <a:off x="7726680" y="3401568"/>
+            <a:off x="7726680" y="3346704"/>
             <a:ext cx="182880" cy="182880"/>
           </a:xfrm>
           <a:prstGeom prst="ellipse">
             <a:avLst/>
           </a:prstGeom>
           <a:solidFill>
-            <a:srgbClr val="0F462D"/>
+            <a:srgbClr val="1EC555"/>
           </a:solidFill>
           <a:ln/>
         </p:spPr>
@@ -6988,7 +7089,7 @@
         </p:nvSpPr>
         <p:spPr>
           <a:xfrm>
-            <a:off x="8046720" y="3310128"/>
+            <a:off x="8046720" y="3255264"/>
             <a:ext cx="3200400" cy="274320"/>
           </a:xfrm>
           <a:prstGeom prst="rect">
@@ -7007,7 +7108,7 @@
             <a:r>
               <a:rPr lang="en-US" sz="1450" b="1" dirty="0">
                 <a:solidFill>
-                  <a:srgbClr val="23282C"/>
+                  <a:srgbClr val="1B2733"/>
                 </a:solidFill>
                 <a:latin typeface="Calibri" pitchFamily="34" charset="0"/>
                 <a:ea typeface="Calibri" pitchFamily="34" charset="-122"/>
@@ -7027,8 +7128,8 @@
         </p:nvSpPr>
         <p:spPr>
           <a:xfrm>
-            <a:off x="8046720" y="3602736"/>
-            <a:ext cx="3200400" cy="320040"/>
+            <a:off x="8046720" y="3547872"/>
+            <a:ext cx="3200400" cy="274320"/>
           </a:xfrm>
           <a:prstGeom prst="rect">
             <a:avLst/>
@@ -7046,7 +7147,7 @@
             <a:r>
               <a:rPr lang="en-US" sz="1250" dirty="0">
                 <a:solidFill>
-                  <a:srgbClr val="6B7280"/>
+                  <a:srgbClr val="6E7A87"/>
                 </a:solidFill>
                 <a:latin typeface="Calibri" pitchFamily="34" charset="0"/>
                 <a:ea typeface="Calibri" pitchFamily="34" charset="-122"/>
@@ -7066,12 +7167,12 @@
         </p:nvSpPr>
         <p:spPr>
           <a:xfrm>
-            <a:off x="7452360" y="4187952"/>
-            <a:ext cx="3977640" cy="841248"/>
+            <a:off x="7452360" y="4114800"/>
+            <a:ext cx="3977640" cy="822960"/>
           </a:xfrm>
           <a:prstGeom prst="roundRect">
             <a:avLst>
-              <a:gd name="adj" fmla="val 13043"/>
+              <a:gd name="adj" fmla="val 11111"/>
             </a:avLst>
           </a:prstGeom>
           <a:solidFill>
@@ -7079,14 +7180,14 @@
           </a:solidFill>
           <a:ln w="12700">
             <a:solidFill>
-              <a:srgbClr val="E2E8EF"/>
+              <a:srgbClr val="E3E6EA"/>
             </a:solidFill>
             <a:prstDash val="solid"/>
           </a:ln>
           <a:effectLst>
             <a:outerShdw sx="100000" sy="100000" kx="0" ky="0" algn="bl" rotWithShape="0" blurRad="127000" dist="25400" dir="5400000">
-              <a:srgbClr val="9AA5B1">
-                <a:alpha val="25000"/>
+              <a:srgbClr val="AAB2BC">
+                <a:alpha val="30000"/>
               </a:srgbClr>
             </a:outerShdw>
           </a:effectLst>
@@ -7100,7 +7201,7 @@
         </p:nvSpPr>
         <p:spPr>
           <a:xfrm>
-            <a:off x="7726680" y="4389120"/>
+            <a:off x="7726680" y="4306824"/>
             <a:ext cx="182880" cy="182880"/>
           </a:xfrm>
           <a:prstGeom prst="ellipse">
@@ -7120,7 +7221,7 @@
         </p:nvSpPr>
         <p:spPr>
           <a:xfrm>
-            <a:off x="8046720" y="4297680"/>
+            <a:off x="8046720" y="4215384"/>
             <a:ext cx="3200400" cy="274320"/>
           </a:xfrm>
           <a:prstGeom prst="rect">
@@ -7139,7 +7240,7 @@
             <a:r>
               <a:rPr lang="en-US" sz="1450" b="1" dirty="0">
                 <a:solidFill>
-                  <a:srgbClr val="23282C"/>
+                  <a:srgbClr val="1B2733"/>
                 </a:solidFill>
                 <a:latin typeface="Calibri" pitchFamily="34" charset="0"/>
                 <a:ea typeface="Calibri" pitchFamily="34" charset="-122"/>
@@ -7159,8 +7260,8 @@
         </p:nvSpPr>
         <p:spPr>
           <a:xfrm>
-            <a:off x="8046720" y="4590288"/>
-            <a:ext cx="3200400" cy="320040"/>
+            <a:off x="8046720" y="4507992"/>
+            <a:ext cx="3200400" cy="274320"/>
           </a:xfrm>
           <a:prstGeom prst="rect">
             <a:avLst/>
@@ -7178,7 +7279,7 @@
             <a:r>
               <a:rPr lang="en-US" sz="1250" dirty="0">
                 <a:solidFill>
-                  <a:srgbClr val="6B7280"/>
+                  <a:srgbClr val="6E7A87"/>
                 </a:solidFill>
                 <a:latin typeface="Calibri" pitchFamily="34" charset="0"/>
                 <a:ea typeface="Calibri" pitchFamily="34" charset="-122"/>
@@ -7190,42 +7291,66 @@
           </a:p>
         </p:txBody>
       </p:sp>
-      <p:sp>
-        <p:nvSpPr>
-          <p:cNvPr id="30" name="Text 28"/>
-          <p:cNvSpPr/>
-          <p:nvPr/>
-        </p:nvSpPr>
-        <p:spPr>
-          <a:xfrm>
-            <a:off x="731520" y="6199632"/>
-            <a:ext cx="10698480" cy="274320"/>
-          </a:xfrm>
-          <a:prstGeom prst="rect">
-            <a:avLst/>
-          </a:prstGeom>
-          <a:noFill/>
-          <a:ln/>
-        </p:spPr>
-        <p:txBody>
-          <a:bodyPr wrap="square" lIns="0" tIns="0" rIns="0" bIns="0" rtlCol="0" anchor="ctr"/>
-          <a:lstStyle/>
-          <a:p>
-            <a:pPr indent="0" marL="0">
-              <a:buNone/>
-            </a:pPr>
-            <a:r>
-              <a:rPr lang="en-US" sz="1100" dirty="0">
-                <a:solidFill>
-                  <a:srgbClr val="A5AEB8"/>
-                </a:solidFill>
-                <a:latin typeface="Calibri" pitchFamily="34" charset="0"/>
-                <a:ea typeface="Calibri" pitchFamily="34" charset="-122"/>
-                <a:cs typeface="Calibri" pitchFamily="34" charset="-120"/>
-              </a:rPr>
-              <a:t>Mercadinho do Lito · Lito Aviation Academy</a:t>
-            </a:r>
-            <a:endParaRPr lang="en-US" sz="1100" dirty="0"/>
+      <p:pic>
+        <p:nvPicPr>
+          <p:cNvPr id="30" name="Image 0" descr="preencoded.png">    </p:cNvPr>
+          <p:cNvPicPr>
+            <a:picLocks noChangeAspect="1"/>
+          </p:cNvPicPr>
+          <p:nvPr/>
+        </p:nvPicPr>
+        <p:blipFill>
+          <a:blip r:embed="rId1"/>
+          <a:stretch>
+            <a:fillRect/>
+          </a:stretch>
+        </p:blipFill>
+        <p:spPr>
+          <a:xfrm>
+            <a:off x="731520" y="6108192"/>
+            <a:ext cx="1051560" cy="493776"/>
+          </a:xfrm>
+          <a:prstGeom prst="rect">
+            <a:avLst/>
+          </a:prstGeom>
+        </p:spPr>
+      </p:pic>
+      <p:sp>
+        <p:nvSpPr>
+          <p:cNvPr id="31" name="Text 28"/>
+          <p:cNvSpPr/>
+          <p:nvPr/>
+        </p:nvSpPr>
+        <p:spPr>
+          <a:xfrm>
+            <a:off x="1920240" y="6199632"/>
+            <a:ext cx="5486400" cy="274320"/>
+          </a:xfrm>
+          <a:prstGeom prst="rect">
+            <a:avLst/>
+          </a:prstGeom>
+          <a:noFill/>
+          <a:ln/>
+        </p:spPr>
+        <p:txBody>
+          <a:bodyPr wrap="square" lIns="0" tIns="0" rIns="0" bIns="0" rtlCol="0" anchor="ctr"/>
+          <a:lstStyle/>
+          <a:p>
+            <a:pPr indent="0" marL="0">
+              <a:buNone/>
+            </a:pPr>
+            <a:r>
+              <a:rPr lang="en-US" sz="1050" dirty="0">
+                <a:solidFill>
+                  <a:srgbClr val="B0AAAA"/>
+                </a:solidFill>
+                <a:latin typeface="Calibri" pitchFamily="34" charset="0"/>
+                <a:ea typeface="Calibri" pitchFamily="34" charset="-122"/>
+                <a:cs typeface="Calibri" pitchFamily="34" charset="-120"/>
+              </a:rPr>
+              <a:t>Mercadinho do Lito · uso interno</a:t>
+            </a:r>
+            <a:endParaRPr lang="en-US" sz="1050" dirty="0"/>
           </a:p>
         </p:txBody>
       </p:sp>
@@ -7243,7 +7368,7 @@
     <p:bg>
       <p:bgPr>
         <a:solidFill>
-          <a:srgbClr val="F2F5F9"/>
+          <a:srgbClr val="F4F5F7"/>
         </a:solidFill>
       </p:bgPr>
     </p:bg>
@@ -7269,26 +7394,26 @@
         </p:nvSpPr>
         <p:spPr>
           <a:xfrm>
-            <a:off x="731520" y="457200"/>
-            <a:ext cx="2743200" cy="274320"/>
-          </a:xfrm>
-          <a:prstGeom prst="rect">
-            <a:avLst/>
-          </a:prstGeom>
-          <a:noFill/>
-          <a:ln/>
-        </p:spPr>
-        <p:txBody>
-          <a:bodyPr wrap="square" lIns="0" tIns="0" rIns="0" bIns="0" rtlCol="0" anchor="ctr"/>
-          <a:lstStyle/>
-          <a:p>
-            <a:pPr algn="l" indent="0" marL="0">
+            <a:off x="731520" y="475488"/>
+            <a:ext cx="4572000" cy="274320"/>
+          </a:xfrm>
+          <a:prstGeom prst="rect">
+            <a:avLst/>
+          </a:prstGeom>
+          <a:noFill/>
+          <a:ln/>
+        </p:spPr>
+        <p:txBody>
+          <a:bodyPr wrap="square" lIns="0" tIns="0" rIns="0" bIns="0" rtlCol="0" anchor="ctr"/>
+          <a:lstStyle/>
+          <a:p>
+            <a:pPr indent="0" marL="0">
               <a:buNone/>
             </a:pPr>
             <a:r>
               <a:rPr lang="en-US" sz="1200" b="1" spc="250" kern="0" dirty="0">
                 <a:solidFill>
-                  <a:srgbClr val="0F462D"/>
+                  <a:srgbClr val="002E53"/>
                 </a:solidFill>
                 <a:latin typeface="Calibri" pitchFamily="34" charset="0"/>
                 <a:ea typeface="Calibri" pitchFamily="34" charset="-122"/>
@@ -7308,26 +7433,26 @@
         </p:nvSpPr>
         <p:spPr>
           <a:xfrm>
-            <a:off x="731520" y="777240"/>
-            <a:ext cx="10698480" cy="777240"/>
-          </a:xfrm>
-          <a:prstGeom prst="rect">
-            <a:avLst/>
-          </a:prstGeom>
-          <a:noFill/>
-          <a:ln/>
-        </p:spPr>
-        <p:txBody>
-          <a:bodyPr wrap="square" lIns="0" tIns="0" rIns="0" bIns="0" rtlCol="0" anchor="ctr"/>
-          <a:lstStyle/>
-          <a:p>
-            <a:pPr indent="0" marL="0">
-              <a:buNone/>
-            </a:pPr>
-            <a:r>
-              <a:rPr lang="en-US" sz="3800" b="1" dirty="0">
-                <a:solidFill>
-                  <a:srgbClr val="0F462D"/>
+            <a:off x="731520" y="749808"/>
+            <a:ext cx="10698480" cy="731520"/>
+          </a:xfrm>
+          <a:prstGeom prst="rect">
+            <a:avLst/>
+          </a:prstGeom>
+          <a:noFill/>
+          <a:ln/>
+        </p:spPr>
+        <p:txBody>
+          <a:bodyPr wrap="square" lIns="0" tIns="0" rIns="0" bIns="0" rtlCol="0" anchor="ctr"/>
+          <a:lstStyle/>
+          <a:p>
+            <a:pPr indent="0" marL="0">
+              <a:buNone/>
+            </a:pPr>
+            <a:r>
+              <a:rPr lang="en-US" sz="3600" b="1" dirty="0">
+                <a:solidFill>
+                  <a:srgbClr val="002E53"/>
                 </a:solidFill>
                 <a:latin typeface="Calibri" pitchFamily="34" charset="0"/>
                 <a:ea typeface="Calibri" pitchFamily="34" charset="-122"/>
@@ -7335,7 +7460,7 @@
               </a:rPr>
               <a:t>Para tudo funcionar bem</a:t>
             </a:r>
-            <a:endParaRPr lang="en-US" sz="3800" dirty="0"/>
+            <a:endParaRPr lang="en-US" sz="3600" dirty="0"/>
           </a:p>
         </p:txBody>
       </p:sp>
@@ -7348,11 +7473,11 @@
         <p:spPr>
           <a:xfrm>
             <a:off x="731520" y="1874520"/>
-            <a:ext cx="5184648" cy="1188720"/>
+            <a:ext cx="5184648" cy="1143000"/>
           </a:xfrm>
           <a:prstGeom prst="roundRect">
             <a:avLst>
-              <a:gd name="adj" fmla="val 9231"/>
+              <a:gd name="adj" fmla="val 8000"/>
             </a:avLst>
           </a:prstGeom>
           <a:solidFill>
@@ -7360,14 +7485,14 @@
           </a:solidFill>
           <a:ln w="12700">
             <a:solidFill>
-              <a:srgbClr val="E2E8EF"/>
+              <a:srgbClr val="E3E6EA"/>
             </a:solidFill>
             <a:prstDash val="solid"/>
           </a:ln>
           <a:effectLst>
             <a:outerShdw sx="100000" sy="100000" kx="0" ky="0" algn="bl" rotWithShape="0" blurRad="127000" dist="25400" dir="5400000">
-              <a:srgbClr val="9AA5B1">
-                <a:alpha val="25000"/>
+              <a:srgbClr val="AAB2BC">
+                <a:alpha val="30000"/>
               </a:srgbClr>
             </a:outerShdw>
           </a:effectLst>
@@ -7400,7 +7525,7 @@
             <a:r>
               <a:rPr lang="en-US" sz="1600" b="1" dirty="0">
                 <a:solidFill>
-                  <a:srgbClr val="0F462D"/>
+                  <a:srgbClr val="002E53"/>
                 </a:solidFill>
                 <a:latin typeface="Calibri" pitchFamily="34" charset="0"/>
                 <a:ea typeface="Calibri" pitchFamily="34" charset="-122"/>
@@ -7421,7 +7546,7 @@
         <p:spPr>
           <a:xfrm>
             <a:off x="1097280" y="2350008"/>
-            <a:ext cx="4480560" cy="548640"/>
+            <a:ext cx="4480560" cy="502920"/>
           </a:xfrm>
           <a:prstGeom prst="rect">
             <a:avLst/>
@@ -7442,13 +7567,13 @@
             <a:r>
               <a:rPr lang="en-US" sz="1300" dirty="0">
                 <a:solidFill>
-                  <a:srgbClr val="6B7280"/>
-                </a:solidFill>
-                <a:latin typeface="Calibri" pitchFamily="34" charset="0"/>
-                <a:ea typeface="Calibri" pitchFamily="34" charset="-122"/>
-                <a:cs typeface="Calibri" pitchFamily="34" charset="-120"/>
-              </a:rPr>
-              <a:t>Pegou o produto, faça o pedido no mesmo momento — assim nada é esquecido.</a:t>
+                  <a:srgbClr val="6E7A87"/>
+                </a:solidFill>
+                <a:latin typeface="Calibri" pitchFamily="34" charset="0"/>
+                <a:ea typeface="Calibri" pitchFamily="34" charset="-122"/>
+                <a:cs typeface="Calibri" pitchFamily="34" charset="-120"/>
+              </a:rPr>
+              <a:t>Pegou o produto, faça o pedido no mesmo momento.</a:t>
             </a:r>
             <a:endParaRPr lang="en-US" sz="1300" dirty="0"/>
           </a:p>
@@ -7463,11 +7588,11 @@
         <p:spPr>
           <a:xfrm>
             <a:off x="6245352" y="1874520"/>
-            <a:ext cx="5184648" cy="1188720"/>
+            <a:ext cx="5184648" cy="1143000"/>
           </a:xfrm>
           <a:prstGeom prst="roundRect">
             <a:avLst>
-              <a:gd name="adj" fmla="val 9231"/>
+              <a:gd name="adj" fmla="val 8000"/>
             </a:avLst>
           </a:prstGeom>
           <a:solidFill>
@@ -7475,14 +7600,14 @@
           </a:solidFill>
           <a:ln w="12700">
             <a:solidFill>
-              <a:srgbClr val="E2E8EF"/>
+              <a:srgbClr val="E3E6EA"/>
             </a:solidFill>
             <a:prstDash val="solid"/>
           </a:ln>
           <a:effectLst>
             <a:outerShdw sx="100000" sy="100000" kx="0" ky="0" algn="bl" rotWithShape="0" blurRad="127000" dist="25400" dir="5400000">
-              <a:srgbClr val="9AA5B1">
-                <a:alpha val="25000"/>
+              <a:srgbClr val="AAB2BC">
+                <a:alpha val="30000"/>
               </a:srgbClr>
             </a:outerShdw>
           </a:effectLst>
@@ -7515,7 +7640,7 @@
             <a:r>
               <a:rPr lang="en-US" sz="1600" b="1" dirty="0">
                 <a:solidFill>
-                  <a:srgbClr val="0F462D"/>
+                  <a:srgbClr val="002E53"/>
                 </a:solidFill>
                 <a:latin typeface="Calibri" pitchFamily="34" charset="0"/>
                 <a:ea typeface="Calibri" pitchFamily="34" charset="-122"/>
@@ -7536,7 +7661,7 @@
         <p:spPr>
           <a:xfrm>
             <a:off x="6611112" y="2350008"/>
-            <a:ext cx="4480560" cy="548640"/>
+            <a:ext cx="4480560" cy="502920"/>
           </a:xfrm>
           <a:prstGeom prst="rect">
             <a:avLst/>
@@ -7557,13 +7682,13 @@
             <a:r>
               <a:rPr lang="en-US" sz="1300" dirty="0">
                 <a:solidFill>
-                  <a:srgbClr val="6B7280"/>
-                </a:solidFill>
-                <a:latin typeface="Calibri" pitchFamily="34" charset="0"/>
-                <a:ea typeface="Calibri" pitchFamily="34" charset="-122"/>
-                <a:cs typeface="Calibri" pitchFamily="34" charset="-120"/>
-              </a:rPr>
-              <a:t>Coloque tudo que pegou no mesmo carrinho e pague de uma vez só.</a:t>
+                  <a:srgbClr val="6E7A87"/>
+                </a:solidFill>
+                <a:latin typeface="Calibri" pitchFamily="34" charset="0"/>
+                <a:ea typeface="Calibri" pitchFamily="34" charset="-122"/>
+                <a:cs typeface="Calibri" pitchFamily="34" charset="-120"/>
+              </a:rPr>
+              <a:t>Coloque tudo no mesmo carrinho e pague de uma vez só.</a:t>
             </a:r>
             <a:endParaRPr lang="en-US" sz="1300" dirty="0"/>
           </a:p>
@@ -7577,12 +7702,12 @@
         </p:nvSpPr>
         <p:spPr>
           <a:xfrm>
-            <a:off x="731520" y="3291840"/>
-            <a:ext cx="5184648" cy="1188720"/>
+            <a:off x="731520" y="3246120"/>
+            <a:ext cx="5184648" cy="1143000"/>
           </a:xfrm>
           <a:prstGeom prst="roundRect">
             <a:avLst>
-              <a:gd name="adj" fmla="val 9231"/>
+              <a:gd name="adj" fmla="val 8000"/>
             </a:avLst>
           </a:prstGeom>
           <a:solidFill>
@@ -7590,14 +7715,14 @@
           </a:solidFill>
           <a:ln w="12700">
             <a:solidFill>
-              <a:srgbClr val="E2E8EF"/>
+              <a:srgbClr val="E3E6EA"/>
             </a:solidFill>
             <a:prstDash val="solid"/>
           </a:ln>
           <a:effectLst>
             <a:outerShdw sx="100000" sy="100000" kx="0" ky="0" algn="bl" rotWithShape="0" blurRad="127000" dist="25400" dir="5400000">
-              <a:srgbClr val="9AA5B1">
-                <a:alpha val="25000"/>
+              <a:srgbClr val="AAB2BC">
+                <a:alpha val="30000"/>
               </a:srgbClr>
             </a:outerShdw>
           </a:effectLst>
@@ -7611,7 +7736,7 @@
         </p:nvSpPr>
         <p:spPr>
           <a:xfrm>
-            <a:off x="1097280" y="3456432"/>
+            <a:off x="1097280" y="3410712"/>
             <a:ext cx="4480560" cy="274320"/>
           </a:xfrm>
           <a:prstGeom prst="rect">
@@ -7630,7 +7755,7 @@
             <a:r>
               <a:rPr lang="en-US" sz="1600" b="1" dirty="0">
                 <a:solidFill>
-                  <a:srgbClr val="0F462D"/>
+                  <a:srgbClr val="002E53"/>
                 </a:solidFill>
                 <a:latin typeface="Calibri" pitchFamily="34" charset="0"/>
                 <a:ea typeface="Calibri" pitchFamily="34" charset="-122"/>
@@ -7650,8 +7775,8 @@
         </p:nvSpPr>
         <p:spPr>
           <a:xfrm>
-            <a:off x="1097280" y="3767328"/>
-            <a:ext cx="4480560" cy="548640"/>
+            <a:off x="1097280" y="3721608"/>
+            <a:ext cx="4480560" cy="502920"/>
           </a:xfrm>
           <a:prstGeom prst="rect">
             <a:avLst/>
@@ -7672,13 +7797,13 @@
             <a:r>
               <a:rPr lang="en-US" sz="1300" dirty="0">
                 <a:solidFill>
-                  <a:srgbClr val="6B7280"/>
-                </a:solidFill>
-                <a:latin typeface="Calibri" pitchFamily="34" charset="0"/>
-                <a:ea typeface="Calibri" pitchFamily="34" charset="-122"/>
-                <a:cs typeface="Calibri" pitchFamily="34" charset="-120"/>
-              </a:rPr>
-              <a:t>Sem comprovante o pedido não é concluído. Anexe antes de sair da tela.</a:t>
+                  <a:srgbClr val="6E7A87"/>
+                </a:solidFill>
+                <a:latin typeface="Calibri" pitchFamily="34" charset="0"/>
+                <a:ea typeface="Calibri" pitchFamily="34" charset="-122"/>
+                <a:cs typeface="Calibri" pitchFamily="34" charset="-120"/>
+              </a:rPr>
+              <a:t>Sem comprovante o pedido não é concluído.</a:t>
             </a:r>
             <a:endParaRPr lang="en-US" sz="1300" dirty="0"/>
           </a:p>
@@ -7692,12 +7817,12 @@
         </p:nvSpPr>
         <p:spPr>
           <a:xfrm>
-            <a:off x="6245352" y="3291840"/>
-            <a:ext cx="5184648" cy="1188720"/>
+            <a:off x="6245352" y="3246120"/>
+            <a:ext cx="5184648" cy="1143000"/>
           </a:xfrm>
           <a:prstGeom prst="roundRect">
             <a:avLst>
-              <a:gd name="adj" fmla="val 9231"/>
+              <a:gd name="adj" fmla="val 8000"/>
             </a:avLst>
           </a:prstGeom>
           <a:solidFill>
@@ -7705,14 +7830,14 @@
           </a:solidFill>
           <a:ln w="12700">
             <a:solidFill>
-              <a:srgbClr val="E2E8EF"/>
+              <a:srgbClr val="E3E6EA"/>
             </a:solidFill>
             <a:prstDash val="solid"/>
           </a:ln>
           <a:effectLst>
             <a:outerShdw sx="100000" sy="100000" kx="0" ky="0" algn="bl" rotWithShape="0" blurRad="127000" dist="25400" dir="5400000">
-              <a:srgbClr val="9AA5B1">
-                <a:alpha val="25000"/>
+              <a:srgbClr val="AAB2BC">
+                <a:alpha val="30000"/>
               </a:srgbClr>
             </a:outerShdw>
           </a:effectLst>
@@ -7726,7 +7851,7 @@
         </p:nvSpPr>
         <p:spPr>
           <a:xfrm>
-            <a:off x="6611112" y="3456432"/>
+            <a:off x="6611112" y="3410712"/>
             <a:ext cx="4480560" cy="274320"/>
           </a:xfrm>
           <a:prstGeom prst="rect">
@@ -7745,7 +7870,7 @@
             <a:r>
               <a:rPr lang="en-US" sz="1600" b="1" dirty="0">
                 <a:solidFill>
-                  <a:srgbClr val="0F462D"/>
+                  <a:srgbClr val="002E53"/>
                 </a:solidFill>
                 <a:latin typeface="Calibri" pitchFamily="34" charset="0"/>
                 <a:ea typeface="Calibri" pitchFamily="34" charset="-122"/>
@@ -7765,8 +7890,8 @@
         </p:nvSpPr>
         <p:spPr>
           <a:xfrm>
-            <a:off x="6611112" y="3767328"/>
-            <a:ext cx="4480560" cy="548640"/>
+            <a:off x="6611112" y="3721608"/>
+            <a:ext cx="4480560" cy="502920"/>
           </a:xfrm>
           <a:prstGeom prst="rect">
             <a:avLst/>
@@ -7787,13 +7912,13 @@
             <a:r>
               <a:rPr lang="en-US" sz="1300" dirty="0">
                 <a:solidFill>
-                  <a:srgbClr val="6B7280"/>
-                </a:solidFill>
-                <a:latin typeface="Calibri" pitchFamily="34" charset="0"/>
-                <a:ea typeface="Calibri" pitchFamily="34" charset="-122"/>
-                <a:cs typeface="Calibri" pitchFamily="34" charset="-120"/>
-              </a:rPr>
-              <a:t>Transfira exatamente o total do pedido, para a conferência fechar certinho.</a:t>
+                  <a:srgbClr val="6E7A87"/>
+                </a:solidFill>
+                <a:latin typeface="Calibri" pitchFamily="34" charset="0"/>
+                <a:ea typeface="Calibri" pitchFamily="34" charset="-122"/>
+                <a:cs typeface="Calibri" pitchFamily="34" charset="-120"/>
+              </a:rPr>
+              <a:t>Transfira exatamente o total do pedido.</a:t>
             </a:r>
             <a:endParaRPr lang="en-US" sz="1300" dirty="0"/>
           </a:p>
@@ -7807,16 +7932,16 @@
         </p:nvSpPr>
         <p:spPr>
           <a:xfrm>
-            <a:off x="731520" y="4846320"/>
+            <a:off x="731520" y="4754880"/>
             <a:ext cx="10698480" cy="914400"/>
           </a:xfrm>
           <a:prstGeom prst="roundRect">
             <a:avLst>
-              <a:gd name="adj" fmla="val 12000"/>
+              <a:gd name="adj" fmla="val 10000"/>
             </a:avLst>
           </a:prstGeom>
           <a:solidFill>
-            <a:srgbClr val="0F462D"/>
+            <a:srgbClr val="002E53"/>
           </a:solidFill>
           <a:ln/>
         </p:spPr>
@@ -7829,7 +7954,7 @@
         </p:nvSpPr>
         <p:spPr>
           <a:xfrm>
-            <a:off x="1097280" y="5074920"/>
+            <a:off x="1097280" y="4983480"/>
             <a:ext cx="9966960" cy="457200"/>
           </a:xfrm>
           <a:prstGeom prst="rect">
@@ -7848,7 +7973,7 @@
             <a:r>
               <a:rPr lang="en-US" sz="1500" b="1" dirty="0">
                 <a:solidFill>
-                  <a:srgbClr val="29DF8C"/>
+                  <a:srgbClr val="1EC555"/>
                 </a:solidFill>
                 <a:latin typeface="Calibri" pitchFamily="34" charset="0"/>
                 <a:ea typeface="Calibri" pitchFamily="34" charset="-122"/>
@@ -7868,48 +7993,72 @@
                 <a:ea typeface="Calibri" pitchFamily="34" charset="-122"/>
                 <a:cs typeface="Calibri" pitchFamily="34" charset="-120"/>
               </a:rPr>
-              <a:t>Fale com o Gabriel. O acesso, os produtos e a conferência dos pagamentos passam por ele.</a:t>
+              <a:t>Fale com a Mayane. O acesso, os produtos e a conferência dos pagamentos passam por ela.</a:t>
             </a:r>
             <a:endParaRPr lang="en-US" sz="1500" dirty="0"/>
           </a:p>
         </p:txBody>
       </p:sp>
-      <p:sp>
-        <p:nvSpPr>
-          <p:cNvPr id="18" name="Text 16"/>
-          <p:cNvSpPr/>
-          <p:nvPr/>
-        </p:nvSpPr>
-        <p:spPr>
-          <a:xfrm>
-            <a:off x="731520" y="6199632"/>
-            <a:ext cx="10698480" cy="274320"/>
-          </a:xfrm>
-          <a:prstGeom prst="rect">
-            <a:avLst/>
-          </a:prstGeom>
-          <a:noFill/>
-          <a:ln/>
-        </p:spPr>
-        <p:txBody>
-          <a:bodyPr wrap="square" lIns="0" tIns="0" rIns="0" bIns="0" rtlCol="0" anchor="ctr"/>
-          <a:lstStyle/>
-          <a:p>
-            <a:pPr indent="0" marL="0">
-              <a:buNone/>
-            </a:pPr>
-            <a:r>
-              <a:rPr lang="en-US" sz="1100" dirty="0">
-                <a:solidFill>
-                  <a:srgbClr val="A5AEB8"/>
-                </a:solidFill>
-                <a:latin typeface="Calibri" pitchFamily="34" charset="0"/>
-                <a:ea typeface="Calibri" pitchFamily="34" charset="-122"/>
-                <a:cs typeface="Calibri" pitchFamily="34" charset="-120"/>
-              </a:rPr>
-              <a:t>Mercadinho do Lito · Lito Aviation Academy</a:t>
-            </a:r>
-            <a:endParaRPr lang="en-US" sz="1100" dirty="0"/>
+      <p:pic>
+        <p:nvPicPr>
+          <p:cNvPr id="18" name="Image 0" descr="preencoded.png">    </p:cNvPr>
+          <p:cNvPicPr>
+            <a:picLocks noChangeAspect="1"/>
+          </p:cNvPicPr>
+          <p:nvPr/>
+        </p:nvPicPr>
+        <p:blipFill>
+          <a:blip r:embed="rId1"/>
+          <a:stretch>
+            <a:fillRect/>
+          </a:stretch>
+        </p:blipFill>
+        <p:spPr>
+          <a:xfrm>
+            <a:off x="731520" y="6108192"/>
+            <a:ext cx="1051560" cy="493776"/>
+          </a:xfrm>
+          <a:prstGeom prst="rect">
+            <a:avLst/>
+          </a:prstGeom>
+        </p:spPr>
+      </p:pic>
+      <p:sp>
+        <p:nvSpPr>
+          <p:cNvPr id="19" name="Text 16"/>
+          <p:cNvSpPr/>
+          <p:nvPr/>
+        </p:nvSpPr>
+        <p:spPr>
+          <a:xfrm>
+            <a:off x="1920240" y="6199632"/>
+            <a:ext cx="5486400" cy="274320"/>
+          </a:xfrm>
+          <a:prstGeom prst="rect">
+            <a:avLst/>
+          </a:prstGeom>
+          <a:noFill/>
+          <a:ln/>
+        </p:spPr>
+        <p:txBody>
+          <a:bodyPr wrap="square" lIns="0" tIns="0" rIns="0" bIns="0" rtlCol="0" anchor="ctr"/>
+          <a:lstStyle/>
+          <a:p>
+            <a:pPr indent="0" marL="0">
+              <a:buNone/>
+            </a:pPr>
+            <a:r>
+              <a:rPr lang="en-US" sz="1050" dirty="0">
+                <a:solidFill>
+                  <a:srgbClr val="B0AAAA"/>
+                </a:solidFill>
+                <a:latin typeface="Calibri" pitchFamily="34" charset="0"/>
+                <a:ea typeface="Calibri" pitchFamily="34" charset="-122"/>
+                <a:cs typeface="Calibri" pitchFamily="34" charset="-120"/>
+              </a:rPr>
+              <a:t>Mercadinho do Lito · uso interno</a:t>
+            </a:r>
+            <a:endParaRPr lang="en-US" sz="1050" dirty="0"/>
           </a:p>
         </p:txBody>
       </p:sp>
